--- a/Day 30/SAP Build Training Day 30.pptx
+++ b/Day 30/SAP Build Training Day 30.pptx
@@ -6,10 +6,10 @@
     <p:sldMasterId id="2147483689" r:id="rId2"/>
   </p:sldMasterIdLst>
   <p:notesMasterIdLst>
-    <p:notesMasterId r:id="rId14"/>
+    <p:notesMasterId r:id="rId25"/>
   </p:notesMasterIdLst>
   <p:handoutMasterIdLst>
-    <p:handoutMasterId r:id="rId15"/>
+    <p:handoutMasterId r:id="rId26"/>
   </p:handoutMasterIdLst>
   <p:sldIdLst>
     <p:sldId id="256" r:id="rId3"/>
@@ -18,11 +18,22 @@
     <p:sldId id="278" r:id="rId6"/>
     <p:sldId id="537" r:id="rId7"/>
     <p:sldId id="538" r:id="rId8"/>
-    <p:sldId id="539" r:id="rId9"/>
-    <p:sldId id="540" r:id="rId10"/>
-    <p:sldId id="495" r:id="rId11"/>
-    <p:sldId id="496" r:id="rId12"/>
-    <p:sldId id="497" r:id="rId13"/>
+    <p:sldId id="4712" r:id="rId9"/>
+    <p:sldId id="4714" r:id="rId10"/>
+    <p:sldId id="4713" r:id="rId11"/>
+    <p:sldId id="4715" r:id="rId12"/>
+    <p:sldId id="4716" r:id="rId13"/>
+    <p:sldId id="4717" r:id="rId14"/>
+    <p:sldId id="4719" r:id="rId15"/>
+    <p:sldId id="4721" r:id="rId16"/>
+    <p:sldId id="4722" r:id="rId17"/>
+    <p:sldId id="4723" r:id="rId18"/>
+    <p:sldId id="4724" r:id="rId19"/>
+    <p:sldId id="4725" r:id="rId20"/>
+    <p:sldId id="540" r:id="rId21"/>
+    <p:sldId id="495" r:id="rId22"/>
+    <p:sldId id="496" r:id="rId23"/>
+    <p:sldId id="497" r:id="rId24"/>
   </p:sldIdLst>
   <p:sldSz cx="9144000" cy="5143500" type="screen16x9"/>
   <p:notesSz cx="6858000" cy="9144000"/>
@@ -236,7 +247,7 @@
           <a:p>
             <a:fld id="{74CD1819-8EAB-4094-BBB1-E11C3AABA846}" type="datetimeFigureOut">
               <a:rPr lang="en-US" smtClean="0"/>
-              <a:t>8/24/2025</a:t>
+              <a:t>8/27/2025</a:t>
             </a:fld>
             <a:endParaRPr lang="en-US"/>
           </a:p>
@@ -400,33 +411,6 @@
 </inkml:ink>
 </file>
 
-<file path=ppt/ink/ink4.xml><?xml version="1.0" encoding="utf-8"?>
-<inkml:ink xmlns:inkml="http://www.w3.org/2003/InkML">
-  <inkml:definitions>
-    <inkml:context xml:id="ctx0">
-      <inkml:inkSource xml:id="inkSrc0">
-        <inkml:traceFormat>
-          <inkml:channel name="X" type="integer" min="-2.14748E9" max="2.14748E9" units="cm"/>
-          <inkml:channel name="Y" type="integer" min="-2.14748E9" max="2.14748E9" units="cm"/>
-          <inkml:channel name="F" type="integer" max="32767" units="dev"/>
-        </inkml:traceFormat>
-        <inkml:channelProperties>
-          <inkml:channelProperty channel="X" name="resolution" value="1000" units="1/cm"/>
-          <inkml:channelProperty channel="Y" name="resolution" value="1000" units="1/cm"/>
-          <inkml:channelProperty channel="F" name="resolution" value="0" units="1/dev"/>
-        </inkml:channelProperties>
-      </inkml:inkSource>
-      <inkml:timestamp xml:id="ts0" timeString="2025-04-14T13:39:48.605"/>
-    </inkml:context>
-    <inkml:brush xml:id="br0">
-      <inkml:brushProperty name="width" value="0.05" units="cm"/>
-      <inkml:brushProperty name="height" value="0.05" units="cm"/>
-    </inkml:brush>
-  </inkml:definitions>
-  <inkml:trace contextRef="#ctx0" brushRef="#br0">0 0 24575,'0'0'-8191</inkml:trace>
-</inkml:ink>
-</file>
-
 <file path=ppt/notesMasters/notesMaster1.xml><?xml version="1.0" encoding="utf-8"?>
 <p:notesMaster xmlns:a="http://schemas.openxmlformats.org/drawingml/2006/main" xmlns:r="http://schemas.openxmlformats.org/officeDocument/2006/relationships" xmlns:p="http://schemas.openxmlformats.org/presentationml/2006/main">
   <p:cSld>
@@ -509,7 +493,7 @@
           <a:p>
             <a:fld id="{D976A73D-237B-4034-AB8C-962174A8D351}" type="datetimeFigureOut">
               <a:rPr lang="en-US" smtClean="0"/>
-              <a:t>8/24/2025</a:t>
+              <a:t>8/27/2025</a:t>
             </a:fld>
             <a:endParaRPr lang="en-US"/>
           </a:p>
@@ -974,7 +958,7 @@
                 <a:tabLst/>
                 <a:defRPr/>
               </a:pPr>
-              <a:t>11</a:t>
+              <a:t>22</a:t>
             </a:fld>
             <a:endParaRPr kumimoji="0" lang="en-US" sz="1200" b="0" i="0" u="none" strike="noStrike" kern="1200" cap="none" spc="0" normalizeH="0" baseline="0" noProof="0">
               <a:ln>
@@ -1211,7 +1195,7 @@
             <a:fld id="{1D8BD707-D9CF-40AE-B4C6-C98DA3205C09}" type="datetimeFigureOut">
               <a:rPr lang="en-US" smtClean="0"/>
               <a:pPr/>
-              <a:t>8/24/2025</a:t>
+              <a:t>8/27/2025</a:t>
             </a:fld>
             <a:endParaRPr lang="en-US"/>
           </a:p>
@@ -2609,7 +2593,7 @@
             <a:fld id="{9578D6DB-6798-42D2-B9AD-FC6F1C72FC30}" type="datetimeFigureOut">
               <a:rPr lang="en-US" smtClean="0"/>
               <a:pPr/>
-              <a:t>8/24/2025</a:t>
+              <a:t>8/27/2025</a:t>
             </a:fld>
             <a:endParaRPr lang="en-US"/>
           </a:p>
@@ -2734,7 +2718,7 @@
             <a:fld id="{425404F2-BE9A-4460-8815-8F645183555F}" type="datetimeFigureOut">
               <a:rPr lang="en-US" smtClean="0"/>
               <a:pPr/>
-              <a:t>8/24/2025</a:t>
+              <a:t>8/27/2025</a:t>
             </a:fld>
             <a:endParaRPr lang="en-US"/>
           </a:p>
@@ -2909,7 +2893,7 @@
             <a:fld id="{425404F2-BE9A-4460-8815-8F645183555F}" type="datetimeFigureOut">
               <a:rPr lang="en-US" smtClean="0"/>
               <a:pPr/>
-              <a:t>8/24/2025</a:t>
+              <a:t>8/27/2025</a:t>
             </a:fld>
             <a:endParaRPr lang="en-US"/>
           </a:p>
@@ -3006,7 +2990,7 @@
             <a:fld id="{425404F2-BE9A-4460-8815-8F645183555F}" type="datetimeFigureOut">
               <a:rPr lang="en-US" smtClean="0"/>
               <a:pPr/>
-              <a:t>8/24/2025</a:t>
+              <a:t>8/27/2025</a:t>
             </a:fld>
             <a:endParaRPr lang="en-US"/>
           </a:p>
@@ -3394,7 +3378,7 @@
             <a:fld id="{425404F2-BE9A-4460-8815-8F645183555F}" type="datetimeFigureOut">
               <a:rPr lang="en-US" smtClean="0"/>
               <a:pPr/>
-              <a:t>8/24/2025</a:t>
+              <a:t>8/27/2025</a:t>
             </a:fld>
             <a:endParaRPr lang="en-US"/>
           </a:p>
@@ -3569,7 +3553,7 @@
             <a:fld id="{425404F2-BE9A-4460-8815-8F645183555F}" type="datetimeFigureOut">
               <a:rPr lang="en-US" smtClean="0"/>
               <a:pPr/>
-              <a:t>8/24/2025</a:t>
+              <a:t>8/27/2025</a:t>
             </a:fld>
             <a:endParaRPr lang="en-US"/>
           </a:p>
@@ -3813,7 +3797,7 @@
             <a:fld id="{425404F2-BE9A-4460-8815-8F645183555F}" type="datetimeFigureOut">
               <a:rPr lang="en-US" smtClean="0"/>
               <a:pPr/>
-              <a:t>8/24/2025</a:t>
+              <a:t>8/27/2025</a:t>
             </a:fld>
             <a:endParaRPr lang="en-US"/>
           </a:p>
@@ -5827,7 +5811,7 @@
           <a:p>
             <a:fld id="{940CB006-912F-44E1-9560-9CBFEBE946EF}" type="datetime4">
               <a:rPr lang="en-US" smtClean="0"/>
-              <a:t>August 24, 2025</a:t>
+              <a:t>August 27, 2025</a:t>
             </a:fld>
             <a:endParaRPr lang="en-US"/>
           </a:p>
@@ -6352,7 +6336,7 @@
             <a:fld id="{425404F2-BE9A-4460-8815-8F645183555F}" type="datetimeFigureOut">
               <a:rPr lang="en-US" smtClean="0"/>
               <a:pPr/>
-              <a:t>8/24/2025</a:t>
+              <a:t>8/27/2025</a:t>
             </a:fld>
             <a:endParaRPr lang="en-US"/>
           </a:p>
@@ -7037,6 +7021,3736 @@
   <p:cSld>
     <p:spTree>
       <p:nvGrpSpPr>
+        <p:cNvPr id="1" name="">
+          <a:extLst>
+            <a:ext uri="{FF2B5EF4-FFF2-40B4-BE49-F238E27FC236}">
+              <a16:creationId xmlns:a16="http://schemas.microsoft.com/office/drawing/2014/main" id="{D56028F3-D58C-2FDC-98EF-3B2AF23A6AB0}"/>
+            </a:ext>
+          </a:extLst>
+        </p:cNvPr>
+        <p:cNvGrpSpPr/>
+        <p:nvPr/>
+      </p:nvGrpSpPr>
+      <p:grpSpPr>
+        <a:xfrm>
+          <a:off x="0" y="0"/>
+          <a:ext cx="0" cy="0"/>
+          <a:chOff x="0" y="0"/>
+          <a:chExt cx="0" cy="0"/>
+        </a:xfrm>
+      </p:grpSpPr>
+      <p:sp>
+        <p:nvSpPr>
+          <p:cNvPr id="3" name="Footer Placeholder 2">
+            <a:extLst>
+              <a:ext uri="{FF2B5EF4-FFF2-40B4-BE49-F238E27FC236}">
+                <a16:creationId xmlns:a16="http://schemas.microsoft.com/office/drawing/2014/main" id="{209DD97D-86CC-D4AF-196E-57BD1BE9469B}"/>
+              </a:ext>
+            </a:extLst>
+          </p:cNvPr>
+          <p:cNvSpPr>
+            <a:spLocks noGrp="1"/>
+          </p:cNvSpPr>
+          <p:nvPr>
+            <p:ph type="ftr" sz="quarter" idx="11"/>
+          </p:nvPr>
+        </p:nvSpPr>
+        <p:spPr/>
+        <p:txBody>
+          <a:bodyPr/>
+          <a:lstStyle/>
+          <a:p>
+            <a:r>
+              <a:rPr lang="en-US" dirty="0"/>
+              <a:t>www.anubhavtrainings.com</a:t>
+            </a:r>
+          </a:p>
+        </p:txBody>
+      </p:sp>
+      <p:sp>
+        <p:nvSpPr>
+          <p:cNvPr id="4" name="Slide Number Placeholder 3">
+            <a:extLst>
+              <a:ext uri="{FF2B5EF4-FFF2-40B4-BE49-F238E27FC236}">
+                <a16:creationId xmlns:a16="http://schemas.microsoft.com/office/drawing/2014/main" id="{82D65795-2D02-CEB1-BB93-27A64000089A}"/>
+              </a:ext>
+            </a:extLst>
+          </p:cNvPr>
+          <p:cNvSpPr>
+            <a:spLocks noGrp="1"/>
+          </p:cNvSpPr>
+          <p:nvPr>
+            <p:ph type="sldNum" sz="quarter" idx="12"/>
+          </p:nvPr>
+        </p:nvSpPr>
+        <p:spPr>
+          <a:xfrm>
+            <a:off x="153552" y="4780975"/>
+            <a:ext cx="457081" cy="273773"/>
+          </a:xfrm>
+        </p:spPr>
+        <p:txBody>
+          <a:bodyPr/>
+          <a:lstStyle/>
+          <a:p>
+            <a:fld id="{B6F15528-21DE-4FAA-801E-634DDDAF4B2B}" type="slidenum">
+              <a:rPr lang="en-US" smtClean="0"/>
+              <a:pPr/>
+              <a:t>10</a:t>
+            </a:fld>
+            <a:endParaRPr lang="en-US" dirty="0"/>
+          </a:p>
+        </p:txBody>
+      </p:sp>
+      <p:sp>
+        <p:nvSpPr>
+          <p:cNvPr id="5" name="Title 4">
+            <a:extLst>
+              <a:ext uri="{FF2B5EF4-FFF2-40B4-BE49-F238E27FC236}">
+                <a16:creationId xmlns:a16="http://schemas.microsoft.com/office/drawing/2014/main" id="{342C458B-6C5B-9E8C-8D9B-19D337C0AC69}"/>
+              </a:ext>
+            </a:extLst>
+          </p:cNvPr>
+          <p:cNvSpPr>
+            <a:spLocks noGrp="1"/>
+          </p:cNvSpPr>
+          <p:nvPr>
+            <p:ph type="title"/>
+          </p:nvPr>
+        </p:nvSpPr>
+        <p:spPr>
+          <a:xfrm>
+            <a:off x="77371" y="133985"/>
+            <a:ext cx="8227457" cy="533262"/>
+          </a:xfrm>
+        </p:spPr>
+        <p:txBody>
+          <a:bodyPr/>
+          <a:lstStyle/>
+          <a:p>
+            <a:r>
+              <a:rPr lang="en-IN" sz="2500" dirty="0"/>
+              <a:t>How to be fast</a:t>
+            </a:r>
+          </a:p>
+        </p:txBody>
+      </p:sp>
+      <p:pic>
+        <p:nvPicPr>
+          <p:cNvPr id="2" name="Picture 1">
+            <a:extLst>
+              <a:ext uri="{FF2B5EF4-FFF2-40B4-BE49-F238E27FC236}">
+                <a16:creationId xmlns:a16="http://schemas.microsoft.com/office/drawing/2014/main" id="{0D672D90-084F-5FF4-3D5E-FA7272A9CEB9}"/>
+              </a:ext>
+            </a:extLst>
+          </p:cNvPr>
+          <p:cNvPicPr>
+            <a:picLocks noChangeAspect="1"/>
+          </p:cNvPicPr>
+          <p:nvPr/>
+        </p:nvPicPr>
+        <p:blipFill>
+          <a:blip r:embed="rId2"/>
+          <a:srcRect t="2172"/>
+          <a:stretch/>
+        </p:blipFill>
+        <p:spPr>
+          <a:xfrm>
+            <a:off x="129214" y="1491630"/>
+            <a:ext cx="8885573" cy="2862318"/>
+          </a:xfrm>
+          <a:prstGeom prst="rect">
+            <a:avLst/>
+          </a:prstGeom>
+        </p:spPr>
+      </p:pic>
+    </p:spTree>
+    <p:extLst>
+      <p:ext uri="{BB962C8B-B14F-4D97-AF65-F5344CB8AC3E}">
+        <p14:creationId xmlns:p14="http://schemas.microsoft.com/office/powerpoint/2010/main" val="3312645273"/>
+      </p:ext>
+    </p:extLst>
+  </p:cSld>
+  <p:clrMapOvr>
+    <a:masterClrMapping/>
+  </p:clrMapOvr>
+  <mc:AlternateContent xmlns:mc="http://schemas.openxmlformats.org/markup-compatibility/2006" xmlns:p14="http://schemas.microsoft.com/office/powerpoint/2010/main">
+    <mc:Choice Requires="p14">
+      <p:transition spd="med" p14:dur="700">
+        <p:fade/>
+      </p:transition>
+    </mc:Choice>
+    <mc:Fallback xmlns="">
+      <p:transition spd="med">
+        <p:fade/>
+      </p:transition>
+    </mc:Fallback>
+  </mc:AlternateContent>
+</p:sld>
+</file>
+
+<file path=ppt/slides/slide11.xml><?xml version="1.0" encoding="utf-8"?>
+<p:sld xmlns:a="http://schemas.openxmlformats.org/drawingml/2006/main" xmlns:r="http://schemas.openxmlformats.org/officeDocument/2006/relationships" xmlns:p="http://schemas.openxmlformats.org/presentationml/2006/main">
+  <p:cSld>
+    <p:spTree>
+      <p:nvGrpSpPr>
+        <p:cNvPr id="1" name="">
+          <a:extLst>
+            <a:ext uri="{FF2B5EF4-FFF2-40B4-BE49-F238E27FC236}">
+              <a16:creationId xmlns:a16="http://schemas.microsoft.com/office/drawing/2014/main" id="{C2757EB1-B732-DC5A-C936-51E1BC5C9CE0}"/>
+            </a:ext>
+          </a:extLst>
+        </p:cNvPr>
+        <p:cNvGrpSpPr/>
+        <p:nvPr/>
+      </p:nvGrpSpPr>
+      <p:grpSpPr>
+        <a:xfrm>
+          <a:off x="0" y="0"/>
+          <a:ext cx="0" cy="0"/>
+          <a:chOff x="0" y="0"/>
+          <a:chExt cx="0" cy="0"/>
+        </a:xfrm>
+      </p:grpSpPr>
+      <p:sp>
+        <p:nvSpPr>
+          <p:cNvPr id="3" name="Footer Placeholder 2">
+            <a:extLst>
+              <a:ext uri="{FF2B5EF4-FFF2-40B4-BE49-F238E27FC236}">
+                <a16:creationId xmlns:a16="http://schemas.microsoft.com/office/drawing/2014/main" id="{A359E693-B195-B641-0168-F93E8761A9D8}"/>
+              </a:ext>
+            </a:extLst>
+          </p:cNvPr>
+          <p:cNvSpPr>
+            <a:spLocks noGrp="1"/>
+          </p:cNvSpPr>
+          <p:nvPr>
+            <p:ph type="ftr" sz="quarter" idx="11"/>
+          </p:nvPr>
+        </p:nvSpPr>
+        <p:spPr/>
+        <p:txBody>
+          <a:bodyPr/>
+          <a:lstStyle/>
+          <a:p>
+            <a:r>
+              <a:rPr lang="en-US" dirty="0"/>
+              <a:t>www.anubhavtrainings.com</a:t>
+            </a:r>
+          </a:p>
+        </p:txBody>
+      </p:sp>
+      <p:sp>
+        <p:nvSpPr>
+          <p:cNvPr id="4" name="Slide Number Placeholder 3">
+            <a:extLst>
+              <a:ext uri="{FF2B5EF4-FFF2-40B4-BE49-F238E27FC236}">
+                <a16:creationId xmlns:a16="http://schemas.microsoft.com/office/drawing/2014/main" id="{33F8C66A-D919-7463-4150-CB34A9FEF3A4}"/>
+              </a:ext>
+            </a:extLst>
+          </p:cNvPr>
+          <p:cNvSpPr>
+            <a:spLocks noGrp="1"/>
+          </p:cNvSpPr>
+          <p:nvPr>
+            <p:ph type="sldNum" sz="quarter" idx="12"/>
+          </p:nvPr>
+        </p:nvSpPr>
+        <p:spPr>
+          <a:xfrm>
+            <a:off x="153552" y="4780975"/>
+            <a:ext cx="457081" cy="273773"/>
+          </a:xfrm>
+        </p:spPr>
+        <p:txBody>
+          <a:bodyPr/>
+          <a:lstStyle/>
+          <a:p>
+            <a:fld id="{B6F15528-21DE-4FAA-801E-634DDDAF4B2B}" type="slidenum">
+              <a:rPr lang="en-US" smtClean="0"/>
+              <a:pPr/>
+              <a:t>11</a:t>
+            </a:fld>
+            <a:endParaRPr lang="en-US" dirty="0"/>
+          </a:p>
+        </p:txBody>
+      </p:sp>
+      <p:sp>
+        <p:nvSpPr>
+          <p:cNvPr id="5" name="Title 4">
+            <a:extLst>
+              <a:ext uri="{FF2B5EF4-FFF2-40B4-BE49-F238E27FC236}">
+                <a16:creationId xmlns:a16="http://schemas.microsoft.com/office/drawing/2014/main" id="{90D15BC4-0B83-F78E-B355-855BD3E47386}"/>
+              </a:ext>
+            </a:extLst>
+          </p:cNvPr>
+          <p:cNvSpPr>
+            <a:spLocks noGrp="1"/>
+          </p:cNvSpPr>
+          <p:nvPr>
+            <p:ph type="title"/>
+          </p:nvPr>
+        </p:nvSpPr>
+        <p:spPr>
+          <a:xfrm>
+            <a:off x="77371" y="133985"/>
+            <a:ext cx="8227457" cy="533262"/>
+          </a:xfrm>
+        </p:spPr>
+        <p:txBody>
+          <a:bodyPr/>
+          <a:lstStyle/>
+          <a:p>
+            <a:r>
+              <a:rPr lang="en-IN" sz="2500" dirty="0"/>
+              <a:t>The Clean Core</a:t>
+            </a:r>
+          </a:p>
+        </p:txBody>
+      </p:sp>
+      <p:sp>
+        <p:nvSpPr>
+          <p:cNvPr id="2" name="TextBox 1">
+            <a:extLst>
+              <a:ext uri="{FF2B5EF4-FFF2-40B4-BE49-F238E27FC236}">
+                <a16:creationId xmlns:a16="http://schemas.microsoft.com/office/drawing/2014/main" id="{BDDFBD62-18F7-B468-92E5-D45191750654}"/>
+              </a:ext>
+            </a:extLst>
+          </p:cNvPr>
+          <p:cNvSpPr txBox="1"/>
+          <p:nvPr/>
+        </p:nvSpPr>
+        <p:spPr>
+          <a:xfrm>
+            <a:off x="1191" y="1113589"/>
+            <a:ext cx="8615133" cy="1708144"/>
+          </a:xfrm>
+          <a:prstGeom prst="rect">
+            <a:avLst/>
+          </a:prstGeom>
+          <a:noFill/>
+        </p:spPr>
+        <p:txBody>
+          <a:bodyPr wrap="square" lIns="91424" tIns="45712" rIns="91424" bIns="45712" rtlCol="0">
+            <a:spAutoFit/>
+          </a:bodyPr>
+          <a:lstStyle/>
+          <a:p>
+            <a:r>
+              <a:rPr lang="en-IN" sz="1500" dirty="0"/>
+              <a:t>Clean means up-to-date, documented, unmodified, consistent, efficient and upgrade ready. </a:t>
+            </a:r>
+          </a:p>
+          <a:p>
+            <a:r>
+              <a:rPr lang="en-IN" sz="1500" dirty="0"/>
+              <a:t>S/4HANA Cloud Private Edition =&gt; S/4HANA On-premise – GUI Access, Full Control on system, upgrade when customer want, postpone upgrades, SPRO Access, Full access to system code like ECC – 85-90%</a:t>
+            </a:r>
+          </a:p>
+          <a:p>
+            <a:r>
+              <a:rPr lang="en-IN" sz="1500" dirty="0"/>
+              <a:t>S/4HANA Cloud Public Edition =&gt; Shared environment, Infra is owned by SAP, not have full control and code, No SAPGUI access, only through browser, Force upgrade (always up to date) -10~15%</a:t>
+            </a:r>
+          </a:p>
+          <a:p>
+            <a:r>
+              <a:rPr lang="en-IN" sz="1500" dirty="0"/>
+              <a:t>Capabilities of clean core depend on Software stack.</a:t>
+            </a:r>
+          </a:p>
+          <a:p>
+            <a:r>
+              <a:rPr lang="en-IN" sz="1500" dirty="0"/>
+              <a:t>Bundle for Rise/Grow with SAP – ERP (Core S/4HANA), BTP (BTPEA), SAC, DS…</a:t>
+            </a:r>
+          </a:p>
+        </p:txBody>
+      </p:sp>
+    </p:spTree>
+    <p:extLst>
+      <p:ext uri="{BB962C8B-B14F-4D97-AF65-F5344CB8AC3E}">
+        <p14:creationId xmlns:p14="http://schemas.microsoft.com/office/powerpoint/2010/main" val="1783266899"/>
+      </p:ext>
+    </p:extLst>
+  </p:cSld>
+  <p:clrMapOvr>
+    <a:masterClrMapping/>
+  </p:clrMapOvr>
+  <mc:AlternateContent xmlns:mc="http://schemas.openxmlformats.org/markup-compatibility/2006" xmlns:p14="http://schemas.microsoft.com/office/powerpoint/2010/main">
+    <mc:Choice Requires="p14">
+      <p:transition spd="med" p14:dur="700">
+        <p:fade/>
+      </p:transition>
+    </mc:Choice>
+    <mc:Fallback xmlns="">
+      <p:transition spd="med">
+        <p:fade/>
+      </p:transition>
+    </mc:Fallback>
+  </mc:AlternateContent>
+</p:sld>
+</file>
+
+<file path=ppt/slides/slide12.xml><?xml version="1.0" encoding="utf-8"?>
+<p:sld xmlns:a="http://schemas.openxmlformats.org/drawingml/2006/main" xmlns:r="http://schemas.openxmlformats.org/officeDocument/2006/relationships" xmlns:p="http://schemas.openxmlformats.org/presentationml/2006/main">
+  <p:cSld>
+    <p:spTree>
+      <p:nvGrpSpPr>
+        <p:cNvPr id="1" name="">
+          <a:extLst>
+            <a:ext uri="{FF2B5EF4-FFF2-40B4-BE49-F238E27FC236}">
+              <a16:creationId xmlns:a16="http://schemas.microsoft.com/office/drawing/2014/main" id="{FBC6E7B5-87F9-7850-9594-5CE52FAB8A90}"/>
+            </a:ext>
+          </a:extLst>
+        </p:cNvPr>
+        <p:cNvGrpSpPr/>
+        <p:nvPr/>
+      </p:nvGrpSpPr>
+      <p:grpSpPr>
+        <a:xfrm>
+          <a:off x="0" y="0"/>
+          <a:ext cx="0" cy="0"/>
+          <a:chOff x="0" y="0"/>
+          <a:chExt cx="0" cy="0"/>
+        </a:xfrm>
+      </p:grpSpPr>
+      <p:sp>
+        <p:nvSpPr>
+          <p:cNvPr id="3" name="Footer Placeholder 2">
+            <a:extLst>
+              <a:ext uri="{FF2B5EF4-FFF2-40B4-BE49-F238E27FC236}">
+                <a16:creationId xmlns:a16="http://schemas.microsoft.com/office/drawing/2014/main" id="{09674249-864A-7999-2755-39ACE917CDD2}"/>
+              </a:ext>
+            </a:extLst>
+          </p:cNvPr>
+          <p:cNvSpPr>
+            <a:spLocks noGrp="1"/>
+          </p:cNvSpPr>
+          <p:nvPr>
+            <p:ph type="ftr" sz="quarter" idx="11"/>
+          </p:nvPr>
+        </p:nvSpPr>
+        <p:spPr/>
+        <p:txBody>
+          <a:bodyPr/>
+          <a:lstStyle/>
+          <a:p>
+            <a:r>
+              <a:rPr lang="en-US" dirty="0"/>
+              <a:t>www.anubhavtrainings.com</a:t>
+            </a:r>
+          </a:p>
+        </p:txBody>
+      </p:sp>
+      <p:sp>
+        <p:nvSpPr>
+          <p:cNvPr id="4" name="Slide Number Placeholder 3">
+            <a:extLst>
+              <a:ext uri="{FF2B5EF4-FFF2-40B4-BE49-F238E27FC236}">
+                <a16:creationId xmlns:a16="http://schemas.microsoft.com/office/drawing/2014/main" id="{78E2E1BC-9E59-F37C-3CE6-20402AC4F0DF}"/>
+              </a:ext>
+            </a:extLst>
+          </p:cNvPr>
+          <p:cNvSpPr>
+            <a:spLocks noGrp="1"/>
+          </p:cNvSpPr>
+          <p:nvPr>
+            <p:ph type="sldNum" sz="quarter" idx="12"/>
+          </p:nvPr>
+        </p:nvSpPr>
+        <p:spPr>
+          <a:xfrm>
+            <a:off x="153552" y="4780975"/>
+            <a:ext cx="457081" cy="273773"/>
+          </a:xfrm>
+        </p:spPr>
+        <p:txBody>
+          <a:bodyPr/>
+          <a:lstStyle/>
+          <a:p>
+            <a:fld id="{B6F15528-21DE-4FAA-801E-634DDDAF4B2B}" type="slidenum">
+              <a:rPr lang="en-US" smtClean="0"/>
+              <a:pPr/>
+              <a:t>12</a:t>
+            </a:fld>
+            <a:endParaRPr lang="en-US" dirty="0"/>
+          </a:p>
+        </p:txBody>
+      </p:sp>
+      <p:sp>
+        <p:nvSpPr>
+          <p:cNvPr id="5" name="Title 4">
+            <a:extLst>
+              <a:ext uri="{FF2B5EF4-FFF2-40B4-BE49-F238E27FC236}">
+                <a16:creationId xmlns:a16="http://schemas.microsoft.com/office/drawing/2014/main" id="{B1AB0207-61FB-EE5C-2F6A-BBAEBCD994FF}"/>
+              </a:ext>
+            </a:extLst>
+          </p:cNvPr>
+          <p:cNvSpPr>
+            <a:spLocks noGrp="1"/>
+          </p:cNvSpPr>
+          <p:nvPr>
+            <p:ph type="title"/>
+          </p:nvPr>
+        </p:nvSpPr>
+        <p:spPr>
+          <a:xfrm>
+            <a:off x="77371" y="133985"/>
+            <a:ext cx="8227457" cy="533262"/>
+          </a:xfrm>
+        </p:spPr>
+        <p:txBody>
+          <a:bodyPr/>
+          <a:lstStyle/>
+          <a:p>
+            <a:r>
+              <a:rPr lang="en-IN" sz="2500" dirty="0"/>
+              <a:t>Benefits of Clean Core</a:t>
+            </a:r>
+          </a:p>
+        </p:txBody>
+      </p:sp>
+      <p:sp>
+        <p:nvSpPr>
+          <p:cNvPr id="2" name="TextBox 1">
+            <a:extLst>
+              <a:ext uri="{FF2B5EF4-FFF2-40B4-BE49-F238E27FC236}">
+                <a16:creationId xmlns:a16="http://schemas.microsoft.com/office/drawing/2014/main" id="{EA0BD020-D27F-6AA9-013D-E783BB0AD14B}"/>
+              </a:ext>
+            </a:extLst>
+          </p:cNvPr>
+          <p:cNvSpPr txBox="1"/>
+          <p:nvPr/>
+        </p:nvSpPr>
+        <p:spPr>
+          <a:xfrm>
+            <a:off x="61952" y="1113588"/>
+            <a:ext cx="8615133" cy="2169809"/>
+          </a:xfrm>
+          <a:prstGeom prst="rect">
+            <a:avLst/>
+          </a:prstGeom>
+          <a:noFill/>
+        </p:spPr>
+        <p:txBody>
+          <a:bodyPr wrap="square" lIns="91424" tIns="45712" rIns="91424" bIns="45712" rtlCol="0">
+            <a:spAutoFit/>
+          </a:bodyPr>
+          <a:lstStyle/>
+          <a:p>
+            <a:r>
+              <a:rPr lang="en-IN" sz="1350" dirty="0"/>
+              <a:t>Access to Innovation – all the latest S/4HANA features can be accessed faster because since you don’t have dependency on custom code, you can upgrade in short time, agile to decide. SAP partners can offer upgrade at fix price.</a:t>
+            </a:r>
+          </a:p>
+          <a:p>
+            <a:r>
+              <a:rPr lang="en-IN" sz="1350" dirty="0"/>
+              <a:t>Upgrade Simplicity – You can apply upgrades stress free.</a:t>
+            </a:r>
+          </a:p>
+          <a:p>
+            <a:r>
+              <a:rPr lang="en-IN" sz="1350" dirty="0"/>
+              <a:t>Lower TCO – Since we follow clean core, we actually use upgrade safe APIs to develop our custom apps. This remains stable release-on-release.</a:t>
+            </a:r>
+          </a:p>
+          <a:p>
+            <a:r>
+              <a:rPr lang="en-IN" sz="1350" dirty="0"/>
+              <a:t>Enhanced security – secure your data and applications which are exposed in cloud.</a:t>
+            </a:r>
+          </a:p>
+          <a:p>
+            <a:r>
+              <a:rPr lang="en-IN" sz="1350" dirty="0"/>
+              <a:t>Improved performance – core is clean, it doesn’t have to interact with lots of custom code, store custom code hence increase the speed.</a:t>
+            </a:r>
+          </a:p>
+          <a:p>
+            <a:r>
+              <a:rPr lang="en-IN" sz="1350" dirty="0"/>
+              <a:t>Data Simplification – which data is privates, which data is public.</a:t>
+            </a:r>
+          </a:p>
+          <a:p>
+            <a:endParaRPr lang="en-IN" sz="1350" dirty="0"/>
+          </a:p>
+        </p:txBody>
+      </p:sp>
+    </p:spTree>
+    <p:extLst>
+      <p:ext uri="{BB962C8B-B14F-4D97-AF65-F5344CB8AC3E}">
+        <p14:creationId xmlns:p14="http://schemas.microsoft.com/office/powerpoint/2010/main" val="2935931475"/>
+      </p:ext>
+    </p:extLst>
+  </p:cSld>
+  <p:clrMapOvr>
+    <a:masterClrMapping/>
+  </p:clrMapOvr>
+  <mc:AlternateContent xmlns:mc="http://schemas.openxmlformats.org/markup-compatibility/2006" xmlns:p14="http://schemas.microsoft.com/office/powerpoint/2010/main">
+    <mc:Choice Requires="p14">
+      <p:transition spd="med" p14:dur="700">
+        <p:fade/>
+      </p:transition>
+    </mc:Choice>
+    <mc:Fallback xmlns="">
+      <p:transition spd="med">
+        <p:fade/>
+      </p:transition>
+    </mc:Fallback>
+  </mc:AlternateContent>
+</p:sld>
+</file>
+
+<file path=ppt/slides/slide13.xml><?xml version="1.0" encoding="utf-8"?>
+<p:sld xmlns:a="http://schemas.openxmlformats.org/drawingml/2006/main" xmlns:r="http://schemas.openxmlformats.org/officeDocument/2006/relationships" xmlns:p="http://schemas.openxmlformats.org/presentationml/2006/main">
+  <p:cSld>
+    <p:spTree>
+      <p:nvGrpSpPr>
+        <p:cNvPr id="1" name="">
+          <a:extLst>
+            <a:ext uri="{FF2B5EF4-FFF2-40B4-BE49-F238E27FC236}">
+              <a16:creationId xmlns:a16="http://schemas.microsoft.com/office/drawing/2014/main" id="{C4C45E47-94D3-751A-8A40-6165E9883B93}"/>
+            </a:ext>
+          </a:extLst>
+        </p:cNvPr>
+        <p:cNvGrpSpPr/>
+        <p:nvPr/>
+      </p:nvGrpSpPr>
+      <p:grpSpPr>
+        <a:xfrm>
+          <a:off x="0" y="0"/>
+          <a:ext cx="0" cy="0"/>
+          <a:chOff x="0" y="0"/>
+          <a:chExt cx="0" cy="0"/>
+        </a:xfrm>
+      </p:grpSpPr>
+      <p:sp>
+        <p:nvSpPr>
+          <p:cNvPr id="3" name="Footer Placeholder 2">
+            <a:extLst>
+              <a:ext uri="{FF2B5EF4-FFF2-40B4-BE49-F238E27FC236}">
+                <a16:creationId xmlns:a16="http://schemas.microsoft.com/office/drawing/2014/main" id="{8241D78B-0DF3-7BE3-4412-AD47218A6EEB}"/>
+              </a:ext>
+            </a:extLst>
+          </p:cNvPr>
+          <p:cNvSpPr>
+            <a:spLocks noGrp="1"/>
+          </p:cNvSpPr>
+          <p:nvPr>
+            <p:ph type="ftr" sz="quarter" idx="11"/>
+          </p:nvPr>
+        </p:nvSpPr>
+        <p:spPr/>
+        <p:txBody>
+          <a:bodyPr/>
+          <a:lstStyle/>
+          <a:p>
+            <a:r>
+              <a:rPr lang="en-US" dirty="0"/>
+              <a:t>www.anubhavtrainings.com</a:t>
+            </a:r>
+          </a:p>
+        </p:txBody>
+      </p:sp>
+      <p:sp>
+        <p:nvSpPr>
+          <p:cNvPr id="4" name="Slide Number Placeholder 3">
+            <a:extLst>
+              <a:ext uri="{FF2B5EF4-FFF2-40B4-BE49-F238E27FC236}">
+                <a16:creationId xmlns:a16="http://schemas.microsoft.com/office/drawing/2014/main" id="{5ED815F8-EB7E-4D62-A1A0-738179B8F4C1}"/>
+              </a:ext>
+            </a:extLst>
+          </p:cNvPr>
+          <p:cNvSpPr>
+            <a:spLocks noGrp="1"/>
+          </p:cNvSpPr>
+          <p:nvPr>
+            <p:ph type="sldNum" sz="quarter" idx="12"/>
+          </p:nvPr>
+        </p:nvSpPr>
+        <p:spPr>
+          <a:xfrm>
+            <a:off x="153552" y="4780975"/>
+            <a:ext cx="457081" cy="273773"/>
+          </a:xfrm>
+        </p:spPr>
+        <p:txBody>
+          <a:bodyPr/>
+          <a:lstStyle/>
+          <a:p>
+            <a:fld id="{B6F15528-21DE-4FAA-801E-634DDDAF4B2B}" type="slidenum">
+              <a:rPr lang="en-US" smtClean="0"/>
+              <a:pPr/>
+              <a:t>13</a:t>
+            </a:fld>
+            <a:endParaRPr lang="en-US" dirty="0"/>
+          </a:p>
+        </p:txBody>
+      </p:sp>
+      <p:sp>
+        <p:nvSpPr>
+          <p:cNvPr id="5" name="Title 4">
+            <a:extLst>
+              <a:ext uri="{FF2B5EF4-FFF2-40B4-BE49-F238E27FC236}">
+                <a16:creationId xmlns:a16="http://schemas.microsoft.com/office/drawing/2014/main" id="{E2C694CF-F5C5-BD9C-E562-12A4C4A4547A}"/>
+              </a:ext>
+            </a:extLst>
+          </p:cNvPr>
+          <p:cNvSpPr>
+            <a:spLocks noGrp="1"/>
+          </p:cNvSpPr>
+          <p:nvPr>
+            <p:ph type="title"/>
+          </p:nvPr>
+        </p:nvSpPr>
+        <p:spPr>
+          <a:xfrm>
+            <a:off x="77371" y="133985"/>
+            <a:ext cx="8227457" cy="533262"/>
+          </a:xfrm>
+        </p:spPr>
+        <p:txBody>
+          <a:bodyPr/>
+          <a:lstStyle/>
+          <a:p>
+            <a:r>
+              <a:rPr lang="en-IN" sz="2500" dirty="0"/>
+              <a:t>High level guidance</a:t>
+            </a:r>
+          </a:p>
+        </p:txBody>
+      </p:sp>
+      <p:pic>
+        <p:nvPicPr>
+          <p:cNvPr id="2" name="Picture 2">
+            <a:extLst>
+              <a:ext uri="{FF2B5EF4-FFF2-40B4-BE49-F238E27FC236}">
+                <a16:creationId xmlns:a16="http://schemas.microsoft.com/office/drawing/2014/main" id="{41CA9ED7-D501-07D2-D014-4577D89402E5}"/>
+              </a:ext>
+            </a:extLst>
+          </p:cNvPr>
+          <p:cNvPicPr>
+            <a:picLocks noChangeAspect="1" noChangeArrowheads="1"/>
+          </p:cNvPicPr>
+          <p:nvPr/>
+        </p:nvPicPr>
+        <p:blipFill>
+          <a:blip r:embed="rId2">
+            <a:extLst>
+              <a:ext uri="{28A0092B-C50C-407E-A947-70E740481C1C}">
+                <a14:useLocalDpi xmlns:a14="http://schemas.microsoft.com/office/drawing/2010/main" val="0"/>
+              </a:ext>
+            </a:extLst>
+          </a:blip>
+          <a:srcRect/>
+          <a:stretch>
+            <a:fillRect/>
+          </a:stretch>
+        </p:blipFill>
+        <p:spPr bwMode="auto">
+          <a:xfrm>
+            <a:off x="57507" y="895310"/>
+            <a:ext cx="8937726" cy="3885665"/>
+          </a:xfrm>
+          <a:prstGeom prst="rect">
+            <a:avLst/>
+          </a:prstGeom>
+          <a:noFill/>
+          <a:extLst>
+            <a:ext uri="{909E8E84-426E-40DD-AFC4-6F175D3DCCD1}">
+              <a14:hiddenFill xmlns:a14="http://schemas.microsoft.com/office/drawing/2010/main">
+                <a:solidFill>
+                  <a:srgbClr val="FFFFFF"/>
+                </a:solidFill>
+              </a14:hiddenFill>
+            </a:ext>
+          </a:extLst>
+        </p:spPr>
+      </p:pic>
+    </p:spTree>
+    <p:extLst>
+      <p:ext uri="{BB962C8B-B14F-4D97-AF65-F5344CB8AC3E}">
+        <p14:creationId xmlns:p14="http://schemas.microsoft.com/office/powerpoint/2010/main" val="764769550"/>
+      </p:ext>
+    </p:extLst>
+  </p:cSld>
+  <p:clrMapOvr>
+    <a:masterClrMapping/>
+  </p:clrMapOvr>
+  <mc:AlternateContent xmlns:mc="http://schemas.openxmlformats.org/markup-compatibility/2006" xmlns:p14="http://schemas.microsoft.com/office/powerpoint/2010/main">
+    <mc:Choice Requires="p14">
+      <p:transition spd="med" p14:dur="700">
+        <p:fade/>
+      </p:transition>
+    </mc:Choice>
+    <mc:Fallback xmlns="">
+      <p:transition spd="med">
+        <p:fade/>
+      </p:transition>
+    </mc:Fallback>
+  </mc:AlternateContent>
+</p:sld>
+</file>
+
+<file path=ppt/slides/slide14.xml><?xml version="1.0" encoding="utf-8"?>
+<p:sld xmlns:a="http://schemas.openxmlformats.org/drawingml/2006/main" xmlns:r="http://schemas.openxmlformats.org/officeDocument/2006/relationships" xmlns:p="http://schemas.openxmlformats.org/presentationml/2006/main">
+  <p:cSld>
+    <p:spTree>
+      <p:nvGrpSpPr>
+        <p:cNvPr id="1" name="">
+          <a:extLst>
+            <a:ext uri="{FF2B5EF4-FFF2-40B4-BE49-F238E27FC236}">
+              <a16:creationId xmlns:a16="http://schemas.microsoft.com/office/drawing/2014/main" id="{D39CFEFB-2E02-260F-15AE-52E9D16C4288}"/>
+            </a:ext>
+          </a:extLst>
+        </p:cNvPr>
+        <p:cNvGrpSpPr/>
+        <p:nvPr/>
+      </p:nvGrpSpPr>
+      <p:grpSpPr>
+        <a:xfrm>
+          <a:off x="0" y="0"/>
+          <a:ext cx="0" cy="0"/>
+          <a:chOff x="0" y="0"/>
+          <a:chExt cx="0" cy="0"/>
+        </a:xfrm>
+      </p:grpSpPr>
+      <p:sp>
+        <p:nvSpPr>
+          <p:cNvPr id="3" name="Footer Placeholder 2">
+            <a:extLst>
+              <a:ext uri="{FF2B5EF4-FFF2-40B4-BE49-F238E27FC236}">
+                <a16:creationId xmlns:a16="http://schemas.microsoft.com/office/drawing/2014/main" id="{6EFD82C1-0E2D-A070-84C4-D98862B62F4D}"/>
+              </a:ext>
+            </a:extLst>
+          </p:cNvPr>
+          <p:cNvSpPr>
+            <a:spLocks noGrp="1"/>
+          </p:cNvSpPr>
+          <p:nvPr>
+            <p:ph type="ftr" sz="quarter" idx="11"/>
+          </p:nvPr>
+        </p:nvSpPr>
+        <p:spPr/>
+        <p:txBody>
+          <a:bodyPr/>
+          <a:lstStyle/>
+          <a:p>
+            <a:r>
+              <a:rPr lang="en-US" dirty="0"/>
+              <a:t>www.anubhavtrainings.com</a:t>
+            </a:r>
+          </a:p>
+        </p:txBody>
+      </p:sp>
+      <p:sp>
+        <p:nvSpPr>
+          <p:cNvPr id="4" name="Slide Number Placeholder 3">
+            <a:extLst>
+              <a:ext uri="{FF2B5EF4-FFF2-40B4-BE49-F238E27FC236}">
+                <a16:creationId xmlns:a16="http://schemas.microsoft.com/office/drawing/2014/main" id="{3F7A0B55-C4EC-FCF9-0B1A-1A61973B49D3}"/>
+              </a:ext>
+            </a:extLst>
+          </p:cNvPr>
+          <p:cNvSpPr>
+            <a:spLocks noGrp="1"/>
+          </p:cNvSpPr>
+          <p:nvPr>
+            <p:ph type="sldNum" sz="quarter" idx="12"/>
+          </p:nvPr>
+        </p:nvSpPr>
+        <p:spPr>
+          <a:xfrm>
+            <a:off x="153552" y="4780975"/>
+            <a:ext cx="457081" cy="273773"/>
+          </a:xfrm>
+        </p:spPr>
+        <p:txBody>
+          <a:bodyPr/>
+          <a:lstStyle/>
+          <a:p>
+            <a:fld id="{B6F15528-21DE-4FAA-801E-634DDDAF4B2B}" type="slidenum">
+              <a:rPr lang="en-US" smtClean="0"/>
+              <a:pPr/>
+              <a:t>14</a:t>
+            </a:fld>
+            <a:endParaRPr lang="en-US" dirty="0"/>
+          </a:p>
+        </p:txBody>
+      </p:sp>
+      <p:sp>
+        <p:nvSpPr>
+          <p:cNvPr id="5" name="Title 4">
+            <a:extLst>
+              <a:ext uri="{FF2B5EF4-FFF2-40B4-BE49-F238E27FC236}">
+                <a16:creationId xmlns:a16="http://schemas.microsoft.com/office/drawing/2014/main" id="{A5A288A9-FCA8-91E7-3A9A-77579535929A}"/>
+              </a:ext>
+            </a:extLst>
+          </p:cNvPr>
+          <p:cNvSpPr>
+            <a:spLocks noGrp="1"/>
+          </p:cNvSpPr>
+          <p:nvPr>
+            <p:ph type="title"/>
+          </p:nvPr>
+        </p:nvSpPr>
+        <p:spPr>
+          <a:xfrm>
+            <a:off x="77371" y="133985"/>
+            <a:ext cx="8227457" cy="533262"/>
+          </a:xfrm>
+        </p:spPr>
+        <p:txBody>
+          <a:bodyPr/>
+          <a:lstStyle/>
+          <a:p>
+            <a:r>
+              <a:rPr lang="en-IN" sz="2500" dirty="0"/>
+              <a:t>SAP Business Accelerator HUB</a:t>
+            </a:r>
+          </a:p>
+        </p:txBody>
+      </p:sp>
+      <p:sp>
+        <p:nvSpPr>
+          <p:cNvPr id="9" name="TextBox 8">
+            <a:extLst>
+              <a:ext uri="{FF2B5EF4-FFF2-40B4-BE49-F238E27FC236}">
+                <a16:creationId xmlns:a16="http://schemas.microsoft.com/office/drawing/2014/main" id="{719B5E92-A2F6-7CE9-7E20-0D16990E7FC2}"/>
+              </a:ext>
+            </a:extLst>
+          </p:cNvPr>
+          <p:cNvSpPr txBox="1"/>
+          <p:nvPr/>
+        </p:nvSpPr>
+        <p:spPr>
+          <a:xfrm>
+            <a:off x="77791" y="1167594"/>
+            <a:ext cx="8814689" cy="2585323"/>
+          </a:xfrm>
+          <a:prstGeom prst="rect">
+            <a:avLst/>
+          </a:prstGeom>
+          <a:noFill/>
+        </p:spPr>
+        <p:txBody>
+          <a:bodyPr wrap="square">
+            <a:spAutoFit/>
+          </a:bodyPr>
+          <a:lstStyle/>
+          <a:p>
+            <a:pPr algn="just"/>
+            <a:r>
+              <a:rPr lang="en-US" sz="1350" dirty="0"/>
+              <a:t>The SAP Business Accelerator Hub (formerly known as SAP API Business Hub) is a central, cloud-based platform provided by SAP that offers access to a wide range of APIs, pre-packaged integrations, and business services. Located at </a:t>
+            </a:r>
+            <a:r>
+              <a:rPr lang="en-US" sz="1350" dirty="0">
+                <a:hlinkClick r:id="rId2"/>
+              </a:rPr>
+              <a:t>https://api.sap.com</a:t>
+            </a:r>
+            <a:r>
+              <a:rPr lang="en-US" sz="1350" dirty="0"/>
+              <a:t> , it serves as a comprehensive catalog for developers, partners, and enterprises looking to explore, test, and adopt SAP's digital capabilities. The hub provides resources that span various SAP products like S/4HANA, SuccessFactors, Ariba, and more, enabling seamless integration into SAP and non-SAP systems through standardized APIs and events.</a:t>
+            </a:r>
+          </a:p>
+          <a:p>
+            <a:pPr algn="just"/>
+            <a:endParaRPr lang="en-US" sz="1350" dirty="0"/>
+          </a:p>
+          <a:p>
+            <a:pPr algn="just"/>
+            <a:r>
+              <a:rPr lang="en-US" sz="1350" dirty="0"/>
+              <a:t>Users of the SAP Business Accelerator Hub can interact with APIs in a live sandbox environment, download pre-configured integration packages, and access detailed documentation and code snippets. The platform supports both SAP BTP (Business Technology Platform) and third-party development, accelerating innovation and reducing time to value. It is an essential tool for enterprises undergoing digital transformation, allowing for rapid prototyping, scalable integration, and efficient development across a variety of business domains.</a:t>
+            </a:r>
+          </a:p>
+        </p:txBody>
+      </p:sp>
+    </p:spTree>
+    <p:extLst>
+      <p:ext uri="{BB962C8B-B14F-4D97-AF65-F5344CB8AC3E}">
+        <p14:creationId xmlns:p14="http://schemas.microsoft.com/office/powerpoint/2010/main" val="2531931499"/>
+      </p:ext>
+    </p:extLst>
+  </p:cSld>
+  <p:clrMapOvr>
+    <a:masterClrMapping/>
+  </p:clrMapOvr>
+  <mc:AlternateContent xmlns:mc="http://schemas.openxmlformats.org/markup-compatibility/2006" xmlns:p14="http://schemas.microsoft.com/office/powerpoint/2010/main">
+    <mc:Choice Requires="p14">
+      <p:transition spd="med" p14:dur="700">
+        <p:fade/>
+      </p:transition>
+    </mc:Choice>
+    <mc:Fallback xmlns="">
+      <p:transition spd="med">
+        <p:fade/>
+      </p:transition>
+    </mc:Fallback>
+  </mc:AlternateContent>
+</p:sld>
+</file>
+
+<file path=ppt/slides/slide15.xml><?xml version="1.0" encoding="utf-8"?>
+<p:sld xmlns:a="http://schemas.openxmlformats.org/drawingml/2006/main" xmlns:r="http://schemas.openxmlformats.org/officeDocument/2006/relationships" xmlns:p="http://schemas.openxmlformats.org/presentationml/2006/main">
+  <p:cSld>
+    <p:spTree>
+      <p:nvGrpSpPr>
+        <p:cNvPr id="1" name="">
+          <a:extLst>
+            <a:ext uri="{FF2B5EF4-FFF2-40B4-BE49-F238E27FC236}">
+              <a16:creationId xmlns:a16="http://schemas.microsoft.com/office/drawing/2014/main" id="{E74C8808-7741-0F7A-B907-D5DFBD6515FC}"/>
+            </a:ext>
+          </a:extLst>
+        </p:cNvPr>
+        <p:cNvGrpSpPr/>
+        <p:nvPr/>
+      </p:nvGrpSpPr>
+      <p:grpSpPr>
+        <a:xfrm>
+          <a:off x="0" y="0"/>
+          <a:ext cx="0" cy="0"/>
+          <a:chOff x="0" y="0"/>
+          <a:chExt cx="0" cy="0"/>
+        </a:xfrm>
+      </p:grpSpPr>
+      <p:sp>
+        <p:nvSpPr>
+          <p:cNvPr id="5" name="Title 4">
+            <a:extLst>
+              <a:ext uri="{FF2B5EF4-FFF2-40B4-BE49-F238E27FC236}">
+                <a16:creationId xmlns:a16="http://schemas.microsoft.com/office/drawing/2014/main" id="{F1712054-DE51-C9AD-2A42-5AA5102252DE}"/>
+              </a:ext>
+            </a:extLst>
+          </p:cNvPr>
+          <p:cNvSpPr>
+            <a:spLocks noGrp="1"/>
+          </p:cNvSpPr>
+          <p:nvPr>
+            <p:ph type="title"/>
+          </p:nvPr>
+        </p:nvSpPr>
+        <p:spPr>
+          <a:xfrm>
+            <a:off x="382092" y="209550"/>
+            <a:ext cx="8227457" cy="609601"/>
+          </a:xfrm>
+        </p:spPr>
+        <p:txBody>
+          <a:bodyPr>
+            <a:normAutofit/>
+          </a:bodyPr>
+          <a:lstStyle/>
+          <a:p>
+            <a:r>
+              <a:rPr lang="en-US" b="1" kern="1200" dirty="0">
+                <a:latin typeface="Cooper Black" panose="0208090404030B020404" pitchFamily="18" charset="0"/>
+              </a:rPr>
+              <a:t>The Use case</a:t>
+            </a:r>
+          </a:p>
+        </p:txBody>
+      </p:sp>
+      <p:sp>
+        <p:nvSpPr>
+          <p:cNvPr id="3" name="Footer Placeholder 2">
+            <a:extLst>
+              <a:ext uri="{FF2B5EF4-FFF2-40B4-BE49-F238E27FC236}">
+                <a16:creationId xmlns:a16="http://schemas.microsoft.com/office/drawing/2014/main" id="{EEF91197-0161-D022-C56D-6420FA946E9C}"/>
+              </a:ext>
+            </a:extLst>
+          </p:cNvPr>
+          <p:cNvSpPr>
+            <a:spLocks noGrp="1"/>
+          </p:cNvSpPr>
+          <p:nvPr>
+            <p:ph type="ftr" sz="quarter" idx="11"/>
+          </p:nvPr>
+        </p:nvSpPr>
+        <p:spPr>
+          <a:xfrm>
+            <a:off x="3124578" y="4767264"/>
+            <a:ext cx="2894846" cy="273844"/>
+          </a:xfrm>
+        </p:spPr>
+        <p:txBody>
+          <a:bodyPr vert="horz" lIns="68580" tIns="34290" rIns="68580" bIns="34290" rtlCol="0" anchor="ctr">
+            <a:normAutofit/>
+          </a:bodyPr>
+          <a:lstStyle/>
+          <a:p>
+            <a:pPr>
+              <a:spcAft>
+                <a:spcPts val="450"/>
+              </a:spcAft>
+            </a:pPr>
+            <a:r>
+              <a:rPr lang="en-US" kern="1200" dirty="0">
+                <a:latin typeface="+mn-lt"/>
+                <a:ea typeface="+mn-ea"/>
+                <a:cs typeface="+mn-cs"/>
+              </a:rPr>
+              <a:t>www.anubhavtrainings.com</a:t>
+            </a:r>
+          </a:p>
+        </p:txBody>
+      </p:sp>
+      <p:sp>
+        <p:nvSpPr>
+          <p:cNvPr id="4" name="Slide Number Placeholder 3">
+            <a:extLst>
+              <a:ext uri="{FF2B5EF4-FFF2-40B4-BE49-F238E27FC236}">
+                <a16:creationId xmlns:a16="http://schemas.microsoft.com/office/drawing/2014/main" id="{DA1804D1-BCDC-DF52-0164-8CE5D59973F2}"/>
+              </a:ext>
+            </a:extLst>
+          </p:cNvPr>
+          <p:cNvSpPr>
+            <a:spLocks noGrp="1"/>
+          </p:cNvSpPr>
+          <p:nvPr>
+            <p:ph type="sldNum" sz="quarter" idx="12"/>
+          </p:nvPr>
+        </p:nvSpPr>
+        <p:spPr>
+          <a:xfrm>
+            <a:off x="6552685" y="4767264"/>
+            <a:ext cx="2133044" cy="273844"/>
+          </a:xfrm>
+        </p:spPr>
+        <p:txBody>
+          <a:bodyPr vert="horz" lIns="68580" tIns="34290" rIns="68580" bIns="34290" rtlCol="0" anchor="ctr">
+            <a:normAutofit/>
+          </a:bodyPr>
+          <a:lstStyle/>
+          <a:p>
+            <a:pPr>
+              <a:spcAft>
+                <a:spcPts val="450"/>
+              </a:spcAft>
+            </a:pPr>
+            <a:fld id="{B6F15528-21DE-4FAA-801E-634DDDAF4B2B}" type="slidenum">
+              <a:rPr lang="en-US" smtClean="0"/>
+              <a:pPr>
+                <a:spcAft>
+                  <a:spcPts val="450"/>
+                </a:spcAft>
+              </a:pPr>
+              <a:t>15</a:t>
+            </a:fld>
+            <a:endParaRPr lang="en-US"/>
+          </a:p>
+        </p:txBody>
+      </p:sp>
+      <p:pic>
+        <p:nvPicPr>
+          <p:cNvPr id="2050" name="Picture 2" descr="3,100+ Female Programmer Standing Stock Photos, Pictures &amp; Royalty-Free  Images - iStock">
+            <a:extLst>
+              <a:ext uri="{FF2B5EF4-FFF2-40B4-BE49-F238E27FC236}">
+                <a16:creationId xmlns:a16="http://schemas.microsoft.com/office/drawing/2014/main" id="{CE647893-9C4B-3D89-AE8E-E6FEDF2ECC6E}"/>
+              </a:ext>
+            </a:extLst>
+          </p:cNvPr>
+          <p:cNvPicPr>
+            <a:picLocks noChangeAspect="1" noChangeArrowheads="1"/>
+          </p:cNvPicPr>
+          <p:nvPr/>
+        </p:nvPicPr>
+        <p:blipFill rotWithShape="1">
+          <a:blip r:embed="rId2">
+            <a:extLst>
+              <a:ext uri="{28A0092B-C50C-407E-A947-70E740481C1C}">
+                <a14:useLocalDpi xmlns:a14="http://schemas.microsoft.com/office/drawing/2010/main" val="0"/>
+              </a:ext>
+            </a:extLst>
+          </a:blip>
+          <a:srcRect l="16247" r="10068" b="-1"/>
+          <a:stretch>
+            <a:fillRect/>
+          </a:stretch>
+        </p:blipFill>
+        <p:spPr bwMode="auto">
+          <a:xfrm>
+            <a:off x="458272" y="971550"/>
+            <a:ext cx="4037549" cy="3657600"/>
+          </a:xfrm>
+          <a:prstGeom prst="rect">
+            <a:avLst/>
+          </a:prstGeom>
+          <a:solidFill>
+            <a:srgbClr val="FFFFFF"/>
+          </a:solidFill>
+        </p:spPr>
+      </p:pic>
+      <p:sp>
+        <p:nvSpPr>
+          <p:cNvPr id="6" name="TextBox 5">
+            <a:extLst>
+              <a:ext uri="{FF2B5EF4-FFF2-40B4-BE49-F238E27FC236}">
+                <a16:creationId xmlns:a16="http://schemas.microsoft.com/office/drawing/2014/main" id="{3BB20A45-5835-951D-5F2B-AC9A69EA22E8}"/>
+              </a:ext>
+            </a:extLst>
+          </p:cNvPr>
+          <p:cNvSpPr txBox="1"/>
+          <p:nvPr/>
+        </p:nvSpPr>
+        <p:spPr>
+          <a:xfrm>
+            <a:off x="4648180" y="971550"/>
+            <a:ext cx="4037549" cy="3657600"/>
+          </a:xfrm>
+          <a:prstGeom prst="rect">
+            <a:avLst/>
+          </a:prstGeom>
+        </p:spPr>
+        <p:txBody>
+          <a:bodyPr vert="horz" lIns="68580" tIns="34290" rIns="68580" bIns="34290" rtlCol="0">
+            <a:normAutofit/>
+          </a:bodyPr>
+          <a:lstStyle/>
+          <a:p>
+            <a:pPr defTabSz="914171">
+              <a:lnSpc>
+                <a:spcPct val="90000"/>
+              </a:lnSpc>
+              <a:spcBef>
+                <a:spcPct val="20000"/>
+              </a:spcBef>
+              <a:buFont typeface="Arial" pitchFamily="34" charset="0"/>
+            </a:pPr>
+            <a:r>
+              <a:rPr lang="en-US" sz="1050" b="1" dirty="0"/>
+              <a:t>Background:</a:t>
+            </a:r>
+          </a:p>
+          <a:p>
+            <a:pPr defTabSz="914171">
+              <a:lnSpc>
+                <a:spcPct val="90000"/>
+              </a:lnSpc>
+              <a:spcBef>
+                <a:spcPct val="20000"/>
+              </a:spcBef>
+              <a:buFont typeface="Arial" pitchFamily="34" charset="0"/>
+            </a:pPr>
+            <a:r>
+              <a:rPr lang="en-US" sz="1050" dirty="0"/>
+              <a:t>Meet Emi is an SAP consultant working on multiple SAP S/4HANA projects. Her responsibility includes maintaining and updating business partner address data within the SAP S/4HANA system. </a:t>
+            </a:r>
+          </a:p>
+          <a:p>
+            <a:pPr defTabSz="914171">
+              <a:lnSpc>
+                <a:spcPct val="90000"/>
+              </a:lnSpc>
+              <a:spcBef>
+                <a:spcPct val="20000"/>
+              </a:spcBef>
+              <a:buFont typeface="Arial" pitchFamily="34" charset="0"/>
+            </a:pPr>
+            <a:endParaRPr lang="en-US" sz="1050" dirty="0"/>
+          </a:p>
+          <a:p>
+            <a:pPr defTabSz="914171">
+              <a:lnSpc>
+                <a:spcPct val="90000"/>
+              </a:lnSpc>
+              <a:spcBef>
+                <a:spcPct val="20000"/>
+              </a:spcBef>
+              <a:buFont typeface="Arial" pitchFamily="34" charset="0"/>
+            </a:pPr>
+            <a:r>
+              <a:rPr lang="en-US" sz="1050" dirty="0"/>
+              <a:t>As part of her organization's clean core strategy, Emi wants to avoid direct customizations inside the S/4HANA system. Instead, she plans to build a side-by-side extension application using SAP Build Apps on the SAP Business Technology Platform (BTP) to manage business partner updates more efficiently and in a user-friendly manner.</a:t>
+            </a:r>
+          </a:p>
+          <a:p>
+            <a:pPr defTabSz="914171">
+              <a:lnSpc>
+                <a:spcPct val="90000"/>
+              </a:lnSpc>
+              <a:spcBef>
+                <a:spcPct val="20000"/>
+              </a:spcBef>
+              <a:buFont typeface="Arial" pitchFamily="34" charset="0"/>
+            </a:pPr>
+            <a:endParaRPr lang="en-US" sz="1050" dirty="0"/>
+          </a:p>
+          <a:p>
+            <a:pPr defTabSz="914171">
+              <a:lnSpc>
+                <a:spcPct val="90000"/>
+              </a:lnSpc>
+              <a:spcBef>
+                <a:spcPct val="20000"/>
+              </a:spcBef>
+              <a:buFont typeface="Arial" pitchFamily="34" charset="0"/>
+            </a:pPr>
+            <a:r>
+              <a:rPr lang="en-US" sz="1050" b="1" dirty="0"/>
+              <a:t>Key considerations:</a:t>
+            </a:r>
+          </a:p>
+          <a:p>
+            <a:pPr defTabSz="914171">
+              <a:lnSpc>
+                <a:spcPct val="90000"/>
+              </a:lnSpc>
+              <a:spcBef>
+                <a:spcPct val="20000"/>
+              </a:spcBef>
+              <a:buFont typeface="Arial" pitchFamily="34" charset="0"/>
+            </a:pPr>
+            <a:r>
+              <a:rPr lang="en-US" sz="1050" dirty="0"/>
+              <a:t>Mia uses SAP Build Apps, a low-code/no-code tool on BTP, to develop a standalone application that connects to the SAP S/4HANA system via public APIs available on the SAP Business Accelerator Hub. </a:t>
+            </a:r>
+          </a:p>
+          <a:p>
+            <a:pPr defTabSz="914171">
+              <a:lnSpc>
+                <a:spcPct val="90000"/>
+              </a:lnSpc>
+              <a:spcBef>
+                <a:spcPct val="20000"/>
+              </a:spcBef>
+              <a:buFont typeface="Arial" pitchFamily="34" charset="0"/>
+            </a:pPr>
+            <a:endParaRPr lang="en-US" sz="1050" dirty="0"/>
+          </a:p>
+          <a:p>
+            <a:pPr marL="214313" indent="-214313" defTabSz="914171">
+              <a:lnSpc>
+                <a:spcPct val="90000"/>
+              </a:lnSpc>
+              <a:spcBef>
+                <a:spcPct val="20000"/>
+              </a:spcBef>
+              <a:buFont typeface="Arial" panose="020B0604020202020204" pitchFamily="34" charset="0"/>
+              <a:buChar char="•"/>
+            </a:pPr>
+            <a:r>
+              <a:rPr lang="en-US" sz="1050" dirty="0"/>
+              <a:t>She is not expert in coding</a:t>
+            </a:r>
+          </a:p>
+          <a:p>
+            <a:pPr marL="214313" indent="-214313" defTabSz="914171">
+              <a:lnSpc>
+                <a:spcPct val="90000"/>
+              </a:lnSpc>
+              <a:spcBef>
+                <a:spcPct val="20000"/>
+              </a:spcBef>
+              <a:buFont typeface="Arial" panose="020B0604020202020204" pitchFamily="34" charset="0"/>
+              <a:buChar char="•"/>
+            </a:pPr>
+            <a:r>
+              <a:rPr lang="en-US" sz="1050" dirty="0"/>
+              <a:t>The application should work in user’s mobile phone</a:t>
+            </a:r>
+          </a:p>
+          <a:p>
+            <a:pPr marL="214313" indent="-214313" defTabSz="914171">
+              <a:lnSpc>
+                <a:spcPct val="90000"/>
+              </a:lnSpc>
+              <a:spcBef>
+                <a:spcPct val="20000"/>
+              </a:spcBef>
+              <a:buFont typeface="Arial" panose="020B0604020202020204" pitchFamily="34" charset="0"/>
+              <a:buChar char="•"/>
+            </a:pPr>
+            <a:r>
+              <a:rPr lang="en-US" sz="1050" dirty="0"/>
+              <a:t>She is trying to beat the time as the requirement is quite urgent</a:t>
+            </a:r>
+          </a:p>
+          <a:p>
+            <a:pPr marL="214313" indent="-214313" defTabSz="914171">
+              <a:lnSpc>
+                <a:spcPct val="90000"/>
+              </a:lnSpc>
+              <a:spcBef>
+                <a:spcPct val="20000"/>
+              </a:spcBef>
+              <a:buFont typeface="Arial" panose="020B0604020202020204" pitchFamily="34" charset="0"/>
+              <a:buChar char="•"/>
+            </a:pPr>
+            <a:r>
+              <a:rPr lang="en-US" sz="1050" dirty="0"/>
+              <a:t>A cloud solution is required to fulfill the requirement</a:t>
+            </a:r>
+          </a:p>
+        </p:txBody>
+      </p:sp>
+    </p:spTree>
+    <p:extLst>
+      <p:ext uri="{BB962C8B-B14F-4D97-AF65-F5344CB8AC3E}">
+        <p14:creationId xmlns:p14="http://schemas.microsoft.com/office/powerpoint/2010/main" val="1205342243"/>
+      </p:ext>
+    </p:extLst>
+  </p:cSld>
+  <p:clrMapOvr>
+    <a:masterClrMapping/>
+  </p:clrMapOvr>
+  <mc:AlternateContent xmlns:mc="http://schemas.openxmlformats.org/markup-compatibility/2006" xmlns:p14="http://schemas.microsoft.com/office/powerpoint/2010/main">
+    <mc:Choice Requires="p14">
+      <p:transition spd="med" p14:dur="700">
+        <p:fade/>
+      </p:transition>
+    </mc:Choice>
+    <mc:Fallback xmlns="">
+      <p:transition spd="med">
+        <p:fade/>
+      </p:transition>
+    </mc:Fallback>
+  </mc:AlternateContent>
+</p:sld>
+</file>
+
+<file path=ppt/slides/slide16.xml><?xml version="1.0" encoding="utf-8"?>
+<p:sld xmlns:a="http://schemas.openxmlformats.org/drawingml/2006/main" xmlns:r="http://schemas.openxmlformats.org/officeDocument/2006/relationships" xmlns:p="http://schemas.openxmlformats.org/presentationml/2006/main">
+  <p:cSld>
+    <p:spTree>
+      <p:nvGrpSpPr>
+        <p:cNvPr id="1" name="">
+          <a:extLst>
+            <a:ext uri="{FF2B5EF4-FFF2-40B4-BE49-F238E27FC236}">
+              <a16:creationId xmlns:a16="http://schemas.microsoft.com/office/drawing/2014/main" id="{58117C88-06E1-11B6-ACF3-10594B82CAE6}"/>
+            </a:ext>
+          </a:extLst>
+        </p:cNvPr>
+        <p:cNvGrpSpPr/>
+        <p:nvPr/>
+      </p:nvGrpSpPr>
+      <p:grpSpPr>
+        <a:xfrm>
+          <a:off x="0" y="0"/>
+          <a:ext cx="0" cy="0"/>
+          <a:chOff x="0" y="0"/>
+          <a:chExt cx="0" cy="0"/>
+        </a:xfrm>
+      </p:grpSpPr>
+      <p:sp>
+        <p:nvSpPr>
+          <p:cNvPr id="3" name="Footer Placeholder 2">
+            <a:extLst>
+              <a:ext uri="{FF2B5EF4-FFF2-40B4-BE49-F238E27FC236}">
+                <a16:creationId xmlns:a16="http://schemas.microsoft.com/office/drawing/2014/main" id="{646C6D94-3A20-BCE6-9FB1-4DA60AAC7E96}"/>
+              </a:ext>
+            </a:extLst>
+          </p:cNvPr>
+          <p:cNvSpPr>
+            <a:spLocks noGrp="1"/>
+          </p:cNvSpPr>
+          <p:nvPr>
+            <p:ph type="ftr" sz="quarter" idx="11"/>
+          </p:nvPr>
+        </p:nvSpPr>
+        <p:spPr/>
+        <p:txBody>
+          <a:bodyPr/>
+          <a:lstStyle/>
+          <a:p>
+            <a:r>
+              <a:rPr lang="en-US" dirty="0"/>
+              <a:t>www.anubhavtrainings.com</a:t>
+            </a:r>
+          </a:p>
+        </p:txBody>
+      </p:sp>
+      <p:sp>
+        <p:nvSpPr>
+          <p:cNvPr id="4" name="Slide Number Placeholder 3">
+            <a:extLst>
+              <a:ext uri="{FF2B5EF4-FFF2-40B4-BE49-F238E27FC236}">
+                <a16:creationId xmlns:a16="http://schemas.microsoft.com/office/drawing/2014/main" id="{D4E72C0B-FAE4-C909-1D2A-40A8A08DD202}"/>
+              </a:ext>
+            </a:extLst>
+          </p:cNvPr>
+          <p:cNvSpPr>
+            <a:spLocks noGrp="1"/>
+          </p:cNvSpPr>
+          <p:nvPr>
+            <p:ph type="sldNum" sz="quarter" idx="12"/>
+          </p:nvPr>
+        </p:nvSpPr>
+        <p:spPr>
+          <a:xfrm>
+            <a:off x="153552" y="4780975"/>
+            <a:ext cx="457081" cy="273773"/>
+          </a:xfrm>
+        </p:spPr>
+        <p:txBody>
+          <a:bodyPr/>
+          <a:lstStyle/>
+          <a:p>
+            <a:fld id="{B6F15528-21DE-4FAA-801E-634DDDAF4B2B}" type="slidenum">
+              <a:rPr lang="en-US" smtClean="0"/>
+              <a:pPr/>
+              <a:t>16</a:t>
+            </a:fld>
+            <a:endParaRPr lang="en-US" dirty="0"/>
+          </a:p>
+        </p:txBody>
+      </p:sp>
+      <p:sp>
+        <p:nvSpPr>
+          <p:cNvPr id="5" name="Title 4">
+            <a:extLst>
+              <a:ext uri="{FF2B5EF4-FFF2-40B4-BE49-F238E27FC236}">
+                <a16:creationId xmlns:a16="http://schemas.microsoft.com/office/drawing/2014/main" id="{45BBA13A-B21B-CC8A-8E79-8F6A6776CD56}"/>
+              </a:ext>
+            </a:extLst>
+          </p:cNvPr>
+          <p:cNvSpPr>
+            <a:spLocks noGrp="1"/>
+          </p:cNvSpPr>
+          <p:nvPr>
+            <p:ph type="title"/>
+          </p:nvPr>
+        </p:nvSpPr>
+        <p:spPr>
+          <a:xfrm>
+            <a:off x="77371" y="133985"/>
+            <a:ext cx="8227457" cy="533262"/>
+          </a:xfrm>
+        </p:spPr>
+        <p:txBody>
+          <a:bodyPr/>
+          <a:lstStyle/>
+          <a:p>
+            <a:r>
+              <a:rPr lang="en-IN" sz="2500" dirty="0"/>
+              <a:t>Solution Flow</a:t>
+            </a:r>
+          </a:p>
+        </p:txBody>
+      </p:sp>
+      <p:pic>
+        <p:nvPicPr>
+          <p:cNvPr id="3074" name="Picture 2" descr="App">
+            <a:extLst>
+              <a:ext uri="{FF2B5EF4-FFF2-40B4-BE49-F238E27FC236}">
+                <a16:creationId xmlns:a16="http://schemas.microsoft.com/office/drawing/2014/main" id="{39AB3F82-291F-DC17-30CA-DA8F1CD95D88}"/>
+              </a:ext>
+            </a:extLst>
+          </p:cNvPr>
+          <p:cNvPicPr>
+            <a:picLocks noChangeAspect="1" noChangeArrowheads="1"/>
+          </p:cNvPicPr>
+          <p:nvPr/>
+        </p:nvPicPr>
+        <p:blipFill>
+          <a:blip r:embed="rId2" cstate="print">
+            <a:extLst>
+              <a:ext uri="{28A0092B-C50C-407E-A947-70E740481C1C}">
+                <a14:useLocalDpi xmlns:a14="http://schemas.microsoft.com/office/drawing/2010/main" val="0"/>
+              </a:ext>
+            </a:extLst>
+          </a:blip>
+          <a:srcRect/>
+          <a:stretch>
+            <a:fillRect/>
+          </a:stretch>
+        </p:blipFill>
+        <p:spPr bwMode="auto">
+          <a:xfrm>
+            <a:off x="1152469" y="897564"/>
+            <a:ext cx="6839062" cy="3805219"/>
+          </a:xfrm>
+          <a:prstGeom prst="rect">
+            <a:avLst/>
+          </a:prstGeom>
+          <a:noFill/>
+          <a:extLst>
+            <a:ext uri="{909E8E84-426E-40DD-AFC4-6F175D3DCCD1}">
+              <a14:hiddenFill xmlns:a14="http://schemas.microsoft.com/office/drawing/2010/main">
+                <a:solidFill>
+                  <a:srgbClr val="FFFFFF"/>
+                </a:solidFill>
+              </a14:hiddenFill>
+            </a:ext>
+          </a:extLst>
+        </p:spPr>
+      </p:pic>
+    </p:spTree>
+    <p:extLst>
+      <p:ext uri="{BB962C8B-B14F-4D97-AF65-F5344CB8AC3E}">
+        <p14:creationId xmlns:p14="http://schemas.microsoft.com/office/powerpoint/2010/main" val="2043268783"/>
+      </p:ext>
+    </p:extLst>
+  </p:cSld>
+  <p:clrMapOvr>
+    <a:masterClrMapping/>
+  </p:clrMapOvr>
+  <mc:AlternateContent xmlns:mc="http://schemas.openxmlformats.org/markup-compatibility/2006" xmlns:p14="http://schemas.microsoft.com/office/powerpoint/2010/main">
+    <mc:Choice Requires="p14">
+      <p:transition spd="med" p14:dur="700">
+        <p:fade/>
+      </p:transition>
+    </mc:Choice>
+    <mc:Fallback xmlns="">
+      <p:transition spd="med">
+        <p:fade/>
+      </p:transition>
+    </mc:Fallback>
+  </mc:AlternateContent>
+</p:sld>
+</file>
+
+<file path=ppt/slides/slide17.xml><?xml version="1.0" encoding="utf-8"?>
+<p:sld xmlns:a="http://schemas.openxmlformats.org/drawingml/2006/main" xmlns:r="http://schemas.openxmlformats.org/officeDocument/2006/relationships" xmlns:p="http://schemas.openxmlformats.org/presentationml/2006/main">
+  <p:cSld>
+    <p:spTree>
+      <p:nvGrpSpPr>
+        <p:cNvPr id="1" name="">
+          <a:extLst>
+            <a:ext uri="{FF2B5EF4-FFF2-40B4-BE49-F238E27FC236}">
+              <a16:creationId xmlns:a16="http://schemas.microsoft.com/office/drawing/2014/main" id="{0BAF0558-47F2-ACDE-8E91-099DB15280A4}"/>
+            </a:ext>
+          </a:extLst>
+        </p:cNvPr>
+        <p:cNvGrpSpPr/>
+        <p:nvPr/>
+      </p:nvGrpSpPr>
+      <p:grpSpPr>
+        <a:xfrm>
+          <a:off x="0" y="0"/>
+          <a:ext cx="0" cy="0"/>
+          <a:chOff x="0" y="0"/>
+          <a:chExt cx="0" cy="0"/>
+        </a:xfrm>
+      </p:grpSpPr>
+      <p:sp>
+        <p:nvSpPr>
+          <p:cNvPr id="3" name="Footer Placeholder 2">
+            <a:extLst>
+              <a:ext uri="{FF2B5EF4-FFF2-40B4-BE49-F238E27FC236}">
+                <a16:creationId xmlns:a16="http://schemas.microsoft.com/office/drawing/2014/main" id="{756CB089-6CEA-890D-12F1-0ED8D3D197E6}"/>
+              </a:ext>
+            </a:extLst>
+          </p:cNvPr>
+          <p:cNvSpPr>
+            <a:spLocks noGrp="1"/>
+          </p:cNvSpPr>
+          <p:nvPr>
+            <p:ph type="ftr" sz="quarter" idx="11"/>
+          </p:nvPr>
+        </p:nvSpPr>
+        <p:spPr/>
+        <p:txBody>
+          <a:bodyPr/>
+          <a:lstStyle/>
+          <a:p>
+            <a:r>
+              <a:rPr lang="en-US" dirty="0"/>
+              <a:t>www.anubhavtrainings.com</a:t>
+            </a:r>
+          </a:p>
+        </p:txBody>
+      </p:sp>
+      <p:sp>
+        <p:nvSpPr>
+          <p:cNvPr id="4" name="Slide Number Placeholder 3">
+            <a:extLst>
+              <a:ext uri="{FF2B5EF4-FFF2-40B4-BE49-F238E27FC236}">
+                <a16:creationId xmlns:a16="http://schemas.microsoft.com/office/drawing/2014/main" id="{75869052-611C-F121-8159-5D3479FC4892}"/>
+              </a:ext>
+            </a:extLst>
+          </p:cNvPr>
+          <p:cNvSpPr>
+            <a:spLocks noGrp="1"/>
+          </p:cNvSpPr>
+          <p:nvPr>
+            <p:ph type="sldNum" sz="quarter" idx="12"/>
+          </p:nvPr>
+        </p:nvSpPr>
+        <p:spPr>
+          <a:xfrm>
+            <a:off x="153552" y="4780975"/>
+            <a:ext cx="457081" cy="273773"/>
+          </a:xfrm>
+        </p:spPr>
+        <p:txBody>
+          <a:bodyPr/>
+          <a:lstStyle/>
+          <a:p>
+            <a:fld id="{B6F15528-21DE-4FAA-801E-634DDDAF4B2B}" type="slidenum">
+              <a:rPr lang="en-US" smtClean="0"/>
+              <a:pPr/>
+              <a:t>17</a:t>
+            </a:fld>
+            <a:endParaRPr lang="en-US" dirty="0"/>
+          </a:p>
+        </p:txBody>
+      </p:sp>
+      <p:sp>
+        <p:nvSpPr>
+          <p:cNvPr id="5" name="Title 4">
+            <a:extLst>
+              <a:ext uri="{FF2B5EF4-FFF2-40B4-BE49-F238E27FC236}">
+                <a16:creationId xmlns:a16="http://schemas.microsoft.com/office/drawing/2014/main" id="{D8BFADFA-8217-EFB8-8794-643D370283C5}"/>
+              </a:ext>
+            </a:extLst>
+          </p:cNvPr>
+          <p:cNvSpPr>
+            <a:spLocks noGrp="1"/>
+          </p:cNvSpPr>
+          <p:nvPr>
+            <p:ph type="title"/>
+          </p:nvPr>
+        </p:nvSpPr>
+        <p:spPr>
+          <a:xfrm>
+            <a:off x="77371" y="133985"/>
+            <a:ext cx="8227457" cy="533262"/>
+          </a:xfrm>
+        </p:spPr>
+        <p:txBody>
+          <a:bodyPr/>
+          <a:lstStyle/>
+          <a:p>
+            <a:r>
+              <a:rPr lang="en-IN" sz="2500" dirty="0"/>
+              <a:t>Functional Spec</a:t>
+            </a:r>
+          </a:p>
+        </p:txBody>
+      </p:sp>
+      <p:sp>
+        <p:nvSpPr>
+          <p:cNvPr id="6" name="TextBox 5">
+            <a:extLst>
+              <a:ext uri="{FF2B5EF4-FFF2-40B4-BE49-F238E27FC236}">
+                <a16:creationId xmlns:a16="http://schemas.microsoft.com/office/drawing/2014/main" id="{7445F783-6A83-8ADF-FDFC-CC9C2A9E3814}"/>
+              </a:ext>
+            </a:extLst>
+          </p:cNvPr>
+          <p:cNvSpPr txBox="1"/>
+          <p:nvPr/>
+        </p:nvSpPr>
+        <p:spPr>
+          <a:xfrm>
+            <a:off x="153551" y="895788"/>
+            <a:ext cx="8608358" cy="3241913"/>
+          </a:xfrm>
+          <a:prstGeom prst="rect">
+            <a:avLst/>
+          </a:prstGeom>
+          <a:noFill/>
+        </p:spPr>
+        <p:txBody>
+          <a:bodyPr wrap="square" rtlCol="0">
+            <a:spAutoFit/>
+          </a:bodyPr>
+          <a:lstStyle/>
+          <a:p>
+            <a:pPr>
+              <a:lnSpc>
+                <a:spcPts val="1350"/>
+              </a:lnSpc>
+              <a:spcAft>
+                <a:spcPts val="1125"/>
+              </a:spcAft>
+            </a:pPr>
+            <a:r>
+              <a:rPr lang="en-US" sz="1200" dirty="0">
+                <a:solidFill>
+                  <a:srgbClr val="1F1F1F"/>
+                </a:solidFill>
+                <a:latin typeface="72 Brand Variable"/>
+              </a:rPr>
+              <a:t>You will create an app with 3 pages:</a:t>
+            </a:r>
+          </a:p>
+          <a:p>
+            <a:pPr>
+              <a:spcAft>
+                <a:spcPts val="1125"/>
+              </a:spcAft>
+              <a:buFont typeface="Arial" panose="020B0604020202020204" pitchFamily="34" charset="0"/>
+              <a:buChar char="•"/>
+            </a:pPr>
+            <a:r>
+              <a:rPr lang="en-US" sz="1200" dirty="0">
+                <a:solidFill>
+                  <a:srgbClr val="1F1F1F"/>
+                </a:solidFill>
+                <a:latin typeface="72 Brand Variable"/>
+              </a:rPr>
+              <a:t> Page 1: Display all business partners</a:t>
+            </a:r>
+          </a:p>
+          <a:p>
+            <a:pPr>
+              <a:spcAft>
+                <a:spcPts val="1125"/>
+              </a:spcAft>
+              <a:buFont typeface="Arial" panose="020B0604020202020204" pitchFamily="34" charset="0"/>
+              <a:buChar char="•"/>
+            </a:pPr>
+            <a:r>
+              <a:rPr lang="en-US" sz="1200" dirty="0">
+                <a:solidFill>
+                  <a:srgbClr val="1F1F1F"/>
+                </a:solidFill>
+                <a:latin typeface="72 Brand Variable"/>
+              </a:rPr>
+              <a:t> Page 2: Display all addresses for a business partner</a:t>
+            </a:r>
+          </a:p>
+          <a:p>
+            <a:pPr>
+              <a:spcAft>
+                <a:spcPts val="1125"/>
+              </a:spcAft>
+              <a:buFont typeface="Arial" panose="020B0604020202020204" pitchFamily="34" charset="0"/>
+              <a:buChar char="•"/>
+            </a:pPr>
+            <a:r>
+              <a:rPr lang="en-US" sz="1200" dirty="0">
+                <a:solidFill>
+                  <a:srgbClr val="1F1F1F"/>
+                </a:solidFill>
+                <a:latin typeface="72 Brand Variable"/>
+              </a:rPr>
+              <a:t> Page 3: Create or update an address</a:t>
+            </a:r>
+          </a:p>
+          <a:p>
+            <a:pPr>
+              <a:lnSpc>
+                <a:spcPts val="1350"/>
+              </a:lnSpc>
+              <a:spcAft>
+                <a:spcPts val="1125"/>
+              </a:spcAft>
+            </a:pPr>
+            <a:r>
+              <a:rPr lang="en-US" sz="1200" dirty="0">
+                <a:solidFill>
+                  <a:srgbClr val="1F1F1F"/>
+                </a:solidFill>
+                <a:latin typeface="72 Brand Variable"/>
+              </a:rPr>
+              <a:t>As for complexities of the API, here are a few:</a:t>
+            </a:r>
+          </a:p>
+          <a:p>
+            <a:pPr>
+              <a:spcAft>
+                <a:spcPts val="1125"/>
+              </a:spcAft>
+              <a:buFont typeface="Arial" panose="020B0604020202020204" pitchFamily="34" charset="0"/>
+              <a:buChar char="•"/>
+            </a:pPr>
+            <a:r>
+              <a:rPr lang="en-US" sz="1200" dirty="0">
+                <a:solidFill>
+                  <a:srgbClr val="1F1F1F"/>
+                </a:solidFill>
+                <a:latin typeface="72 Brand Variable"/>
+              </a:rPr>
+              <a:t> You cannot delete an address if it is labeled as the default address (</a:t>
+            </a:r>
+            <a:r>
+              <a:rPr lang="en-US" sz="1200" dirty="0" err="1">
+                <a:solidFill>
+                  <a:srgbClr val="1F1F1F"/>
+                </a:solidFill>
+                <a:latin typeface="72 Brand Variable"/>
+              </a:rPr>
+              <a:t>AddressUsage</a:t>
+            </a:r>
+            <a:r>
+              <a:rPr lang="en-US" sz="1200" dirty="0">
+                <a:solidFill>
+                  <a:srgbClr val="1F1F1F"/>
+                </a:solidFill>
+                <a:latin typeface="72 Brand Variable"/>
+              </a:rPr>
+              <a:t> = XXDEFAULT).</a:t>
+            </a:r>
+          </a:p>
+          <a:p>
+            <a:pPr>
+              <a:spcAft>
+                <a:spcPts val="1125"/>
+              </a:spcAft>
+              <a:buFont typeface="Arial" panose="020B0604020202020204" pitchFamily="34" charset="0"/>
+              <a:buChar char="•"/>
+            </a:pPr>
+            <a:r>
+              <a:rPr lang="en-US" sz="1200" dirty="0">
+                <a:solidFill>
+                  <a:srgbClr val="1F1F1F"/>
+                </a:solidFill>
+                <a:latin typeface="72 Brand Variable"/>
+              </a:rPr>
+              <a:t> Whether an address is the default is determined by the </a:t>
+            </a:r>
+            <a:r>
+              <a:rPr lang="en-US" sz="1200" b="1" dirty="0" err="1">
+                <a:solidFill>
+                  <a:srgbClr val="1F1F1F"/>
+                </a:solidFill>
+                <a:latin typeface="72 Brand Variable"/>
+              </a:rPr>
+              <a:t>AddressUsage</a:t>
+            </a:r>
+            <a:r>
+              <a:rPr lang="en-US" sz="1200" dirty="0">
+                <a:solidFill>
+                  <a:srgbClr val="1F1F1F"/>
+                </a:solidFill>
+                <a:latin typeface="72 Brand Variable"/>
+              </a:rPr>
+              <a:t> nested entity, which you will need to expand.</a:t>
+            </a:r>
+          </a:p>
+          <a:p>
+            <a:pPr>
+              <a:spcAft>
+                <a:spcPts val="1125"/>
+              </a:spcAft>
+              <a:buFont typeface="Arial" panose="020B0604020202020204" pitchFamily="34" charset="0"/>
+              <a:buChar char="•"/>
+            </a:pPr>
+            <a:r>
+              <a:rPr lang="en-US" sz="1200" dirty="0">
+                <a:solidFill>
+                  <a:srgbClr val="1F1F1F"/>
+                </a:solidFill>
+                <a:latin typeface="72 Brand Variable"/>
+              </a:rPr>
+              <a:t> If you add an address to a business partner that has no addresses, that address must be labeled as the default address, but if you are adding an additional address, that address CANNOT be labeled as the default address.</a:t>
+            </a:r>
+          </a:p>
+          <a:p>
+            <a:pPr>
+              <a:spcAft>
+                <a:spcPts val="1125"/>
+              </a:spcAft>
+              <a:buFont typeface="Arial" panose="020B0604020202020204" pitchFamily="34" charset="0"/>
+              <a:buChar char="•"/>
+            </a:pPr>
+            <a:r>
+              <a:rPr lang="en-US" sz="1200" dirty="0">
+                <a:solidFill>
+                  <a:srgbClr val="1F1F1F"/>
+                </a:solidFill>
+                <a:latin typeface="72 Brand Variable"/>
+              </a:rPr>
+              <a:t> There are all types of conditions for the data. For example, if you add an address from the United Kingdom, it must include a postal code (Postal codes are not needed for the US or Sweden). Or, you cannot delete the default address.</a:t>
+            </a:r>
+          </a:p>
+        </p:txBody>
+      </p:sp>
+    </p:spTree>
+    <p:extLst>
+      <p:ext uri="{BB962C8B-B14F-4D97-AF65-F5344CB8AC3E}">
+        <p14:creationId xmlns:p14="http://schemas.microsoft.com/office/powerpoint/2010/main" val="3659171702"/>
+      </p:ext>
+    </p:extLst>
+  </p:cSld>
+  <p:clrMapOvr>
+    <a:masterClrMapping/>
+  </p:clrMapOvr>
+  <mc:AlternateContent xmlns:mc="http://schemas.openxmlformats.org/markup-compatibility/2006" xmlns:p14="http://schemas.microsoft.com/office/powerpoint/2010/main">
+    <mc:Choice Requires="p14">
+      <p:transition spd="med" p14:dur="700">
+        <p:fade/>
+      </p:transition>
+    </mc:Choice>
+    <mc:Fallback xmlns="">
+      <p:transition spd="med">
+        <p:fade/>
+      </p:transition>
+    </mc:Fallback>
+  </mc:AlternateContent>
+</p:sld>
+</file>
+
+<file path=ppt/slides/slide18.xml><?xml version="1.0" encoding="utf-8"?>
+<p:sld xmlns:a="http://schemas.openxmlformats.org/drawingml/2006/main" xmlns:r="http://schemas.openxmlformats.org/officeDocument/2006/relationships" xmlns:p="http://schemas.openxmlformats.org/presentationml/2006/main">
+  <p:cSld>
+    <p:spTree>
+      <p:nvGrpSpPr>
+        <p:cNvPr id="1" name="">
+          <a:extLst>
+            <a:ext uri="{FF2B5EF4-FFF2-40B4-BE49-F238E27FC236}">
+              <a16:creationId xmlns:a16="http://schemas.microsoft.com/office/drawing/2014/main" id="{BE1115B4-3600-4338-A924-81611612E3EA}"/>
+            </a:ext>
+          </a:extLst>
+        </p:cNvPr>
+        <p:cNvGrpSpPr/>
+        <p:nvPr/>
+      </p:nvGrpSpPr>
+      <p:grpSpPr>
+        <a:xfrm>
+          <a:off x="0" y="0"/>
+          <a:ext cx="0" cy="0"/>
+          <a:chOff x="0" y="0"/>
+          <a:chExt cx="0" cy="0"/>
+        </a:xfrm>
+      </p:grpSpPr>
+      <p:sp>
+        <p:nvSpPr>
+          <p:cNvPr id="3" name="Footer Placeholder 2">
+            <a:extLst>
+              <a:ext uri="{FF2B5EF4-FFF2-40B4-BE49-F238E27FC236}">
+                <a16:creationId xmlns:a16="http://schemas.microsoft.com/office/drawing/2014/main" id="{025C97F4-01EC-D223-8F80-176746FCAD3B}"/>
+              </a:ext>
+            </a:extLst>
+          </p:cNvPr>
+          <p:cNvSpPr>
+            <a:spLocks noGrp="1"/>
+          </p:cNvSpPr>
+          <p:nvPr>
+            <p:ph type="ftr" sz="quarter" idx="11"/>
+          </p:nvPr>
+        </p:nvSpPr>
+        <p:spPr/>
+        <p:txBody>
+          <a:bodyPr/>
+          <a:lstStyle/>
+          <a:p>
+            <a:r>
+              <a:rPr lang="en-US" dirty="0"/>
+              <a:t>www.anubhavtrainings.com</a:t>
+            </a:r>
+          </a:p>
+        </p:txBody>
+      </p:sp>
+      <p:sp>
+        <p:nvSpPr>
+          <p:cNvPr id="4" name="Slide Number Placeholder 3">
+            <a:extLst>
+              <a:ext uri="{FF2B5EF4-FFF2-40B4-BE49-F238E27FC236}">
+                <a16:creationId xmlns:a16="http://schemas.microsoft.com/office/drawing/2014/main" id="{1C223742-00A9-3484-F47F-B361D929FE1D}"/>
+              </a:ext>
+            </a:extLst>
+          </p:cNvPr>
+          <p:cNvSpPr>
+            <a:spLocks noGrp="1"/>
+          </p:cNvSpPr>
+          <p:nvPr>
+            <p:ph type="sldNum" sz="quarter" idx="12"/>
+          </p:nvPr>
+        </p:nvSpPr>
+        <p:spPr>
+          <a:xfrm>
+            <a:off x="153552" y="4780975"/>
+            <a:ext cx="457081" cy="273773"/>
+          </a:xfrm>
+        </p:spPr>
+        <p:txBody>
+          <a:bodyPr/>
+          <a:lstStyle/>
+          <a:p>
+            <a:fld id="{B6F15528-21DE-4FAA-801E-634DDDAF4B2B}" type="slidenum">
+              <a:rPr lang="en-US" smtClean="0"/>
+              <a:pPr/>
+              <a:t>18</a:t>
+            </a:fld>
+            <a:endParaRPr lang="en-US" dirty="0"/>
+          </a:p>
+        </p:txBody>
+      </p:sp>
+      <p:sp>
+        <p:nvSpPr>
+          <p:cNvPr id="5" name="Title 4">
+            <a:extLst>
+              <a:ext uri="{FF2B5EF4-FFF2-40B4-BE49-F238E27FC236}">
+                <a16:creationId xmlns:a16="http://schemas.microsoft.com/office/drawing/2014/main" id="{D5A6C654-2C46-DC5A-A30A-9CEF9AFCCE55}"/>
+              </a:ext>
+            </a:extLst>
+          </p:cNvPr>
+          <p:cNvSpPr>
+            <a:spLocks noGrp="1"/>
+          </p:cNvSpPr>
+          <p:nvPr>
+            <p:ph type="title"/>
+          </p:nvPr>
+        </p:nvSpPr>
+        <p:spPr>
+          <a:xfrm>
+            <a:off x="77371" y="133985"/>
+            <a:ext cx="8227457" cy="533262"/>
+          </a:xfrm>
+        </p:spPr>
+        <p:txBody>
+          <a:bodyPr/>
+          <a:lstStyle/>
+          <a:p>
+            <a:r>
+              <a:rPr lang="en-IN" sz="2500" dirty="0"/>
+              <a:t>SAP Business Partner API</a:t>
+            </a:r>
+          </a:p>
+        </p:txBody>
+      </p:sp>
+      <p:pic>
+        <p:nvPicPr>
+          <p:cNvPr id="4098" name="Picture 2" descr="API reference">
+            <a:extLst>
+              <a:ext uri="{FF2B5EF4-FFF2-40B4-BE49-F238E27FC236}">
+                <a16:creationId xmlns:a16="http://schemas.microsoft.com/office/drawing/2014/main" id="{7118E1DA-7A24-D61A-7ABB-83E7AFBE79B5}"/>
+              </a:ext>
+            </a:extLst>
+          </p:cNvPr>
+          <p:cNvPicPr>
+            <a:picLocks noChangeAspect="1" noChangeArrowheads="1"/>
+          </p:cNvPicPr>
+          <p:nvPr/>
+        </p:nvPicPr>
+        <p:blipFill>
+          <a:blip r:embed="rId2" cstate="print">
+            <a:extLst>
+              <a:ext uri="{28A0092B-C50C-407E-A947-70E740481C1C}">
+                <a14:useLocalDpi xmlns:a14="http://schemas.microsoft.com/office/drawing/2010/main" val="0"/>
+              </a:ext>
+            </a:extLst>
+          </a:blip>
+          <a:srcRect/>
+          <a:stretch>
+            <a:fillRect/>
+          </a:stretch>
+        </p:blipFill>
+        <p:spPr bwMode="auto">
+          <a:xfrm>
+            <a:off x="197514" y="951571"/>
+            <a:ext cx="7570113" cy="3727871"/>
+          </a:xfrm>
+          <a:prstGeom prst="rect">
+            <a:avLst/>
+          </a:prstGeom>
+          <a:noFill/>
+          <a:extLst>
+            <a:ext uri="{909E8E84-426E-40DD-AFC4-6F175D3DCCD1}">
+              <a14:hiddenFill xmlns:a14="http://schemas.microsoft.com/office/drawing/2010/main">
+                <a:solidFill>
+                  <a:srgbClr val="FFFFFF"/>
+                </a:solidFill>
+              </a14:hiddenFill>
+            </a:ext>
+          </a:extLst>
+        </p:spPr>
+      </p:pic>
+    </p:spTree>
+    <p:extLst>
+      <p:ext uri="{BB962C8B-B14F-4D97-AF65-F5344CB8AC3E}">
+        <p14:creationId xmlns:p14="http://schemas.microsoft.com/office/powerpoint/2010/main" val="2611893924"/>
+      </p:ext>
+    </p:extLst>
+  </p:cSld>
+  <p:clrMapOvr>
+    <a:masterClrMapping/>
+  </p:clrMapOvr>
+  <mc:AlternateContent xmlns:mc="http://schemas.openxmlformats.org/markup-compatibility/2006" xmlns:p14="http://schemas.microsoft.com/office/powerpoint/2010/main">
+    <mc:Choice Requires="p14">
+      <p:transition spd="med" p14:dur="700">
+        <p:fade/>
+      </p:transition>
+    </mc:Choice>
+    <mc:Fallback xmlns="">
+      <p:transition spd="med">
+        <p:fade/>
+      </p:transition>
+    </mc:Fallback>
+  </mc:AlternateContent>
+</p:sld>
+</file>
+
+<file path=ppt/slides/slide19.xml><?xml version="1.0" encoding="utf-8"?>
+<p:sld xmlns:a="http://schemas.openxmlformats.org/drawingml/2006/main" xmlns:r="http://schemas.openxmlformats.org/officeDocument/2006/relationships" xmlns:p="http://schemas.openxmlformats.org/presentationml/2006/main">
+  <p:cSld>
+    <p:spTree>
+      <p:nvGrpSpPr>
+        <p:cNvPr id="1" name="">
+          <a:extLst>
+            <a:ext uri="{FF2B5EF4-FFF2-40B4-BE49-F238E27FC236}">
+              <a16:creationId xmlns:a16="http://schemas.microsoft.com/office/drawing/2014/main" id="{249F4924-25B7-A338-AD76-849887F67A5D}"/>
+            </a:ext>
+          </a:extLst>
+        </p:cNvPr>
+        <p:cNvGrpSpPr/>
+        <p:nvPr/>
+      </p:nvGrpSpPr>
+      <p:grpSpPr>
+        <a:xfrm>
+          <a:off x="0" y="0"/>
+          <a:ext cx="0" cy="0"/>
+          <a:chOff x="0" y="0"/>
+          <a:chExt cx="0" cy="0"/>
+        </a:xfrm>
+      </p:grpSpPr>
+      <p:sp>
+        <p:nvSpPr>
+          <p:cNvPr id="2" name="Footer Placeholder 1">
+            <a:extLst>
+              <a:ext uri="{FF2B5EF4-FFF2-40B4-BE49-F238E27FC236}">
+                <a16:creationId xmlns:a16="http://schemas.microsoft.com/office/drawing/2014/main" id="{9CDA04CB-410F-E35A-3865-924276D22566}"/>
+              </a:ext>
+            </a:extLst>
+          </p:cNvPr>
+          <p:cNvSpPr>
+            <a:spLocks noGrp="1"/>
+          </p:cNvSpPr>
+          <p:nvPr>
+            <p:ph type="ftr" sz="quarter" idx="11"/>
+          </p:nvPr>
+        </p:nvSpPr>
+        <p:spPr/>
+        <p:txBody>
+          <a:bodyPr/>
+          <a:lstStyle/>
+          <a:p>
+            <a:r>
+              <a:rPr lang="en-US"/>
+              <a:t>www.anubhavtrainings.com</a:t>
+            </a:r>
+            <a:endParaRPr lang="en-US" dirty="0"/>
+          </a:p>
+        </p:txBody>
+      </p:sp>
+      <p:sp>
+        <p:nvSpPr>
+          <p:cNvPr id="3" name="Slide Number Placeholder 2">
+            <a:extLst>
+              <a:ext uri="{FF2B5EF4-FFF2-40B4-BE49-F238E27FC236}">
+                <a16:creationId xmlns:a16="http://schemas.microsoft.com/office/drawing/2014/main" id="{E42EEB52-862B-7FAD-454D-B56560E72FA4}"/>
+              </a:ext>
+            </a:extLst>
+          </p:cNvPr>
+          <p:cNvSpPr>
+            <a:spLocks noGrp="1"/>
+          </p:cNvSpPr>
+          <p:nvPr>
+            <p:ph type="sldNum" sz="quarter" idx="12"/>
+          </p:nvPr>
+        </p:nvSpPr>
+        <p:spPr/>
+        <p:txBody>
+          <a:bodyPr/>
+          <a:lstStyle/>
+          <a:p>
+            <a:fld id="{B6F15528-21DE-4FAA-801E-634DDDAF4B2B}" type="slidenum">
+              <a:rPr lang="en-US" smtClean="0"/>
+              <a:pPr/>
+              <a:t>19</a:t>
+            </a:fld>
+            <a:endParaRPr lang="en-US"/>
+          </a:p>
+        </p:txBody>
+      </p:sp>
+      <p:sp>
+        <p:nvSpPr>
+          <p:cNvPr id="4" name="Title 3">
+            <a:extLst>
+              <a:ext uri="{FF2B5EF4-FFF2-40B4-BE49-F238E27FC236}">
+                <a16:creationId xmlns:a16="http://schemas.microsoft.com/office/drawing/2014/main" id="{5468CF0A-5B58-7EBD-4C4A-D20F5F353931}"/>
+              </a:ext>
+            </a:extLst>
+          </p:cNvPr>
+          <p:cNvSpPr>
+            <a:spLocks noGrp="1"/>
+          </p:cNvSpPr>
+          <p:nvPr>
+            <p:ph type="title"/>
+          </p:nvPr>
+        </p:nvSpPr>
+        <p:spPr/>
+        <p:txBody>
+          <a:bodyPr/>
+          <a:lstStyle/>
+          <a:p>
+            <a:endParaRPr lang="en-IN"/>
+          </a:p>
+        </p:txBody>
+      </p:sp>
+      <mc:AlternateContent xmlns:mc="http://schemas.openxmlformats.org/markup-compatibility/2006" xmlns:p14="http://schemas.microsoft.com/office/powerpoint/2010/main">
+        <mc:Choice Requires="p14">
+          <p:contentPart p14:bwMode="auto" r:id="rId2">
+            <p14:nvContentPartPr>
+              <p14:cNvPr id="5" name="Ink 4">
+                <a:extLst>
+                  <a:ext uri="{FF2B5EF4-FFF2-40B4-BE49-F238E27FC236}">
+                    <a16:creationId xmlns:a16="http://schemas.microsoft.com/office/drawing/2014/main" id="{A7CBDDC0-CE2D-6700-18C3-EC0AF44FEB4A}"/>
+                  </a:ext>
+                </a:extLst>
+              </p14:cNvPr>
+              <p14:cNvContentPartPr/>
+              <p14:nvPr/>
+            </p14:nvContentPartPr>
+            <p14:xfrm>
+              <a:off x="1315357" y="-14658"/>
+              <a:ext cx="360" cy="360"/>
+            </p14:xfrm>
+          </p:contentPart>
+        </mc:Choice>
+        <mc:Fallback xmlns="">
+          <p:pic>
+            <p:nvPicPr>
+              <p:cNvPr id="5" name="Ink 4">
+                <a:extLst>
+                  <a:ext uri="{FF2B5EF4-FFF2-40B4-BE49-F238E27FC236}">
+                    <a16:creationId xmlns:a16="http://schemas.microsoft.com/office/drawing/2014/main" id="{AB080056-AF3B-2DD1-1233-CD37BCC6426B}"/>
+                  </a:ext>
+                </a:extLst>
+              </p:cNvPr>
+              <p:cNvPicPr/>
+              <p:nvPr/>
+            </p:nvPicPr>
+            <p:blipFill>
+              <a:blip r:embed="rId3"/>
+              <a:stretch>
+                <a:fillRect/>
+              </a:stretch>
+            </p:blipFill>
+            <p:spPr>
+              <a:xfrm>
+                <a:off x="1306357" y="-23658"/>
+                <a:ext cx="18000" cy="18000"/>
+              </a:xfrm>
+              <a:prstGeom prst="rect">
+                <a:avLst/>
+              </a:prstGeom>
+            </p:spPr>
+          </p:pic>
+        </mc:Fallback>
+      </mc:AlternateContent>
+    </p:spTree>
+    <p:extLst>
+      <p:ext uri="{BB962C8B-B14F-4D97-AF65-F5344CB8AC3E}">
+        <p14:creationId xmlns:p14="http://schemas.microsoft.com/office/powerpoint/2010/main" val="2751902423"/>
+      </p:ext>
+    </p:extLst>
+  </p:cSld>
+  <p:clrMapOvr>
+    <a:masterClrMapping/>
+  </p:clrMapOvr>
+</p:sld>
+</file>
+
+<file path=ppt/slides/slide2.xml><?xml version="1.0" encoding="utf-8"?>
+<p:sld xmlns:a="http://schemas.openxmlformats.org/drawingml/2006/main" xmlns:r="http://schemas.openxmlformats.org/officeDocument/2006/relationships" xmlns:p="http://schemas.openxmlformats.org/presentationml/2006/main">
+  <p:cSld>
+    <p:spTree>
+      <p:nvGrpSpPr>
+        <p:cNvPr id="1" name=""/>
+        <p:cNvGrpSpPr/>
+        <p:nvPr/>
+      </p:nvGrpSpPr>
+      <p:grpSpPr>
+        <a:xfrm>
+          <a:off x="0" y="0"/>
+          <a:ext cx="0" cy="0"/>
+          <a:chOff x="0" y="0"/>
+          <a:chExt cx="0" cy="0"/>
+        </a:xfrm>
+      </p:grpSpPr>
+      <p:pic>
+        <p:nvPicPr>
+          <p:cNvPr id="2" name="Picture Placeholder 1"/>
+          <p:cNvPicPr>
+            <a:picLocks noGrp="1" noChangeAspect="1"/>
+          </p:cNvPicPr>
+          <p:nvPr>
+            <p:ph type="pic" idx="1"/>
+          </p:nvPr>
+        </p:nvPicPr>
+        <p:blipFill rotWithShape="1">
+          <a:blip r:embed="rId2" cstate="email">
+            <a:extLst>
+              <a:ext uri="{28A0092B-C50C-407E-A947-70E740481C1C}">
+                <a14:useLocalDpi xmlns:a14="http://schemas.microsoft.com/office/drawing/2010/main"/>
+              </a:ext>
+            </a:extLst>
+          </a:blip>
+          <a:srcRect/>
+          <a:stretch/>
+        </p:blipFill>
+        <p:spPr>
+          <a:solidFill>
+            <a:schemeClr val="bg1">
+              <a:lumMod val="95000"/>
+            </a:schemeClr>
+          </a:solidFill>
+        </p:spPr>
+      </p:pic>
+      <p:sp>
+        <p:nvSpPr>
+          <p:cNvPr id="13" name="Rectangle 12">
+            <a:extLst>
+              <a:ext uri="{FF2B5EF4-FFF2-40B4-BE49-F238E27FC236}">
+                <a16:creationId xmlns:a16="http://schemas.microsoft.com/office/drawing/2014/main" id="{EE1D1380-BC28-F74F-8866-BD4C0AD42595}"/>
+              </a:ext>
+            </a:extLst>
+          </p:cNvPr>
+          <p:cNvSpPr/>
+          <p:nvPr/>
+        </p:nvSpPr>
+        <p:spPr>
+          <a:xfrm>
+            <a:off x="2382" y="-10043"/>
+            <a:ext cx="9139238" cy="5691851"/>
+          </a:xfrm>
+          <a:prstGeom prst="rect">
+            <a:avLst/>
+          </a:prstGeom>
+          <a:solidFill>
+            <a:schemeClr val="bg1">
+              <a:alpha val="0"/>
+            </a:schemeClr>
+          </a:solidFill>
+          <a:ln>
+            <a:noFill/>
+          </a:ln>
+        </p:spPr>
+        <p:style>
+          <a:lnRef idx="2">
+            <a:schemeClr val="accent1">
+              <a:shade val="50000"/>
+            </a:schemeClr>
+          </a:lnRef>
+          <a:fillRef idx="1">
+            <a:schemeClr val="accent1"/>
+          </a:fillRef>
+          <a:effectRef idx="0">
+            <a:schemeClr val="accent1"/>
+          </a:effectRef>
+          <a:fontRef idx="minor">
+            <a:schemeClr val="lt1"/>
+          </a:fontRef>
+        </p:style>
+        <p:txBody>
+          <a:bodyPr rtlCol="0" anchor="ctr"/>
+          <a:lstStyle/>
+          <a:p>
+            <a:pPr algn="ctr" defTabSz="685457">
+              <a:defRPr/>
+            </a:pPr>
+            <a:endParaRPr lang="en-US" sz="1349">
+              <a:solidFill>
+                <a:srgbClr val="FFFFFF"/>
+              </a:solidFill>
+              <a:latin typeface="Arial" panose="020B0604020202020204"/>
+            </a:endParaRPr>
+          </a:p>
+        </p:txBody>
+      </p:sp>
+      <p:sp>
+        <p:nvSpPr>
+          <p:cNvPr id="6" name="Rectangle 5"/>
+          <p:cNvSpPr/>
+          <p:nvPr/>
+        </p:nvSpPr>
+        <p:spPr>
+          <a:xfrm>
+            <a:off x="2382" y="2392863"/>
+            <a:ext cx="9139238" cy="1882229"/>
+          </a:xfrm>
+          <a:prstGeom prst="rect">
+            <a:avLst/>
+          </a:prstGeom>
+          <a:gradFill flip="none" rotWithShape="1">
+            <a:gsLst>
+              <a:gs pos="13000">
+                <a:srgbClr val="25B6C2">
+                  <a:alpha val="50000"/>
+                </a:srgbClr>
+              </a:gs>
+              <a:gs pos="100000">
+                <a:srgbClr val="0692DB">
+                  <a:alpha val="50000"/>
+                </a:srgbClr>
+              </a:gs>
+            </a:gsLst>
+            <a:lin ang="2700000" scaled="0"/>
+            <a:tileRect/>
+          </a:gradFill>
+          <a:ln>
+            <a:noFill/>
+          </a:ln>
+        </p:spPr>
+        <p:style>
+          <a:lnRef idx="2">
+            <a:schemeClr val="accent1">
+              <a:shade val="50000"/>
+            </a:schemeClr>
+          </a:lnRef>
+          <a:fillRef idx="1">
+            <a:schemeClr val="accent1"/>
+          </a:fillRef>
+          <a:effectRef idx="0">
+            <a:schemeClr val="accent1"/>
+          </a:effectRef>
+          <a:fontRef idx="minor">
+            <a:schemeClr val="lt1"/>
+          </a:fontRef>
+        </p:style>
+        <p:txBody>
+          <a:bodyPr rtlCol="0" anchor="ctr"/>
+          <a:lstStyle/>
+          <a:p>
+            <a:pPr algn="ctr" defTabSz="685457">
+              <a:defRPr/>
+            </a:pPr>
+            <a:endParaRPr lang="ko-KR" altLang="en-US" sz="1349">
+              <a:solidFill>
+                <a:srgbClr val="FFFFFF"/>
+              </a:solidFill>
+              <a:latin typeface="Arial" panose="020B0604020202020204"/>
+              <a:ea typeface="굴림" panose="020B0600000101010101" pitchFamily="34" charset="-127"/>
+            </a:endParaRPr>
+          </a:p>
+        </p:txBody>
+      </p:sp>
+      <p:sp>
+        <p:nvSpPr>
+          <p:cNvPr id="7" name="Rectangle 6"/>
+          <p:cNvSpPr/>
+          <p:nvPr/>
+        </p:nvSpPr>
+        <p:spPr>
+          <a:xfrm>
+            <a:off x="2382" y="2522237"/>
+            <a:ext cx="9139238" cy="1595821"/>
+          </a:xfrm>
+          <a:prstGeom prst="rect">
+            <a:avLst/>
+          </a:prstGeom>
+          <a:gradFill flip="none" rotWithShape="1">
+            <a:gsLst>
+              <a:gs pos="13000">
+                <a:srgbClr val="25B6C2"/>
+              </a:gs>
+              <a:gs pos="100000">
+                <a:srgbClr val="0692DB"/>
+              </a:gs>
+            </a:gsLst>
+            <a:lin ang="2700000" scaled="0"/>
+            <a:tileRect/>
+          </a:gradFill>
+          <a:ln>
+            <a:noFill/>
+          </a:ln>
+        </p:spPr>
+        <p:style>
+          <a:lnRef idx="2">
+            <a:schemeClr val="accent1">
+              <a:shade val="50000"/>
+            </a:schemeClr>
+          </a:lnRef>
+          <a:fillRef idx="1">
+            <a:schemeClr val="accent1"/>
+          </a:fillRef>
+          <a:effectRef idx="0">
+            <a:schemeClr val="accent1"/>
+          </a:effectRef>
+          <a:fontRef idx="minor">
+            <a:schemeClr val="lt1"/>
+          </a:fontRef>
+        </p:style>
+        <p:txBody>
+          <a:bodyPr rtlCol="0" anchor="ctr"/>
+          <a:lstStyle/>
+          <a:p>
+            <a:pPr algn="ctr" defTabSz="685457">
+              <a:defRPr/>
+            </a:pPr>
+            <a:endParaRPr lang="ko-KR" altLang="en-US" sz="1349">
+              <a:solidFill>
+                <a:srgbClr val="FFFFFF"/>
+              </a:solidFill>
+              <a:latin typeface="Arial" panose="020B0604020202020204"/>
+              <a:ea typeface="굴림" panose="020B0600000101010101" pitchFamily="34" charset="-127"/>
+            </a:endParaRPr>
+          </a:p>
+        </p:txBody>
+      </p:sp>
+      <p:sp>
+        <p:nvSpPr>
+          <p:cNvPr id="19" name="TextBox 18">
+            <a:extLst>
+              <a:ext uri="{FF2B5EF4-FFF2-40B4-BE49-F238E27FC236}">
+                <a16:creationId xmlns:a16="http://schemas.microsoft.com/office/drawing/2014/main" id="{B945CD40-9ABD-7441-A0F8-C5ACA34BB34C}"/>
+              </a:ext>
+            </a:extLst>
+          </p:cNvPr>
+          <p:cNvSpPr txBox="1"/>
+          <p:nvPr/>
+        </p:nvSpPr>
+        <p:spPr>
+          <a:xfrm>
+            <a:off x="2881727" y="2577435"/>
+            <a:ext cx="3380548" cy="507703"/>
+          </a:xfrm>
+          <a:prstGeom prst="rect">
+            <a:avLst/>
+          </a:prstGeom>
+          <a:noFill/>
+          <a:ln>
+            <a:noFill/>
+          </a:ln>
+        </p:spPr>
+        <p:txBody>
+          <a:bodyPr wrap="square" rtlCol="0">
+            <a:spAutoFit/>
+          </a:bodyPr>
+          <a:lstStyle/>
+          <a:p>
+            <a:pPr algn="ctr" defTabSz="685457">
+              <a:defRPr/>
+            </a:pPr>
+            <a:r>
+              <a:rPr lang="en-IN" sz="2699" b="1" dirty="0">
+                <a:solidFill>
+                  <a:srgbClr val="FFFFFF"/>
+                </a:solidFill>
+                <a:latin typeface="Arial" panose="020B0604020202020204" pitchFamily="34" charset="0"/>
+                <a:ea typeface="Cambria" panose="02040503050406030204" pitchFamily="18" charset="0"/>
+                <a:cs typeface="Arial" panose="020B0604020202020204" pitchFamily="34" charset="0"/>
+              </a:rPr>
+              <a:t>DISCLAIMER</a:t>
+            </a:r>
+            <a:endParaRPr lang="en-US" sz="2474" spc="113" dirty="0">
+              <a:solidFill>
+                <a:srgbClr val="FFFFFF"/>
+              </a:solidFill>
+              <a:latin typeface="Arial" panose="020B0604020202020204" pitchFamily="34" charset="0"/>
+              <a:ea typeface="Lato Medium" panose="020F0502020204030203" pitchFamily="34" charset="0"/>
+              <a:cs typeface="Arial" panose="020B0604020202020204" pitchFamily="34" charset="0"/>
+            </a:endParaRPr>
+          </a:p>
+        </p:txBody>
+      </p:sp>
+      <p:sp>
+        <p:nvSpPr>
+          <p:cNvPr id="20" name="TextBox 19">
+            <a:extLst>
+              <a:ext uri="{FF2B5EF4-FFF2-40B4-BE49-F238E27FC236}">
+                <a16:creationId xmlns:a16="http://schemas.microsoft.com/office/drawing/2014/main" id="{B945CD40-9ABD-7441-A0F8-C5ACA34BB34C}"/>
+              </a:ext>
+            </a:extLst>
+          </p:cNvPr>
+          <p:cNvSpPr txBox="1"/>
+          <p:nvPr/>
+        </p:nvSpPr>
+        <p:spPr>
+          <a:xfrm>
+            <a:off x="332706" y="3044889"/>
+            <a:ext cx="8478590" cy="922945"/>
+          </a:xfrm>
+          <a:prstGeom prst="rect">
+            <a:avLst/>
+          </a:prstGeom>
+          <a:noFill/>
+          <a:ln>
+            <a:noFill/>
+          </a:ln>
+        </p:spPr>
+        <p:txBody>
+          <a:bodyPr wrap="square" rtlCol="0">
+            <a:spAutoFit/>
+          </a:bodyPr>
+          <a:lstStyle/>
+          <a:p>
+            <a:pPr algn="ctr" defTabSz="685457">
+              <a:defRPr/>
+            </a:pPr>
+            <a:r>
+              <a:rPr lang="en-IN" sz="1799" dirty="0">
+                <a:solidFill>
+                  <a:srgbClr val="FFFFFF"/>
+                </a:solidFill>
+                <a:latin typeface="Arial" panose="020B0604020202020204" pitchFamily="34" charset="0"/>
+                <a:cs typeface="Arial" panose="020B0604020202020204" pitchFamily="34" charset="0"/>
+              </a:rPr>
+              <a:t>The training content and delivery of this presentation is confidential, and cannot be recorded, or copied and distributed to any third party, without the written consent of Anubhav Trainings</a:t>
+            </a:r>
+          </a:p>
+        </p:txBody>
+      </p:sp>
+      <p:pic>
+        <p:nvPicPr>
+          <p:cNvPr id="9" name="Picture 4">
+            <a:extLst>
+              <a:ext uri="{FF2B5EF4-FFF2-40B4-BE49-F238E27FC236}">
+                <a16:creationId xmlns:a16="http://schemas.microsoft.com/office/drawing/2014/main" id="{DB8A7F7E-7F2C-20C1-2A09-7D9F11F6AD11}"/>
+              </a:ext>
+            </a:extLst>
+          </p:cNvPr>
+          <p:cNvPicPr>
+            <a:picLocks noChangeAspect="1" noChangeArrowheads="1"/>
+          </p:cNvPicPr>
+          <p:nvPr/>
+        </p:nvPicPr>
+        <p:blipFill>
+          <a:blip r:embed="rId3" cstate="print">
+            <a:extLst>
+              <a:ext uri="{28A0092B-C50C-407E-A947-70E740481C1C}">
+                <a14:useLocalDpi xmlns:a14="http://schemas.microsoft.com/office/drawing/2010/main" val="0"/>
+              </a:ext>
+            </a:extLst>
+          </a:blip>
+          <a:srcRect/>
+          <a:stretch>
+            <a:fillRect/>
+          </a:stretch>
+        </p:blipFill>
+        <p:spPr bwMode="auto">
+          <a:xfrm>
+            <a:off x="8650243" y="0"/>
+            <a:ext cx="491377" cy="485336"/>
+          </a:xfrm>
+          <a:prstGeom prst="rect">
+            <a:avLst/>
+          </a:prstGeom>
+          <a:noFill/>
+          <a:extLst>
+            <a:ext uri="{909E8E84-426E-40DD-AFC4-6F175D3DCCD1}">
+              <a14:hiddenFill xmlns:a14="http://schemas.microsoft.com/office/drawing/2010/main">
+                <a:solidFill>
+                  <a:srgbClr val="FFFFFF"/>
+                </a:solidFill>
+              </a14:hiddenFill>
+            </a:ext>
+          </a:extLst>
+        </p:spPr>
+      </p:pic>
+    </p:spTree>
+    <p:extLst>
+      <p:ext uri="{BB962C8B-B14F-4D97-AF65-F5344CB8AC3E}">
+        <p14:creationId xmlns:p14="http://schemas.microsoft.com/office/powerpoint/2010/main" val="2063806236"/>
+      </p:ext>
+    </p:extLst>
+  </p:cSld>
+  <p:clrMapOvr>
+    <a:masterClrMapping/>
+  </p:clrMapOvr>
+  <mc:AlternateContent xmlns:mc="http://schemas.openxmlformats.org/markup-compatibility/2006" xmlns:p14="http://schemas.microsoft.com/office/powerpoint/2010/main">
+    <mc:Choice Requires="p14">
+      <p:transition spd="med" p14:dur="700">
+        <p:fade/>
+      </p:transition>
+    </mc:Choice>
+    <mc:Fallback xmlns="">
+      <p:transition spd="med">
+        <p:fade/>
+      </p:transition>
+    </mc:Fallback>
+  </mc:AlternateContent>
+</p:sld>
+</file>
+
+<file path=ppt/slides/slide20.xml><?xml version="1.0" encoding="utf-8"?>
+<p:sld xmlns:a="http://schemas.openxmlformats.org/drawingml/2006/main" xmlns:r="http://schemas.openxmlformats.org/officeDocument/2006/relationships" xmlns:p="http://schemas.openxmlformats.org/presentationml/2006/main">
+  <p:cSld>
+    <p:spTree>
+      <p:nvGrpSpPr>
+        <p:cNvPr id="1" name=""/>
+        <p:cNvGrpSpPr/>
+        <p:nvPr/>
+      </p:nvGrpSpPr>
+      <p:grpSpPr>
+        <a:xfrm>
+          <a:off x="0" y="0"/>
+          <a:ext cx="0" cy="0"/>
+          <a:chOff x="0" y="0"/>
+          <a:chExt cx="0" cy="0"/>
+        </a:xfrm>
+      </p:grpSpPr>
+      <p:sp>
+        <p:nvSpPr>
+          <p:cNvPr id="5" name="Flowchart: Connector 4"/>
+          <p:cNvSpPr/>
+          <p:nvPr/>
+        </p:nvSpPr>
+        <p:spPr>
+          <a:xfrm>
+            <a:off x="4355976" y="21622"/>
+            <a:ext cx="4168026" cy="4101362"/>
+          </a:xfrm>
+          <a:prstGeom prst="flowChartConnector">
+            <a:avLst/>
+          </a:prstGeom>
+          <a:gradFill flip="none" rotWithShape="1">
+            <a:gsLst>
+              <a:gs pos="0">
+                <a:srgbClr val="55E96E"/>
+              </a:gs>
+              <a:gs pos="46000">
+                <a:srgbClr val="0AEC25"/>
+              </a:gs>
+              <a:gs pos="100000">
+                <a:srgbClr val="00B050"/>
+              </a:gs>
+            </a:gsLst>
+            <a:path path="circle">
+              <a:fillToRect l="50000" t="130000" r="50000" b="-30000"/>
+            </a:path>
+            <a:tileRect/>
+          </a:gradFill>
+          <a:ln>
+            <a:noFill/>
+          </a:ln>
+        </p:spPr>
+        <p:style>
+          <a:lnRef idx="2">
+            <a:schemeClr val="accent1">
+              <a:shade val="50000"/>
+            </a:schemeClr>
+          </a:lnRef>
+          <a:fillRef idx="1">
+            <a:schemeClr val="accent1"/>
+          </a:fillRef>
+          <a:effectRef idx="0">
+            <a:schemeClr val="accent1"/>
+          </a:effectRef>
+          <a:fontRef idx="minor">
+            <a:schemeClr val="lt1"/>
+          </a:fontRef>
+        </p:style>
+        <p:txBody>
+          <a:bodyPr rtlCol="0" anchor="ctr"/>
+          <a:lstStyle/>
+          <a:p>
+            <a:pPr algn="ctr"/>
+            <a:endParaRPr lang="en-US" sz="1350"/>
+          </a:p>
+        </p:txBody>
+      </p:sp>
+      <p:pic>
+        <p:nvPicPr>
+          <p:cNvPr id="6" name="Picture Placeholder 11">
+            <a:extLst>
+              <a:ext uri="{FF2B5EF4-FFF2-40B4-BE49-F238E27FC236}">
+                <a16:creationId xmlns:a16="http://schemas.microsoft.com/office/drawing/2014/main" id="{420F5850-2D59-4C25-ADFF-E9013C5A6AAE}"/>
+              </a:ext>
+            </a:extLst>
+          </p:cNvPr>
+          <p:cNvPicPr>
+            <a:picLocks noChangeAspect="1"/>
+          </p:cNvPicPr>
+          <p:nvPr/>
+        </p:nvPicPr>
+        <p:blipFill>
+          <a:blip r:embed="rId2">
+            <a:extLst>
+              <a:ext uri="{28A0092B-C50C-407E-A947-70E740481C1C}">
+                <a14:useLocalDpi xmlns:a14="http://schemas.microsoft.com/office/drawing/2010/main" val="0"/>
+              </a:ext>
+            </a:extLst>
+          </a:blip>
+          <a:stretch>
+            <a:fillRect/>
+          </a:stretch>
+        </p:blipFill>
+        <p:spPr>
+          <a:xfrm>
+            <a:off x="22649" y="10551"/>
+            <a:ext cx="5088657" cy="4690760"/>
+          </a:xfrm>
+          <a:custGeom>
+            <a:avLst/>
+            <a:gdLst>
+              <a:gd name="connsiteX0" fmla="*/ 0 w 7654699"/>
+              <a:gd name="connsiteY0" fmla="*/ 0 h 5678805"/>
+              <a:gd name="connsiteX1" fmla="*/ 7654699 w 7654699"/>
+              <a:gd name="connsiteY1" fmla="*/ 0 h 5678805"/>
+              <a:gd name="connsiteX2" fmla="*/ 7654699 w 7654699"/>
+              <a:gd name="connsiteY2" fmla="*/ 0 h 5678805"/>
+              <a:gd name="connsiteX3" fmla="*/ 7654699 w 7654699"/>
+              <a:gd name="connsiteY3" fmla="*/ 4808982 h 5678805"/>
+              <a:gd name="connsiteX4" fmla="*/ 6784876 w 7654699"/>
+              <a:gd name="connsiteY4" fmla="*/ 5678805 h 5678805"/>
+              <a:gd name="connsiteX5" fmla="*/ 869823 w 7654699"/>
+              <a:gd name="connsiteY5" fmla="*/ 5678805 h 5678805"/>
+              <a:gd name="connsiteX6" fmla="*/ 0 w 7654699"/>
+              <a:gd name="connsiteY6" fmla="*/ 4808982 h 5678805"/>
+              <a:gd name="connsiteX7" fmla="*/ 0 w 7654699"/>
+              <a:gd name="connsiteY7" fmla="*/ 0 h 5678805"/>
+              <a:gd name="connsiteX8" fmla="*/ 0 w 7654699"/>
+              <a:gd name="connsiteY8" fmla="*/ 0 h 5678805"/>
+              <a:gd name="connsiteX0" fmla="*/ 0 w 7654699"/>
+              <a:gd name="connsiteY0" fmla="*/ 6717 h 5685522"/>
+              <a:gd name="connsiteX1" fmla="*/ 901515 w 7654699"/>
+              <a:gd name="connsiteY1" fmla="*/ 0 h 5685522"/>
+              <a:gd name="connsiteX2" fmla="*/ 7654699 w 7654699"/>
+              <a:gd name="connsiteY2" fmla="*/ 6717 h 5685522"/>
+              <a:gd name="connsiteX3" fmla="*/ 7654699 w 7654699"/>
+              <a:gd name="connsiteY3" fmla="*/ 6717 h 5685522"/>
+              <a:gd name="connsiteX4" fmla="*/ 7654699 w 7654699"/>
+              <a:gd name="connsiteY4" fmla="*/ 4815699 h 5685522"/>
+              <a:gd name="connsiteX5" fmla="*/ 6784876 w 7654699"/>
+              <a:gd name="connsiteY5" fmla="*/ 5685522 h 5685522"/>
+              <a:gd name="connsiteX6" fmla="*/ 869823 w 7654699"/>
+              <a:gd name="connsiteY6" fmla="*/ 5685522 h 5685522"/>
+              <a:gd name="connsiteX7" fmla="*/ 0 w 7654699"/>
+              <a:gd name="connsiteY7" fmla="*/ 4815699 h 5685522"/>
+              <a:gd name="connsiteX8" fmla="*/ 0 w 7654699"/>
+              <a:gd name="connsiteY8" fmla="*/ 6717 h 5685522"/>
+              <a:gd name="connsiteX9" fmla="*/ 0 w 7654699"/>
+              <a:gd name="connsiteY9" fmla="*/ 6717 h 5685522"/>
+              <a:gd name="connsiteX0" fmla="*/ 0 w 7654699"/>
+              <a:gd name="connsiteY0" fmla="*/ 6717 h 5685522"/>
+              <a:gd name="connsiteX1" fmla="*/ 901515 w 7654699"/>
+              <a:gd name="connsiteY1" fmla="*/ 0 h 5685522"/>
+              <a:gd name="connsiteX2" fmla="*/ 7654699 w 7654699"/>
+              <a:gd name="connsiteY2" fmla="*/ 6717 h 5685522"/>
+              <a:gd name="connsiteX3" fmla="*/ 7654699 w 7654699"/>
+              <a:gd name="connsiteY3" fmla="*/ 6717 h 5685522"/>
+              <a:gd name="connsiteX4" fmla="*/ 7654699 w 7654699"/>
+              <a:gd name="connsiteY4" fmla="*/ 4815699 h 5685522"/>
+              <a:gd name="connsiteX5" fmla="*/ 6784876 w 7654699"/>
+              <a:gd name="connsiteY5" fmla="*/ 5685522 h 5685522"/>
+              <a:gd name="connsiteX6" fmla="*/ 869823 w 7654699"/>
+              <a:gd name="connsiteY6" fmla="*/ 5685522 h 5685522"/>
+              <a:gd name="connsiteX7" fmla="*/ 0 w 7654699"/>
+              <a:gd name="connsiteY7" fmla="*/ 4815699 h 5685522"/>
+              <a:gd name="connsiteX8" fmla="*/ 0 w 7654699"/>
+              <a:gd name="connsiteY8" fmla="*/ 6717 h 5685522"/>
+              <a:gd name="connsiteX0" fmla="*/ 0 w 7654699"/>
+              <a:gd name="connsiteY0" fmla="*/ 4815699 h 5685522"/>
+              <a:gd name="connsiteX1" fmla="*/ 901515 w 7654699"/>
+              <a:gd name="connsiteY1" fmla="*/ 0 h 5685522"/>
+              <a:gd name="connsiteX2" fmla="*/ 7654699 w 7654699"/>
+              <a:gd name="connsiteY2" fmla="*/ 6717 h 5685522"/>
+              <a:gd name="connsiteX3" fmla="*/ 7654699 w 7654699"/>
+              <a:gd name="connsiteY3" fmla="*/ 6717 h 5685522"/>
+              <a:gd name="connsiteX4" fmla="*/ 7654699 w 7654699"/>
+              <a:gd name="connsiteY4" fmla="*/ 4815699 h 5685522"/>
+              <a:gd name="connsiteX5" fmla="*/ 6784876 w 7654699"/>
+              <a:gd name="connsiteY5" fmla="*/ 5685522 h 5685522"/>
+              <a:gd name="connsiteX6" fmla="*/ 869823 w 7654699"/>
+              <a:gd name="connsiteY6" fmla="*/ 5685522 h 5685522"/>
+              <a:gd name="connsiteX7" fmla="*/ 0 w 7654699"/>
+              <a:gd name="connsiteY7" fmla="*/ 4815699 h 5685522"/>
+              <a:gd name="connsiteX0" fmla="*/ 776254 w 7561130"/>
+              <a:gd name="connsiteY0" fmla="*/ 5685522 h 5685522"/>
+              <a:gd name="connsiteX1" fmla="*/ 807946 w 7561130"/>
+              <a:gd name="connsiteY1" fmla="*/ 0 h 5685522"/>
+              <a:gd name="connsiteX2" fmla="*/ 7561130 w 7561130"/>
+              <a:gd name="connsiteY2" fmla="*/ 6717 h 5685522"/>
+              <a:gd name="connsiteX3" fmla="*/ 7561130 w 7561130"/>
+              <a:gd name="connsiteY3" fmla="*/ 6717 h 5685522"/>
+              <a:gd name="connsiteX4" fmla="*/ 7561130 w 7561130"/>
+              <a:gd name="connsiteY4" fmla="*/ 4815699 h 5685522"/>
+              <a:gd name="connsiteX5" fmla="*/ 6691307 w 7561130"/>
+              <a:gd name="connsiteY5" fmla="*/ 5685522 h 5685522"/>
+              <a:gd name="connsiteX6" fmla="*/ 776254 w 7561130"/>
+              <a:gd name="connsiteY6" fmla="*/ 5685522 h 5685522"/>
+              <a:gd name="connsiteX0" fmla="*/ 0 w 6784876"/>
+              <a:gd name="connsiteY0" fmla="*/ 5685522 h 5685522"/>
+              <a:gd name="connsiteX1" fmla="*/ 31692 w 6784876"/>
+              <a:gd name="connsiteY1" fmla="*/ 0 h 5685522"/>
+              <a:gd name="connsiteX2" fmla="*/ 6784876 w 6784876"/>
+              <a:gd name="connsiteY2" fmla="*/ 6717 h 5685522"/>
+              <a:gd name="connsiteX3" fmla="*/ 6784876 w 6784876"/>
+              <a:gd name="connsiteY3" fmla="*/ 6717 h 5685522"/>
+              <a:gd name="connsiteX4" fmla="*/ 6784876 w 6784876"/>
+              <a:gd name="connsiteY4" fmla="*/ 4815699 h 5685522"/>
+              <a:gd name="connsiteX5" fmla="*/ 5915053 w 6784876"/>
+              <a:gd name="connsiteY5" fmla="*/ 5685522 h 5685522"/>
+              <a:gd name="connsiteX6" fmla="*/ 0 w 6784876"/>
+              <a:gd name="connsiteY6" fmla="*/ 5685522 h 5685522"/>
+            </a:gdLst>
+            <a:ahLst/>
+            <a:cxnLst>
+              <a:cxn ang="0">
+                <a:pos x="connsiteX0" y="connsiteY0"/>
+              </a:cxn>
+              <a:cxn ang="0">
+                <a:pos x="connsiteX1" y="connsiteY1"/>
+              </a:cxn>
+              <a:cxn ang="0">
+                <a:pos x="connsiteX2" y="connsiteY2"/>
+              </a:cxn>
+              <a:cxn ang="0">
+                <a:pos x="connsiteX3" y="connsiteY3"/>
+              </a:cxn>
+              <a:cxn ang="0">
+                <a:pos x="connsiteX4" y="connsiteY4"/>
+              </a:cxn>
+              <a:cxn ang="0">
+                <a:pos x="connsiteX5" y="connsiteY5"/>
+              </a:cxn>
+              <a:cxn ang="0">
+                <a:pos x="connsiteX6" y="connsiteY6"/>
+              </a:cxn>
+            </a:cxnLst>
+            <a:rect l="l" t="t" r="r" b="b"/>
+            <a:pathLst>
+              <a:path w="6784876" h="5685522">
+                <a:moveTo>
+                  <a:pt x="0" y="5685522"/>
+                </a:moveTo>
+                <a:lnTo>
+                  <a:pt x="31692" y="0"/>
+                </a:lnTo>
+                <a:lnTo>
+                  <a:pt x="6784876" y="6717"/>
+                </a:lnTo>
+                <a:lnTo>
+                  <a:pt x="6784876" y="6717"/>
+                </a:lnTo>
+                <a:lnTo>
+                  <a:pt x="6784876" y="4815699"/>
+                </a:lnTo>
+                <a:cubicBezTo>
+                  <a:pt x="6784876" y="5296089"/>
+                  <a:pt x="6395443" y="5685522"/>
+                  <a:pt x="5915053" y="5685522"/>
+                </a:cubicBezTo>
+                <a:lnTo>
+                  <a:pt x="0" y="5685522"/>
+                </a:lnTo>
+                <a:close/>
+              </a:path>
+            </a:pathLst>
+          </a:custGeom>
+        </p:spPr>
+      </p:pic>
+      <p:sp>
+        <p:nvSpPr>
+          <p:cNvPr id="7" name="Rectangle: Rounded Corners 3">
+            <a:extLst>
+              <a:ext uri="{FF2B5EF4-FFF2-40B4-BE49-F238E27FC236}">
+                <a16:creationId xmlns:a16="http://schemas.microsoft.com/office/drawing/2014/main" id="{4DCA9A03-C201-42B6-AF8D-AB31333C8852}"/>
+              </a:ext>
+            </a:extLst>
+          </p:cNvPr>
+          <p:cNvSpPr/>
+          <p:nvPr/>
+        </p:nvSpPr>
+        <p:spPr>
+          <a:xfrm>
+            <a:off x="4550245" y="735546"/>
+            <a:ext cx="3973757" cy="2082201"/>
+          </a:xfrm>
+          <a:prstGeom prst="roundRect">
+            <a:avLst>
+              <a:gd name="adj" fmla="val 8835"/>
+            </a:avLst>
+          </a:prstGeom>
+          <a:solidFill>
+            <a:schemeClr val="bg1"/>
+          </a:solidFill>
+          <a:ln>
+            <a:noFill/>
+          </a:ln>
+          <a:effectLst>
+            <a:outerShdw blurRad="635000" dist="825500" dir="9600000" algn="tr" rotWithShape="0">
+              <a:prstClr val="black">
+                <a:alpha val="20000"/>
+              </a:prstClr>
+            </a:outerShdw>
+          </a:effectLst>
+        </p:spPr>
+        <p:style>
+          <a:lnRef idx="2">
+            <a:schemeClr val="accent1">
+              <a:shade val="50000"/>
+            </a:schemeClr>
+          </a:lnRef>
+          <a:fillRef idx="1">
+            <a:schemeClr val="accent1"/>
+          </a:fillRef>
+          <a:effectRef idx="0">
+            <a:schemeClr val="accent1"/>
+          </a:effectRef>
+          <a:fontRef idx="minor">
+            <a:schemeClr val="lt1"/>
+          </a:fontRef>
+        </p:style>
+        <p:txBody>
+          <a:bodyPr rtlCol="0" anchor="ctr"/>
+          <a:lstStyle/>
+          <a:p>
+            <a:pPr algn="ctr"/>
+            <a:endParaRPr lang="en-IN" sz="1350" dirty="0"/>
+          </a:p>
+        </p:txBody>
+      </p:sp>
+      <p:sp>
+        <p:nvSpPr>
+          <p:cNvPr id="8" name="TextBox 7">
+            <a:extLst>
+              <a:ext uri="{FF2B5EF4-FFF2-40B4-BE49-F238E27FC236}">
+                <a16:creationId xmlns:a16="http://schemas.microsoft.com/office/drawing/2014/main" id="{4B09D3EC-7881-4341-8189-469046CA259E}"/>
+              </a:ext>
+            </a:extLst>
+          </p:cNvPr>
+          <p:cNvSpPr txBox="1"/>
+          <p:nvPr/>
+        </p:nvSpPr>
+        <p:spPr>
+          <a:xfrm>
+            <a:off x="4981951" y="1042138"/>
+            <a:ext cx="3179963" cy="461665"/>
+          </a:xfrm>
+          <a:prstGeom prst="rect">
+            <a:avLst/>
+          </a:prstGeom>
+          <a:noFill/>
+        </p:spPr>
+        <p:txBody>
+          <a:bodyPr wrap="square" lIns="0" tIns="0" rIns="0" bIns="0" rtlCol="0">
+            <a:spAutoFit/>
+          </a:bodyPr>
+          <a:lstStyle/>
+          <a:p>
+            <a:r>
+              <a:rPr lang="en-IN" sz="3000" b="1" dirty="0">
+                <a:solidFill>
+                  <a:srgbClr val="75C042"/>
+                </a:solidFill>
+              </a:rPr>
+              <a:t>What We </a:t>
+            </a:r>
+            <a:r>
+              <a:rPr lang="en-IN" sz="3000" b="1" dirty="0">
+                <a:solidFill>
+                  <a:srgbClr val="55E96E"/>
+                </a:solidFill>
+                <a:latin typeface="Segoe UI Light" panose="020B0502040204020203" pitchFamily="34" charset="0"/>
+                <a:cs typeface="Segoe UI Light" panose="020B0502040204020203" pitchFamily="34" charset="0"/>
+              </a:rPr>
+              <a:t>Did</a:t>
+            </a:r>
+          </a:p>
+        </p:txBody>
+      </p:sp>
+      <p:sp>
+        <p:nvSpPr>
+          <p:cNvPr id="9" name="TextBox 8">
+            <a:extLst>
+              <a:ext uri="{FF2B5EF4-FFF2-40B4-BE49-F238E27FC236}">
+                <a16:creationId xmlns:a16="http://schemas.microsoft.com/office/drawing/2014/main" id="{A0CBE2D0-9475-4BE8-AC62-B9A03DC275C3}"/>
+              </a:ext>
+            </a:extLst>
+          </p:cNvPr>
+          <p:cNvSpPr txBox="1"/>
+          <p:nvPr/>
+        </p:nvSpPr>
+        <p:spPr>
+          <a:xfrm>
+            <a:off x="4981951" y="1610639"/>
+            <a:ext cx="3179963" cy="461665"/>
+          </a:xfrm>
+          <a:prstGeom prst="rect">
+            <a:avLst/>
+          </a:prstGeom>
+          <a:noFill/>
+        </p:spPr>
+        <p:txBody>
+          <a:bodyPr wrap="square" lIns="0" tIns="0" rIns="0" bIns="0" rtlCol="0" anchor="t">
+            <a:spAutoFit/>
+          </a:bodyPr>
+          <a:lstStyle/>
+          <a:p>
+            <a:r>
+              <a:rPr lang="en-US" sz="3000" kern="0" dirty="0">
+                <a:solidFill>
+                  <a:schemeClr val="tx1">
+                    <a:lumMod val="75000"/>
+                    <a:lumOff val="25000"/>
+                  </a:schemeClr>
+                </a:solidFill>
+                <a:latin typeface="Segoe UI" panose="020B0502040204020203" pitchFamily="34" charset="0"/>
+                <a:ea typeface="Calibri Light" charset="0"/>
+                <a:cs typeface="Segoe UI" panose="020B0502040204020203" pitchFamily="34" charset="0"/>
+              </a:rPr>
+              <a:t>Let’s Summarize</a:t>
+            </a:r>
+            <a:endParaRPr lang="en-US" sz="3000" dirty="0">
+              <a:solidFill>
+                <a:schemeClr val="tx1">
+                  <a:lumMod val="75000"/>
+                  <a:lumOff val="25000"/>
+                </a:schemeClr>
+              </a:solidFill>
+              <a:latin typeface="Segoe UI" panose="020B0502040204020203" pitchFamily="34" charset="0"/>
+              <a:ea typeface="Calibri Light" charset="0"/>
+              <a:cs typeface="Segoe UI" panose="020B0502040204020203" pitchFamily="34" charset="0"/>
+            </a:endParaRPr>
+          </a:p>
+        </p:txBody>
+      </p:sp>
+      <p:grpSp>
+        <p:nvGrpSpPr>
+          <p:cNvPr id="10" name="Group 9">
+            <a:extLst>
+              <a:ext uri="{FF2B5EF4-FFF2-40B4-BE49-F238E27FC236}">
+                <a16:creationId xmlns:a16="http://schemas.microsoft.com/office/drawing/2014/main" id="{CBADDFA3-0336-41F5-81AE-B9456B828C2C}"/>
+              </a:ext>
+            </a:extLst>
+          </p:cNvPr>
+          <p:cNvGrpSpPr/>
+          <p:nvPr/>
+        </p:nvGrpSpPr>
+        <p:grpSpPr>
+          <a:xfrm>
+            <a:off x="4999393" y="2370854"/>
+            <a:ext cx="463016" cy="82493"/>
+            <a:chOff x="6006451" y="5603130"/>
+            <a:chExt cx="617354" cy="109990"/>
+          </a:xfrm>
+        </p:grpSpPr>
+        <p:sp>
+          <p:nvSpPr>
+            <p:cNvPr id="11" name="Rectangle 5">
+              <a:extLst>
+                <a:ext uri="{FF2B5EF4-FFF2-40B4-BE49-F238E27FC236}">
+                  <a16:creationId xmlns:a16="http://schemas.microsoft.com/office/drawing/2014/main" id="{EF42471A-33F9-4E04-8306-66A59FCEE04D}"/>
+                </a:ext>
+              </a:extLst>
+            </p:cNvPr>
+            <p:cNvSpPr>
+              <a:spLocks noChangeArrowheads="1"/>
+            </p:cNvSpPr>
+            <p:nvPr/>
+          </p:nvSpPr>
+          <p:spPr bwMode="auto">
+            <a:xfrm>
+              <a:off x="6006451" y="5603130"/>
+              <a:ext cx="109992" cy="109990"/>
+            </a:xfrm>
+            <a:prstGeom prst="rect">
+              <a:avLst/>
+            </a:prstGeom>
+            <a:solidFill>
+              <a:srgbClr val="00B050"/>
+            </a:solidFill>
+            <a:ln w="9525">
+              <a:noFill/>
+              <a:miter lim="800000"/>
+              <a:headEnd/>
+              <a:tailEnd/>
+            </a:ln>
+          </p:spPr>
+          <p:txBody>
+            <a:bodyPr vert="horz" wrap="square" lIns="68580" tIns="34290" rIns="68580" bIns="34290" numCol="1" anchor="t" anchorCtr="0" compatLnSpc="1">
+              <a:prstTxWarp prst="textNoShape">
+                <a:avLst/>
+              </a:prstTxWarp>
+            </a:bodyPr>
+            <a:lstStyle/>
+            <a:p>
+              <a:endParaRPr lang="en-IN" sz="1350"/>
+            </a:p>
+          </p:txBody>
+        </p:sp>
+        <p:sp>
+          <p:nvSpPr>
+            <p:cNvPr id="12" name="Rectangle 5">
+              <a:extLst>
+                <a:ext uri="{FF2B5EF4-FFF2-40B4-BE49-F238E27FC236}">
+                  <a16:creationId xmlns:a16="http://schemas.microsoft.com/office/drawing/2014/main" id="{C99CB4F6-0149-49F4-8A24-BEB708A29F1A}"/>
+                </a:ext>
+              </a:extLst>
+            </p:cNvPr>
+            <p:cNvSpPr>
+              <a:spLocks noChangeArrowheads="1"/>
+            </p:cNvSpPr>
+            <p:nvPr/>
+          </p:nvSpPr>
+          <p:spPr bwMode="auto">
+            <a:xfrm>
+              <a:off x="6260132" y="5603130"/>
+              <a:ext cx="109992" cy="109990"/>
+            </a:xfrm>
+            <a:prstGeom prst="rect">
+              <a:avLst/>
+            </a:prstGeom>
+            <a:solidFill>
+              <a:srgbClr val="75C042"/>
+            </a:solidFill>
+            <a:ln w="9525">
+              <a:noFill/>
+              <a:miter lim="800000"/>
+              <a:headEnd/>
+              <a:tailEnd/>
+            </a:ln>
+          </p:spPr>
+          <p:txBody>
+            <a:bodyPr vert="horz" wrap="square" lIns="68580" tIns="34290" rIns="68580" bIns="34290" numCol="1" anchor="t" anchorCtr="0" compatLnSpc="1">
+              <a:prstTxWarp prst="textNoShape">
+                <a:avLst/>
+              </a:prstTxWarp>
+            </a:bodyPr>
+            <a:lstStyle/>
+            <a:p>
+              <a:endParaRPr lang="en-IN" sz="1350"/>
+            </a:p>
+          </p:txBody>
+        </p:sp>
+        <p:sp>
+          <p:nvSpPr>
+            <p:cNvPr id="13" name="Rectangle 5">
+              <a:extLst>
+                <a:ext uri="{FF2B5EF4-FFF2-40B4-BE49-F238E27FC236}">
+                  <a16:creationId xmlns:a16="http://schemas.microsoft.com/office/drawing/2014/main" id="{8BED369E-8B8A-45FD-8B5A-703CE09C2946}"/>
+                </a:ext>
+              </a:extLst>
+            </p:cNvPr>
+            <p:cNvSpPr>
+              <a:spLocks noChangeArrowheads="1"/>
+            </p:cNvSpPr>
+            <p:nvPr/>
+          </p:nvSpPr>
+          <p:spPr bwMode="auto">
+            <a:xfrm>
+              <a:off x="6513813" y="5603130"/>
+              <a:ext cx="109992" cy="109990"/>
+            </a:xfrm>
+            <a:prstGeom prst="rect">
+              <a:avLst/>
+            </a:prstGeom>
+            <a:solidFill>
+              <a:srgbClr val="0AEC25"/>
+            </a:solidFill>
+            <a:ln w="9525">
+              <a:noFill/>
+              <a:miter lim="800000"/>
+              <a:headEnd/>
+              <a:tailEnd/>
+            </a:ln>
+          </p:spPr>
+          <p:txBody>
+            <a:bodyPr vert="horz" wrap="square" lIns="68580" tIns="34290" rIns="68580" bIns="34290" numCol="1" anchor="t" anchorCtr="0" compatLnSpc="1">
+              <a:prstTxWarp prst="textNoShape">
+                <a:avLst/>
+              </a:prstTxWarp>
+            </a:bodyPr>
+            <a:lstStyle/>
+            <a:p>
+              <a:endParaRPr lang="en-IN" sz="1350"/>
+            </a:p>
+          </p:txBody>
+        </p:sp>
+      </p:grpSp>
+      <p:sp>
+        <p:nvSpPr>
+          <p:cNvPr id="14" name="Google Shape;845;p16"/>
+          <p:cNvSpPr/>
+          <p:nvPr/>
+        </p:nvSpPr>
+        <p:spPr>
+          <a:xfrm>
+            <a:off x="1190" y="0"/>
+            <a:ext cx="1494765" cy="736929"/>
+          </a:xfrm>
+          <a:custGeom>
+            <a:avLst/>
+            <a:gdLst/>
+            <a:ahLst/>
+            <a:cxnLst/>
+            <a:rect l="l" t="t" r="r" b="b"/>
+            <a:pathLst>
+              <a:path w="1993020" h="1803466" extrusionOk="0">
+                <a:moveTo>
+                  <a:pt x="0" y="0"/>
+                </a:moveTo>
+                <a:lnTo>
+                  <a:pt x="1993020" y="0"/>
+                </a:lnTo>
+                <a:lnTo>
+                  <a:pt x="1229306" y="1803466"/>
+                </a:lnTo>
+                <a:lnTo>
+                  <a:pt x="0" y="1803466"/>
+                </a:lnTo>
+                <a:lnTo>
+                  <a:pt x="0" y="0"/>
+                </a:lnTo>
+                <a:close/>
+              </a:path>
+            </a:pathLst>
+          </a:custGeom>
+          <a:solidFill>
+            <a:srgbClr val="75C042"/>
+          </a:solidFill>
+          <a:ln>
+            <a:noFill/>
+          </a:ln>
+        </p:spPr>
+        <p:txBody>
+          <a:bodyPr spcFirstLastPara="1" wrap="square" lIns="68569" tIns="34275" rIns="68569" bIns="34275" anchor="ctr" anchorCtr="0">
+            <a:noAutofit/>
+          </a:bodyPr>
+          <a:lstStyle/>
+          <a:p>
+            <a:pPr algn="ctr" defTabSz="685800">
+              <a:buClr>
+                <a:srgbClr val="000000"/>
+              </a:buClr>
+              <a:defRPr/>
+            </a:pPr>
+            <a:endParaRPr sz="1350" kern="0">
+              <a:solidFill>
+                <a:srgbClr val="75C042"/>
+              </a:solidFill>
+              <a:latin typeface="Calibri"/>
+              <a:ea typeface="Calibri"/>
+              <a:cs typeface="Calibri"/>
+              <a:sym typeface="Calibri"/>
+            </a:endParaRPr>
+          </a:p>
+        </p:txBody>
+      </p:sp>
+      <p:sp>
+        <p:nvSpPr>
+          <p:cNvPr id="16" name="Google Shape;552;p2"/>
+          <p:cNvSpPr txBox="1"/>
+          <p:nvPr/>
+        </p:nvSpPr>
+        <p:spPr>
+          <a:xfrm>
+            <a:off x="7108178" y="4873864"/>
+            <a:ext cx="2251926" cy="253885"/>
+          </a:xfrm>
+          <a:prstGeom prst="rect">
+            <a:avLst/>
+          </a:prstGeom>
+          <a:noFill/>
+          <a:ln>
+            <a:noFill/>
+          </a:ln>
+        </p:spPr>
+        <p:txBody>
+          <a:bodyPr spcFirstLastPara="1" wrap="square" lIns="68569" tIns="34275" rIns="68569" bIns="34275" anchor="t" anchorCtr="0">
+            <a:spAutoFit/>
+          </a:bodyPr>
+          <a:lstStyle/>
+          <a:p>
+            <a:r>
+              <a:rPr lang="en-US" sz="1200" dirty="0">
+                <a:solidFill>
+                  <a:srgbClr val="75C042"/>
+                </a:solidFill>
+                <a:latin typeface="Cambria" panose="02040503050406030204" pitchFamily="18" charset="0"/>
+                <a:ea typeface="Cambria" panose="02040503050406030204" pitchFamily="18" charset="0"/>
+                <a:cs typeface="Corben"/>
+                <a:sym typeface="Corben"/>
+              </a:rPr>
+              <a:t>www.anubhavtrainings.com</a:t>
+            </a:r>
+            <a:endParaRPr sz="1200" dirty="0">
+              <a:solidFill>
+                <a:srgbClr val="75C042"/>
+              </a:solidFill>
+              <a:latin typeface="Cambria" panose="02040503050406030204" pitchFamily="18" charset="0"/>
+              <a:ea typeface="Cambria" panose="02040503050406030204" pitchFamily="18" charset="0"/>
+              <a:cs typeface="Corben"/>
+              <a:sym typeface="Corben"/>
+            </a:endParaRPr>
+          </a:p>
+        </p:txBody>
+      </p:sp>
+      <p:pic>
+        <p:nvPicPr>
+          <p:cNvPr id="17" name="Picture 4">
+            <a:extLst>
+              <a:ext uri="{FF2B5EF4-FFF2-40B4-BE49-F238E27FC236}">
+                <a16:creationId xmlns:a16="http://schemas.microsoft.com/office/drawing/2014/main" id="{DB8A7F7E-7F2C-20C1-2A09-7D9F11F6AD11}"/>
+              </a:ext>
+            </a:extLst>
+          </p:cNvPr>
+          <p:cNvPicPr>
+            <a:picLocks noChangeAspect="1" noChangeArrowheads="1"/>
+          </p:cNvPicPr>
+          <p:nvPr/>
+        </p:nvPicPr>
+        <p:blipFill>
+          <a:blip r:embed="rId3" cstate="print">
+            <a:extLst>
+              <a:ext uri="{28A0092B-C50C-407E-A947-70E740481C1C}">
+                <a14:useLocalDpi xmlns:a14="http://schemas.microsoft.com/office/drawing/2010/main" val="0"/>
+              </a:ext>
+            </a:extLst>
+          </a:blip>
+          <a:srcRect/>
+          <a:stretch>
+            <a:fillRect/>
+          </a:stretch>
+        </p:blipFill>
+        <p:spPr bwMode="auto">
+          <a:xfrm>
+            <a:off x="8650243" y="0"/>
+            <a:ext cx="491377" cy="485336"/>
+          </a:xfrm>
+          <a:prstGeom prst="rect">
+            <a:avLst/>
+          </a:prstGeom>
+          <a:noFill/>
+          <a:extLst>
+            <a:ext uri="{909E8E84-426E-40DD-AFC4-6F175D3DCCD1}">
+              <a14:hiddenFill xmlns:a14="http://schemas.microsoft.com/office/drawing/2010/main">
+                <a:solidFill>
+                  <a:srgbClr val="FFFFFF"/>
+                </a:solidFill>
+              </a14:hiddenFill>
+            </a:ext>
+          </a:extLst>
+        </p:spPr>
+      </p:pic>
+    </p:spTree>
+    <p:extLst>
+      <p:ext uri="{BB962C8B-B14F-4D97-AF65-F5344CB8AC3E}">
+        <p14:creationId xmlns:p14="http://schemas.microsoft.com/office/powerpoint/2010/main" val="2376139371"/>
+      </p:ext>
+    </p:extLst>
+  </p:cSld>
+  <p:clrMapOvr>
+    <a:masterClrMapping/>
+  </p:clrMapOvr>
+  <p:timing>
+    <p:tnLst>
+      <p:par>
+        <p:cTn id="1" dur="indefinite" restart="never" nodeType="tmRoot">
+          <p:childTnLst>
+            <p:seq concurrent="1" nextAc="seek">
+              <p:cTn id="2" dur="indefinite" nodeType="mainSeq">
+                <p:childTnLst>
+                  <p:par>
+                    <p:cTn id="3" fill="hold">
+                      <p:stCondLst>
+                        <p:cond delay="indefinite"/>
+                      </p:stCondLst>
+                      <p:childTnLst>
+                        <p:par>
+                          <p:cTn id="4" fill="hold">
+                            <p:stCondLst>
+                              <p:cond delay="0"/>
+                            </p:stCondLst>
+                            <p:childTnLst>
+                              <p:par>
+                                <p:cTn id="5" presetID="16" presetClass="entr" presetSubtype="21" fill="hold" grpId="0" nodeType="clickEffect">
+                                  <p:stCondLst>
+                                    <p:cond delay="0"/>
+                                  </p:stCondLst>
+                                  <p:childTnLst>
+                                    <p:set>
+                                      <p:cBhvr>
+                                        <p:cTn id="6" dur="1" fill="hold">
+                                          <p:stCondLst>
+                                            <p:cond delay="0"/>
+                                          </p:stCondLst>
+                                        </p:cTn>
+                                        <p:tgtEl>
+                                          <p:spTgt spid="8"/>
+                                        </p:tgtEl>
+                                        <p:attrNameLst>
+                                          <p:attrName>style.visibility</p:attrName>
+                                        </p:attrNameLst>
+                                      </p:cBhvr>
+                                      <p:to>
+                                        <p:strVal val="visible"/>
+                                      </p:to>
+                                    </p:set>
+                                    <p:animEffect transition="in" filter="barn(inVertical)">
+                                      <p:cBhvr>
+                                        <p:cTn id="7" dur="500"/>
+                                        <p:tgtEl>
+                                          <p:spTgt spid="8"/>
+                                        </p:tgtEl>
+                                      </p:cBhvr>
+                                    </p:animEffect>
+                                  </p:childTnLst>
+                                </p:cTn>
+                              </p:par>
+                              <p:par>
+                                <p:cTn id="8" presetID="16" presetClass="entr" presetSubtype="21" fill="hold" grpId="0" nodeType="withEffect">
+                                  <p:stCondLst>
+                                    <p:cond delay="0"/>
+                                  </p:stCondLst>
+                                  <p:childTnLst>
+                                    <p:set>
+                                      <p:cBhvr>
+                                        <p:cTn id="9" dur="1" fill="hold">
+                                          <p:stCondLst>
+                                            <p:cond delay="0"/>
+                                          </p:stCondLst>
+                                        </p:cTn>
+                                        <p:tgtEl>
+                                          <p:spTgt spid="9"/>
+                                        </p:tgtEl>
+                                        <p:attrNameLst>
+                                          <p:attrName>style.visibility</p:attrName>
+                                        </p:attrNameLst>
+                                      </p:cBhvr>
+                                      <p:to>
+                                        <p:strVal val="visible"/>
+                                      </p:to>
+                                    </p:set>
+                                    <p:animEffect transition="in" filter="barn(inVertical)">
+                                      <p:cBhvr>
+                                        <p:cTn id="10" dur="500"/>
+                                        <p:tgtEl>
+                                          <p:spTgt spid="9"/>
+                                        </p:tgtEl>
+                                      </p:cBhvr>
+                                    </p:animEffect>
+                                  </p:childTnLst>
+                                </p:cTn>
+                              </p:par>
+                              <p:par>
+                                <p:cTn id="11" presetID="16" presetClass="entr" presetSubtype="21" fill="hold" nodeType="withEffect">
+                                  <p:stCondLst>
+                                    <p:cond delay="0"/>
+                                  </p:stCondLst>
+                                  <p:childTnLst>
+                                    <p:set>
+                                      <p:cBhvr>
+                                        <p:cTn id="12" dur="1" fill="hold">
+                                          <p:stCondLst>
+                                            <p:cond delay="0"/>
+                                          </p:stCondLst>
+                                        </p:cTn>
+                                        <p:tgtEl>
+                                          <p:spTgt spid="10"/>
+                                        </p:tgtEl>
+                                        <p:attrNameLst>
+                                          <p:attrName>style.visibility</p:attrName>
+                                        </p:attrNameLst>
+                                      </p:cBhvr>
+                                      <p:to>
+                                        <p:strVal val="visible"/>
+                                      </p:to>
+                                    </p:set>
+                                    <p:animEffect transition="in" filter="barn(inVertical)">
+                                      <p:cBhvr>
+                                        <p:cTn id="13" dur="500"/>
+                                        <p:tgtEl>
+                                          <p:spTgt spid="10"/>
+                                        </p:tgtEl>
+                                      </p:cBhvr>
+                                    </p:animEffect>
+                                  </p:childTnLst>
+                                </p:cTn>
+                              </p:par>
+                              <p:par>
+                                <p:cTn id="14" presetID="16" presetClass="entr" presetSubtype="21" fill="hold" grpId="0" nodeType="withEffect">
+                                  <p:stCondLst>
+                                    <p:cond delay="0"/>
+                                  </p:stCondLst>
+                                  <p:childTnLst>
+                                    <p:set>
+                                      <p:cBhvr>
+                                        <p:cTn id="15" dur="1" fill="hold">
+                                          <p:stCondLst>
+                                            <p:cond delay="0"/>
+                                          </p:stCondLst>
+                                        </p:cTn>
+                                        <p:tgtEl>
+                                          <p:spTgt spid="7"/>
+                                        </p:tgtEl>
+                                        <p:attrNameLst>
+                                          <p:attrName>style.visibility</p:attrName>
+                                        </p:attrNameLst>
+                                      </p:cBhvr>
+                                      <p:to>
+                                        <p:strVal val="visible"/>
+                                      </p:to>
+                                    </p:set>
+                                    <p:animEffect transition="in" filter="barn(inVertical)">
+                                      <p:cBhvr>
+                                        <p:cTn id="16" dur="500"/>
+                                        <p:tgtEl>
+                                          <p:spTgt spid="7"/>
+                                        </p:tgtEl>
+                                      </p:cBhvr>
+                                    </p:animEffect>
+                                  </p:childTnLst>
+                                </p:cTn>
+                              </p:par>
+                              <p:par>
+                                <p:cTn id="17" presetID="16" presetClass="entr" presetSubtype="21" fill="hold" grpId="0" nodeType="withEffect">
+                                  <p:stCondLst>
+                                    <p:cond delay="0"/>
+                                  </p:stCondLst>
+                                  <p:childTnLst>
+                                    <p:set>
+                                      <p:cBhvr>
+                                        <p:cTn id="18" dur="1" fill="hold">
+                                          <p:stCondLst>
+                                            <p:cond delay="0"/>
+                                          </p:stCondLst>
+                                        </p:cTn>
+                                        <p:tgtEl>
+                                          <p:spTgt spid="5"/>
+                                        </p:tgtEl>
+                                        <p:attrNameLst>
+                                          <p:attrName>style.visibility</p:attrName>
+                                        </p:attrNameLst>
+                                      </p:cBhvr>
+                                      <p:to>
+                                        <p:strVal val="visible"/>
+                                      </p:to>
+                                    </p:set>
+                                    <p:animEffect transition="in" filter="barn(inVertical)">
+                                      <p:cBhvr>
+                                        <p:cTn id="19" dur="500"/>
+                                        <p:tgtEl>
+                                          <p:spTgt spid="5"/>
+                                        </p:tgtEl>
+                                      </p:cBhvr>
+                                    </p:animEffect>
+                                  </p:childTnLst>
+                                </p:cTn>
+                              </p:par>
+                            </p:childTnLst>
+                          </p:cTn>
+                        </p:par>
+                      </p:childTnLst>
+                    </p:cTn>
+                  </p:par>
+                </p:childTnLst>
+              </p:cTn>
+              <p:prevCondLst>
+                <p:cond evt="onPrev" delay="0">
+                  <p:tgtEl>
+                    <p:sldTgt/>
+                  </p:tgtEl>
+                </p:cond>
+              </p:prevCondLst>
+              <p:nextCondLst>
+                <p:cond evt="onNext" delay="0">
+                  <p:tgtEl>
+                    <p:sldTgt/>
+                  </p:tgtEl>
+                </p:cond>
+              </p:nextCondLst>
+            </p:seq>
+          </p:childTnLst>
+        </p:cTn>
+      </p:par>
+    </p:tnLst>
+    <p:bldLst>
+      <p:bldP spid="5" grpId="0" animBg="1"/>
+      <p:bldP spid="7" grpId="0" animBg="1"/>
+      <p:bldP spid="8" grpId="0"/>
+      <p:bldP spid="9" grpId="0"/>
+    </p:bldLst>
+  </p:timing>
+</p:sld>
+</file>
+
+<file path=ppt/slides/slide21.xml><?xml version="1.0" encoding="utf-8"?>
+<p:sld xmlns:a="http://schemas.openxmlformats.org/drawingml/2006/main" xmlns:r="http://schemas.openxmlformats.org/officeDocument/2006/relationships" xmlns:p="http://schemas.openxmlformats.org/presentationml/2006/main">
+  <p:cSld>
+    <p:spTree>
+      <p:nvGrpSpPr>
         <p:cNvPr id="1" name=""/>
         <p:cNvGrpSpPr/>
         <p:nvPr/>
@@ -8572,7 +12286,7 @@
 </p:sld>
 </file>
 
-<file path=ppt/slides/slide11.xml><?xml version="1.0" encoding="utf-8"?>
+<file path=ppt/slides/slide22.xml><?xml version="1.0" encoding="utf-8"?>
 <p:sld xmlns:a="http://schemas.openxmlformats.org/drawingml/2006/main" xmlns:r="http://schemas.openxmlformats.org/officeDocument/2006/relationships" xmlns:p="http://schemas.openxmlformats.org/presentationml/2006/main">
   <p:cSld>
     <p:spTree>
@@ -9618,418 +13332,6 @@
     <p:extLst>
       <p:ext uri="{BB962C8B-B14F-4D97-AF65-F5344CB8AC3E}">
         <p14:creationId xmlns:p14="http://schemas.microsoft.com/office/powerpoint/2010/main" val="1855602970"/>
-      </p:ext>
-    </p:extLst>
-  </p:cSld>
-  <p:clrMapOvr>
-    <a:masterClrMapping/>
-  </p:clrMapOvr>
-  <mc:AlternateContent xmlns:mc="http://schemas.openxmlformats.org/markup-compatibility/2006" xmlns:p14="http://schemas.microsoft.com/office/powerpoint/2010/main">
-    <mc:Choice Requires="p14">
-      <p:transition spd="med" p14:dur="700">
-        <p:fade/>
-      </p:transition>
-    </mc:Choice>
-    <mc:Fallback xmlns="">
-      <p:transition spd="med">
-        <p:fade/>
-      </p:transition>
-    </mc:Fallback>
-  </mc:AlternateContent>
-</p:sld>
-</file>
-
-<file path=ppt/slides/slide2.xml><?xml version="1.0" encoding="utf-8"?>
-<p:sld xmlns:a="http://schemas.openxmlformats.org/drawingml/2006/main" xmlns:r="http://schemas.openxmlformats.org/officeDocument/2006/relationships" xmlns:p="http://schemas.openxmlformats.org/presentationml/2006/main">
-  <p:cSld>
-    <p:spTree>
-      <p:nvGrpSpPr>
-        <p:cNvPr id="1" name=""/>
-        <p:cNvGrpSpPr/>
-        <p:nvPr/>
-      </p:nvGrpSpPr>
-      <p:grpSpPr>
-        <a:xfrm>
-          <a:off x="0" y="0"/>
-          <a:ext cx="0" cy="0"/>
-          <a:chOff x="0" y="0"/>
-          <a:chExt cx="0" cy="0"/>
-        </a:xfrm>
-      </p:grpSpPr>
-      <p:pic>
-        <p:nvPicPr>
-          <p:cNvPr id="2" name="Picture Placeholder 1"/>
-          <p:cNvPicPr>
-            <a:picLocks noGrp="1" noChangeAspect="1"/>
-          </p:cNvPicPr>
-          <p:nvPr>
-            <p:ph type="pic" idx="1"/>
-          </p:nvPr>
-        </p:nvPicPr>
-        <p:blipFill rotWithShape="1">
-          <a:blip r:embed="rId2" cstate="email">
-            <a:extLst>
-              <a:ext uri="{28A0092B-C50C-407E-A947-70E740481C1C}">
-                <a14:useLocalDpi xmlns:a14="http://schemas.microsoft.com/office/drawing/2010/main"/>
-              </a:ext>
-            </a:extLst>
-          </a:blip>
-          <a:srcRect/>
-          <a:stretch/>
-        </p:blipFill>
-        <p:spPr>
-          <a:solidFill>
-            <a:schemeClr val="bg1">
-              <a:lumMod val="95000"/>
-            </a:schemeClr>
-          </a:solidFill>
-        </p:spPr>
-      </p:pic>
-      <p:sp>
-        <p:nvSpPr>
-          <p:cNvPr id="13" name="Rectangle 12">
-            <a:extLst>
-              <a:ext uri="{FF2B5EF4-FFF2-40B4-BE49-F238E27FC236}">
-                <a16:creationId xmlns:a16="http://schemas.microsoft.com/office/drawing/2014/main" id="{EE1D1380-BC28-F74F-8866-BD4C0AD42595}"/>
-              </a:ext>
-            </a:extLst>
-          </p:cNvPr>
-          <p:cNvSpPr/>
-          <p:nvPr/>
-        </p:nvSpPr>
-        <p:spPr>
-          <a:xfrm>
-            <a:off x="2382" y="-10043"/>
-            <a:ext cx="9139238" cy="5691851"/>
-          </a:xfrm>
-          <a:prstGeom prst="rect">
-            <a:avLst/>
-          </a:prstGeom>
-          <a:solidFill>
-            <a:schemeClr val="bg1">
-              <a:alpha val="0"/>
-            </a:schemeClr>
-          </a:solidFill>
-          <a:ln>
-            <a:noFill/>
-          </a:ln>
-        </p:spPr>
-        <p:style>
-          <a:lnRef idx="2">
-            <a:schemeClr val="accent1">
-              <a:shade val="50000"/>
-            </a:schemeClr>
-          </a:lnRef>
-          <a:fillRef idx="1">
-            <a:schemeClr val="accent1"/>
-          </a:fillRef>
-          <a:effectRef idx="0">
-            <a:schemeClr val="accent1"/>
-          </a:effectRef>
-          <a:fontRef idx="minor">
-            <a:schemeClr val="lt1"/>
-          </a:fontRef>
-        </p:style>
-        <p:txBody>
-          <a:bodyPr rtlCol="0" anchor="ctr"/>
-          <a:lstStyle/>
-          <a:p>
-            <a:pPr algn="ctr" defTabSz="685457">
-              <a:defRPr/>
-            </a:pPr>
-            <a:endParaRPr lang="en-US" sz="1349">
-              <a:solidFill>
-                <a:srgbClr val="FFFFFF"/>
-              </a:solidFill>
-              <a:latin typeface="Arial" panose="020B0604020202020204"/>
-            </a:endParaRPr>
-          </a:p>
-        </p:txBody>
-      </p:sp>
-      <p:sp>
-        <p:nvSpPr>
-          <p:cNvPr id="6" name="Rectangle 5"/>
-          <p:cNvSpPr/>
-          <p:nvPr/>
-        </p:nvSpPr>
-        <p:spPr>
-          <a:xfrm>
-            <a:off x="2382" y="2392863"/>
-            <a:ext cx="9139238" cy="1882229"/>
-          </a:xfrm>
-          <a:prstGeom prst="rect">
-            <a:avLst/>
-          </a:prstGeom>
-          <a:gradFill flip="none" rotWithShape="1">
-            <a:gsLst>
-              <a:gs pos="13000">
-                <a:srgbClr val="25B6C2">
-                  <a:alpha val="50000"/>
-                </a:srgbClr>
-              </a:gs>
-              <a:gs pos="100000">
-                <a:srgbClr val="0692DB">
-                  <a:alpha val="50000"/>
-                </a:srgbClr>
-              </a:gs>
-            </a:gsLst>
-            <a:lin ang="2700000" scaled="0"/>
-            <a:tileRect/>
-          </a:gradFill>
-          <a:ln>
-            <a:noFill/>
-          </a:ln>
-        </p:spPr>
-        <p:style>
-          <a:lnRef idx="2">
-            <a:schemeClr val="accent1">
-              <a:shade val="50000"/>
-            </a:schemeClr>
-          </a:lnRef>
-          <a:fillRef idx="1">
-            <a:schemeClr val="accent1"/>
-          </a:fillRef>
-          <a:effectRef idx="0">
-            <a:schemeClr val="accent1"/>
-          </a:effectRef>
-          <a:fontRef idx="minor">
-            <a:schemeClr val="lt1"/>
-          </a:fontRef>
-        </p:style>
-        <p:txBody>
-          <a:bodyPr rtlCol="0" anchor="ctr"/>
-          <a:lstStyle/>
-          <a:p>
-            <a:pPr algn="ctr" defTabSz="685457">
-              <a:defRPr/>
-            </a:pPr>
-            <a:endParaRPr lang="ko-KR" altLang="en-US" sz="1349">
-              <a:solidFill>
-                <a:srgbClr val="FFFFFF"/>
-              </a:solidFill>
-              <a:latin typeface="Arial" panose="020B0604020202020204"/>
-              <a:ea typeface="굴림" panose="020B0600000101010101" pitchFamily="34" charset="-127"/>
-            </a:endParaRPr>
-          </a:p>
-        </p:txBody>
-      </p:sp>
-      <p:sp>
-        <p:nvSpPr>
-          <p:cNvPr id="7" name="Rectangle 6"/>
-          <p:cNvSpPr/>
-          <p:nvPr/>
-        </p:nvSpPr>
-        <p:spPr>
-          <a:xfrm>
-            <a:off x="2382" y="2522237"/>
-            <a:ext cx="9139238" cy="1595821"/>
-          </a:xfrm>
-          <a:prstGeom prst="rect">
-            <a:avLst/>
-          </a:prstGeom>
-          <a:gradFill flip="none" rotWithShape="1">
-            <a:gsLst>
-              <a:gs pos="13000">
-                <a:srgbClr val="25B6C2"/>
-              </a:gs>
-              <a:gs pos="100000">
-                <a:srgbClr val="0692DB"/>
-              </a:gs>
-            </a:gsLst>
-            <a:lin ang="2700000" scaled="0"/>
-            <a:tileRect/>
-          </a:gradFill>
-          <a:ln>
-            <a:noFill/>
-          </a:ln>
-        </p:spPr>
-        <p:style>
-          <a:lnRef idx="2">
-            <a:schemeClr val="accent1">
-              <a:shade val="50000"/>
-            </a:schemeClr>
-          </a:lnRef>
-          <a:fillRef idx="1">
-            <a:schemeClr val="accent1"/>
-          </a:fillRef>
-          <a:effectRef idx="0">
-            <a:schemeClr val="accent1"/>
-          </a:effectRef>
-          <a:fontRef idx="minor">
-            <a:schemeClr val="lt1"/>
-          </a:fontRef>
-        </p:style>
-        <p:txBody>
-          <a:bodyPr rtlCol="0" anchor="ctr"/>
-          <a:lstStyle/>
-          <a:p>
-            <a:pPr algn="ctr" defTabSz="685457">
-              <a:defRPr/>
-            </a:pPr>
-            <a:endParaRPr lang="ko-KR" altLang="en-US" sz="1349">
-              <a:solidFill>
-                <a:srgbClr val="FFFFFF"/>
-              </a:solidFill>
-              <a:latin typeface="Arial" panose="020B0604020202020204"/>
-              <a:ea typeface="굴림" panose="020B0600000101010101" pitchFamily="34" charset="-127"/>
-            </a:endParaRPr>
-          </a:p>
-        </p:txBody>
-      </p:sp>
-      <p:sp>
-        <p:nvSpPr>
-          <p:cNvPr id="19" name="TextBox 18">
-            <a:extLst>
-              <a:ext uri="{FF2B5EF4-FFF2-40B4-BE49-F238E27FC236}">
-                <a16:creationId xmlns:a16="http://schemas.microsoft.com/office/drawing/2014/main" id="{B945CD40-9ABD-7441-A0F8-C5ACA34BB34C}"/>
-              </a:ext>
-            </a:extLst>
-          </p:cNvPr>
-          <p:cNvSpPr txBox="1"/>
-          <p:nvPr/>
-        </p:nvSpPr>
-        <p:spPr>
-          <a:xfrm>
-            <a:off x="2881727" y="2577435"/>
-            <a:ext cx="3380548" cy="507703"/>
-          </a:xfrm>
-          <a:prstGeom prst="rect">
-            <a:avLst/>
-          </a:prstGeom>
-          <a:noFill/>
-          <a:ln>
-            <a:noFill/>
-          </a:ln>
-        </p:spPr>
-        <p:txBody>
-          <a:bodyPr wrap="square" rtlCol="0">
-            <a:spAutoFit/>
-          </a:bodyPr>
-          <a:lstStyle/>
-          <a:p>
-            <a:pPr algn="ctr" defTabSz="685457">
-              <a:defRPr/>
-            </a:pPr>
-            <a:r>
-              <a:rPr lang="en-IN" sz="2699" b="1" dirty="0">
-                <a:solidFill>
-                  <a:srgbClr val="FFFFFF"/>
-                </a:solidFill>
-                <a:latin typeface="Arial" panose="020B0604020202020204" pitchFamily="34" charset="0"/>
-                <a:ea typeface="Cambria" panose="02040503050406030204" pitchFamily="18" charset="0"/>
-                <a:cs typeface="Arial" panose="020B0604020202020204" pitchFamily="34" charset="0"/>
-              </a:rPr>
-              <a:t>DISCLAIMER</a:t>
-            </a:r>
-            <a:endParaRPr lang="en-US" sz="2474" spc="113" dirty="0">
-              <a:solidFill>
-                <a:srgbClr val="FFFFFF"/>
-              </a:solidFill>
-              <a:latin typeface="Arial" panose="020B0604020202020204" pitchFamily="34" charset="0"/>
-              <a:ea typeface="Lato Medium" panose="020F0502020204030203" pitchFamily="34" charset="0"/>
-              <a:cs typeface="Arial" panose="020B0604020202020204" pitchFamily="34" charset="0"/>
-            </a:endParaRPr>
-          </a:p>
-        </p:txBody>
-      </p:sp>
-      <p:sp>
-        <p:nvSpPr>
-          <p:cNvPr id="20" name="TextBox 19">
-            <a:extLst>
-              <a:ext uri="{FF2B5EF4-FFF2-40B4-BE49-F238E27FC236}">
-                <a16:creationId xmlns:a16="http://schemas.microsoft.com/office/drawing/2014/main" id="{B945CD40-9ABD-7441-A0F8-C5ACA34BB34C}"/>
-              </a:ext>
-            </a:extLst>
-          </p:cNvPr>
-          <p:cNvSpPr txBox="1"/>
-          <p:nvPr/>
-        </p:nvSpPr>
-        <p:spPr>
-          <a:xfrm>
-            <a:off x="332706" y="3044889"/>
-            <a:ext cx="8478590" cy="922945"/>
-          </a:xfrm>
-          <a:prstGeom prst="rect">
-            <a:avLst/>
-          </a:prstGeom>
-          <a:noFill/>
-          <a:ln>
-            <a:noFill/>
-          </a:ln>
-        </p:spPr>
-        <p:txBody>
-          <a:bodyPr wrap="square" rtlCol="0">
-            <a:spAutoFit/>
-          </a:bodyPr>
-          <a:lstStyle/>
-          <a:p>
-            <a:pPr algn="ctr" defTabSz="685457">
-              <a:defRPr/>
-            </a:pPr>
-            <a:r>
-              <a:rPr lang="en-IN" sz="1799" dirty="0">
-                <a:solidFill>
-                  <a:srgbClr val="FFFFFF"/>
-                </a:solidFill>
-                <a:latin typeface="Arial" panose="020B0604020202020204" pitchFamily="34" charset="0"/>
-                <a:cs typeface="Arial" panose="020B0604020202020204" pitchFamily="34" charset="0"/>
-              </a:rPr>
-              <a:t>The training content and delivery of this presentation is confidential, and cannot be recorded, or copied and distributed to any third party, without the written consent of Anubhav Trainings</a:t>
-            </a:r>
-          </a:p>
-        </p:txBody>
-      </p:sp>
-      <p:pic>
-        <p:nvPicPr>
-          <p:cNvPr id="9" name="Picture 4">
-            <a:extLst>
-              <a:ext uri="{FF2B5EF4-FFF2-40B4-BE49-F238E27FC236}">
-                <a16:creationId xmlns:a16="http://schemas.microsoft.com/office/drawing/2014/main" id="{DB8A7F7E-7F2C-20C1-2A09-7D9F11F6AD11}"/>
-              </a:ext>
-            </a:extLst>
-          </p:cNvPr>
-          <p:cNvPicPr>
-            <a:picLocks noChangeAspect="1" noChangeArrowheads="1"/>
-          </p:cNvPicPr>
-          <p:nvPr/>
-        </p:nvPicPr>
-        <p:blipFill>
-          <a:blip r:embed="rId3" cstate="print">
-            <a:extLst>
-              <a:ext uri="{28A0092B-C50C-407E-A947-70E740481C1C}">
-                <a14:useLocalDpi xmlns:a14="http://schemas.microsoft.com/office/drawing/2010/main" val="0"/>
-              </a:ext>
-            </a:extLst>
-          </a:blip>
-          <a:srcRect/>
-          <a:stretch>
-            <a:fillRect/>
-          </a:stretch>
-        </p:blipFill>
-        <p:spPr bwMode="auto">
-          <a:xfrm>
-            <a:off x="8650243" y="0"/>
-            <a:ext cx="491377" cy="485336"/>
-          </a:xfrm>
-          <a:prstGeom prst="rect">
-            <a:avLst/>
-          </a:prstGeom>
-          <a:noFill/>
-          <a:extLst>
-            <a:ext uri="{909E8E84-426E-40DD-AFC4-6F175D3DCCD1}">
-              <a14:hiddenFill xmlns:a14="http://schemas.microsoft.com/office/drawing/2010/main">
-                <a:solidFill>
-                  <a:srgbClr val="FFFFFF"/>
-                </a:solidFill>
-              </a14:hiddenFill>
-            </a:ext>
-          </a:extLst>
-        </p:spPr>
-      </p:pic>
-    </p:spTree>
-    <p:extLst>
-      <p:ext uri="{BB962C8B-B14F-4D97-AF65-F5344CB8AC3E}">
-        <p14:creationId xmlns:p14="http://schemas.microsoft.com/office/powerpoint/2010/main" val="2063806236"/>
       </p:ext>
     </p:extLst>
   </p:cSld>
@@ -17336,7 +20638,7 @@
         <p:cNvPr id="1" name="">
           <a:extLst>
             <a:ext uri="{FF2B5EF4-FFF2-40B4-BE49-F238E27FC236}">
-              <a16:creationId xmlns:a16="http://schemas.microsoft.com/office/drawing/2014/main" id="{8524576D-9BAA-8409-B6F8-153FEF8BA759}"/>
+              <a16:creationId xmlns:a16="http://schemas.microsoft.com/office/drawing/2014/main" id="{AF28BABE-0AA6-8150-20C6-04FE530EF927}"/>
             </a:ext>
           </a:extLst>
         </p:cNvPr>
@@ -17353,10 +20655,10 @@
       </p:grpSpPr>
       <p:sp>
         <p:nvSpPr>
-          <p:cNvPr id="2" name="Footer Placeholder 1">
+          <p:cNvPr id="3" name="Footer Placeholder 2">
             <a:extLst>
               <a:ext uri="{FF2B5EF4-FFF2-40B4-BE49-F238E27FC236}">
-                <a16:creationId xmlns:a16="http://schemas.microsoft.com/office/drawing/2014/main" id="{20AF8B40-95C7-BB90-A388-9942E53FBB81}"/>
+                <a16:creationId xmlns:a16="http://schemas.microsoft.com/office/drawing/2014/main" id="{16688663-05EA-574D-7D06-B9BA22E9105B}"/>
               </a:ext>
             </a:extLst>
           </p:cNvPr>
@@ -17373,19 +20675,18 @@
           <a:lstStyle/>
           <a:p>
             <a:r>
-              <a:rPr lang="en-US"/>
+              <a:rPr lang="en-US" dirty="0"/>
               <a:t>www.anubhavtrainings.com</a:t>
             </a:r>
-            <a:endParaRPr lang="en-US" dirty="0"/>
           </a:p>
         </p:txBody>
       </p:sp>
       <p:sp>
         <p:nvSpPr>
-          <p:cNvPr id="3" name="Slide Number Placeholder 2">
+          <p:cNvPr id="4" name="Slide Number Placeholder 3">
             <a:extLst>
               <a:ext uri="{FF2B5EF4-FFF2-40B4-BE49-F238E27FC236}">
-                <a16:creationId xmlns:a16="http://schemas.microsoft.com/office/drawing/2014/main" id="{315786C6-241F-8CA3-7D3C-6DAAB8E36880}"/>
+                <a16:creationId xmlns:a16="http://schemas.microsoft.com/office/drawing/2014/main" id="{90527F5B-EEFE-511B-0D48-3ADAA8735421}"/>
               </a:ext>
             </a:extLst>
           </p:cNvPr>
@@ -17396,7 +20697,12 @@
             <p:ph type="sldNum" sz="quarter" idx="12"/>
           </p:nvPr>
         </p:nvSpPr>
-        <p:spPr/>
+        <p:spPr>
+          <a:xfrm>
+            <a:off x="153552" y="4780975"/>
+            <a:ext cx="457081" cy="273773"/>
+          </a:xfrm>
+        </p:spPr>
         <p:txBody>
           <a:bodyPr/>
           <a:lstStyle/>
@@ -17406,16 +20712,16 @@
               <a:pPr/>
               <a:t>7</a:t>
             </a:fld>
-            <a:endParaRPr lang="en-US"/>
+            <a:endParaRPr lang="en-US" dirty="0"/>
           </a:p>
         </p:txBody>
       </p:sp>
       <p:sp>
         <p:nvSpPr>
-          <p:cNvPr id="4" name="Title 3">
+          <p:cNvPr id="5" name="Title 4">
             <a:extLst>
               <a:ext uri="{FF2B5EF4-FFF2-40B4-BE49-F238E27FC236}">
-                <a16:creationId xmlns:a16="http://schemas.microsoft.com/office/drawing/2014/main" id="{B4A796CC-A5D7-7B90-311E-946D1F19B530}"/>
+                <a16:creationId xmlns:a16="http://schemas.microsoft.com/office/drawing/2014/main" id="{3EA034B1-2CE0-E3E4-A6EB-D7B4A1348139}"/>
               </a:ext>
             </a:extLst>
           </p:cNvPr>
@@ -17426,76 +20732,75 @@
             <p:ph type="title"/>
           </p:nvPr>
         </p:nvSpPr>
-        <p:spPr/>
+        <p:spPr>
+          <a:xfrm>
+            <a:off x="77371" y="133985"/>
+            <a:ext cx="8227457" cy="533262"/>
+          </a:xfrm>
+        </p:spPr>
         <p:txBody>
           <a:bodyPr/>
           <a:lstStyle/>
           <a:p>
-            <a:endParaRPr lang="en-IN"/>
+            <a:r>
+              <a:rPr lang="en-IN" sz="2500" dirty="0"/>
+              <a:t>Welcome to the new world</a:t>
+            </a:r>
           </a:p>
         </p:txBody>
       </p:sp>
-      <mc:AlternateContent xmlns:mc="http://schemas.openxmlformats.org/markup-compatibility/2006" xmlns:p14="http://schemas.microsoft.com/office/powerpoint/2010/main">
-        <mc:Choice Requires="p14">
-          <p:contentPart p14:bwMode="auto" r:id="rId2">
-            <p14:nvContentPartPr>
-              <p14:cNvPr id="5" name="Ink 4">
-                <a:extLst>
-                  <a:ext uri="{FF2B5EF4-FFF2-40B4-BE49-F238E27FC236}">
-                    <a16:creationId xmlns:a16="http://schemas.microsoft.com/office/drawing/2014/main" id="{54ECD31C-617C-26E8-03C4-DE62D2F698EC}"/>
-                  </a:ext>
-                </a:extLst>
-              </p14:cNvPr>
-              <p14:cNvContentPartPr/>
-              <p14:nvPr/>
-            </p14:nvContentPartPr>
-            <p14:xfrm>
-              <a:off x="1315357" y="-14658"/>
-              <a:ext cx="360" cy="360"/>
-            </p14:xfrm>
-          </p:contentPart>
-        </mc:Choice>
-        <mc:Fallback xmlns="">
-          <p:pic>
-            <p:nvPicPr>
-              <p:cNvPr id="5" name="Ink 4">
-                <a:extLst>
-                  <a:ext uri="{FF2B5EF4-FFF2-40B4-BE49-F238E27FC236}">
-                    <a16:creationId xmlns:a16="http://schemas.microsoft.com/office/drawing/2014/main" id="{AB080056-AF3B-2DD1-1233-CD37BCC6426B}"/>
-                  </a:ext>
-                </a:extLst>
-              </p:cNvPr>
-              <p:cNvPicPr/>
-              <p:nvPr/>
-            </p:nvPicPr>
-            <p:blipFill>
-              <a:blip r:embed="rId3"/>
-              <a:stretch>
-                <a:fillRect/>
-              </a:stretch>
-            </p:blipFill>
-            <p:spPr>
-              <a:xfrm>
-                <a:off x="1306357" y="-23658"/>
-                <a:ext cx="18000" cy="18000"/>
-              </a:xfrm>
-              <a:prstGeom prst="rect">
-                <a:avLst/>
-              </a:prstGeom>
-            </p:spPr>
-          </p:pic>
-        </mc:Fallback>
-      </mc:AlternateContent>
+      <p:pic>
+        <p:nvPicPr>
+          <p:cNvPr id="2" name="Picture 1">
+            <a:extLst>
+              <a:ext uri="{FF2B5EF4-FFF2-40B4-BE49-F238E27FC236}">
+                <a16:creationId xmlns:a16="http://schemas.microsoft.com/office/drawing/2014/main" id="{428570B2-0C2B-9FB1-3655-39F0F2B02D06}"/>
+              </a:ext>
+            </a:extLst>
+          </p:cNvPr>
+          <p:cNvPicPr>
+            <a:picLocks noChangeAspect="1"/>
+          </p:cNvPicPr>
+          <p:nvPr/>
+        </p:nvPicPr>
+        <p:blipFill>
+          <a:blip r:embed="rId2"/>
+          <a:stretch>
+            <a:fillRect/>
+          </a:stretch>
+        </p:blipFill>
+        <p:spPr>
+          <a:xfrm>
+            <a:off x="77371" y="1333209"/>
+            <a:ext cx="8977903" cy="2768093"/>
+          </a:xfrm>
+          <a:prstGeom prst="rect">
+            <a:avLst/>
+          </a:prstGeom>
+        </p:spPr>
+      </p:pic>
     </p:spTree>
     <p:extLst>
       <p:ext uri="{BB962C8B-B14F-4D97-AF65-F5344CB8AC3E}">
-        <p14:creationId xmlns:p14="http://schemas.microsoft.com/office/powerpoint/2010/main" val="2855781072"/>
+        <p14:creationId xmlns:p14="http://schemas.microsoft.com/office/powerpoint/2010/main" val="3339761727"/>
       </p:ext>
     </p:extLst>
   </p:cSld>
   <p:clrMapOvr>
     <a:masterClrMapping/>
   </p:clrMapOvr>
+  <mc:AlternateContent xmlns:mc="http://schemas.openxmlformats.org/markup-compatibility/2006" xmlns:p14="http://schemas.microsoft.com/office/powerpoint/2010/main">
+    <mc:Choice Requires="p14">
+      <p:transition spd="med" p14:dur="700">
+        <p:fade/>
+      </p:transition>
+    </mc:Choice>
+    <mc:Fallback xmlns="">
+      <p:transition spd="med">
+        <p:fade/>
+      </p:transition>
+    </mc:Fallback>
+  </mc:AlternateContent>
 </p:sld>
 </file>
 
@@ -17507,7 +20812,7 @@
         <p:cNvPr id="1" name="">
           <a:extLst>
             <a:ext uri="{FF2B5EF4-FFF2-40B4-BE49-F238E27FC236}">
-              <a16:creationId xmlns:a16="http://schemas.microsoft.com/office/drawing/2014/main" id="{249F4924-25B7-A338-AD76-849887F67A5D}"/>
+              <a16:creationId xmlns:a16="http://schemas.microsoft.com/office/drawing/2014/main" id="{D9B38C5F-9053-AE6F-F95E-BE7CAD6169C7}"/>
             </a:ext>
           </a:extLst>
         </p:cNvPr>
@@ -17524,10 +20829,142 @@
       </p:grpSpPr>
       <p:sp>
         <p:nvSpPr>
-          <p:cNvPr id="2" name="Footer Placeholder 1">
+          <p:cNvPr id="13" name="Rectangle: Rounded Corners 12">
             <a:extLst>
               <a:ext uri="{FF2B5EF4-FFF2-40B4-BE49-F238E27FC236}">
-                <a16:creationId xmlns:a16="http://schemas.microsoft.com/office/drawing/2014/main" id="{9CDA04CB-410F-E35A-3865-924276D22566}"/>
+                <a16:creationId xmlns:a16="http://schemas.microsoft.com/office/drawing/2014/main" id="{386B15E0-93CA-7B8A-B7E0-12E7E264A343}"/>
+              </a:ext>
+            </a:extLst>
+          </p:cNvPr>
+          <p:cNvSpPr/>
+          <p:nvPr/>
+        </p:nvSpPr>
+        <p:spPr>
+          <a:xfrm>
+            <a:off x="6317790" y="1000427"/>
+            <a:ext cx="2430270" cy="3294366"/>
+          </a:xfrm>
+          <a:prstGeom prst="roundRect">
+            <a:avLst/>
+          </a:prstGeom>
+        </p:spPr>
+        <p:style>
+          <a:lnRef idx="2">
+            <a:schemeClr val="accent4"/>
+          </a:lnRef>
+          <a:fillRef idx="1">
+            <a:schemeClr val="lt1"/>
+          </a:fillRef>
+          <a:effectRef idx="0">
+            <a:schemeClr val="accent4"/>
+          </a:effectRef>
+          <a:fontRef idx="minor">
+            <a:schemeClr val="dk1"/>
+          </a:fontRef>
+        </p:style>
+        <p:txBody>
+          <a:bodyPr rtlCol="0" anchor="ctr"/>
+          <a:lstStyle/>
+          <a:p>
+            <a:pPr algn="ctr"/>
+            <a:endParaRPr lang="en-IN" sz="1350"/>
+          </a:p>
+        </p:txBody>
+      </p:sp>
+      <p:sp>
+        <p:nvSpPr>
+          <p:cNvPr id="12" name="Rectangle: Rounded Corners 11">
+            <a:extLst>
+              <a:ext uri="{FF2B5EF4-FFF2-40B4-BE49-F238E27FC236}">
+                <a16:creationId xmlns:a16="http://schemas.microsoft.com/office/drawing/2014/main" id="{A6897B2A-3067-C765-50C6-F4925AD4439E}"/>
+              </a:ext>
+            </a:extLst>
+          </p:cNvPr>
+          <p:cNvSpPr/>
+          <p:nvPr/>
+        </p:nvSpPr>
+        <p:spPr>
+          <a:xfrm>
+            <a:off x="3575485" y="1005576"/>
+            <a:ext cx="2430270" cy="3294366"/>
+          </a:xfrm>
+          <a:prstGeom prst="roundRect">
+            <a:avLst/>
+          </a:prstGeom>
+        </p:spPr>
+        <p:style>
+          <a:lnRef idx="2">
+            <a:schemeClr val="accent4"/>
+          </a:lnRef>
+          <a:fillRef idx="1">
+            <a:schemeClr val="lt1"/>
+          </a:fillRef>
+          <a:effectRef idx="0">
+            <a:schemeClr val="accent4"/>
+          </a:effectRef>
+          <a:fontRef idx="minor">
+            <a:schemeClr val="dk1"/>
+          </a:fontRef>
+        </p:style>
+        <p:txBody>
+          <a:bodyPr rtlCol="0" anchor="ctr"/>
+          <a:lstStyle/>
+          <a:p>
+            <a:pPr algn="ctr"/>
+            <a:endParaRPr lang="en-IN" sz="1350"/>
+          </a:p>
+        </p:txBody>
+      </p:sp>
+      <p:sp>
+        <p:nvSpPr>
+          <p:cNvPr id="11" name="Rectangle: Rounded Corners 10">
+            <a:extLst>
+              <a:ext uri="{FF2B5EF4-FFF2-40B4-BE49-F238E27FC236}">
+                <a16:creationId xmlns:a16="http://schemas.microsoft.com/office/drawing/2014/main" id="{4116373E-9EB6-D0D3-C007-6832C717176B}"/>
+              </a:ext>
+            </a:extLst>
+          </p:cNvPr>
+          <p:cNvSpPr/>
+          <p:nvPr/>
+        </p:nvSpPr>
+        <p:spPr>
+          <a:xfrm>
+            <a:off x="845586" y="1005576"/>
+            <a:ext cx="2430270" cy="3294366"/>
+          </a:xfrm>
+          <a:prstGeom prst="roundRect">
+            <a:avLst/>
+          </a:prstGeom>
+        </p:spPr>
+        <p:style>
+          <a:lnRef idx="2">
+            <a:schemeClr val="accent4"/>
+          </a:lnRef>
+          <a:fillRef idx="1">
+            <a:schemeClr val="lt1"/>
+          </a:fillRef>
+          <a:effectRef idx="0">
+            <a:schemeClr val="accent4"/>
+          </a:effectRef>
+          <a:fontRef idx="minor">
+            <a:schemeClr val="dk1"/>
+          </a:fontRef>
+        </p:style>
+        <p:txBody>
+          <a:bodyPr rtlCol="0" anchor="ctr"/>
+          <a:lstStyle/>
+          <a:p>
+            <a:pPr algn="ctr"/>
+            <a:endParaRPr lang="en-IN" sz="1350"/>
+          </a:p>
+        </p:txBody>
+      </p:sp>
+      <p:sp>
+        <p:nvSpPr>
+          <p:cNvPr id="3" name="Footer Placeholder 2">
+            <a:extLst>
+              <a:ext uri="{FF2B5EF4-FFF2-40B4-BE49-F238E27FC236}">
+                <a16:creationId xmlns:a16="http://schemas.microsoft.com/office/drawing/2014/main" id="{8F917924-C113-6A1B-CE98-70115B6A6ECE}"/>
               </a:ext>
             </a:extLst>
           </p:cNvPr>
@@ -17544,19 +20981,18 @@
           <a:lstStyle/>
           <a:p>
             <a:r>
-              <a:rPr lang="en-US"/>
+              <a:rPr lang="en-US" dirty="0"/>
               <a:t>www.anubhavtrainings.com</a:t>
             </a:r>
-            <a:endParaRPr lang="en-US" dirty="0"/>
           </a:p>
         </p:txBody>
       </p:sp>
       <p:sp>
         <p:nvSpPr>
-          <p:cNvPr id="3" name="Slide Number Placeholder 2">
+          <p:cNvPr id="4" name="Slide Number Placeholder 3">
             <a:extLst>
               <a:ext uri="{FF2B5EF4-FFF2-40B4-BE49-F238E27FC236}">
-                <a16:creationId xmlns:a16="http://schemas.microsoft.com/office/drawing/2014/main" id="{E42EEB52-862B-7FAD-454D-B56560E72FA4}"/>
+                <a16:creationId xmlns:a16="http://schemas.microsoft.com/office/drawing/2014/main" id="{706E3146-BEAA-4402-B035-310F2A6635D6}"/>
               </a:ext>
             </a:extLst>
           </p:cNvPr>
@@ -17567,7 +21003,12 @@
             <p:ph type="sldNum" sz="quarter" idx="12"/>
           </p:nvPr>
         </p:nvSpPr>
-        <p:spPr/>
+        <p:spPr>
+          <a:xfrm>
+            <a:off x="153552" y="4780975"/>
+            <a:ext cx="457081" cy="273773"/>
+          </a:xfrm>
+        </p:spPr>
         <p:txBody>
           <a:bodyPr/>
           <a:lstStyle/>
@@ -17577,16 +21018,16 @@
               <a:pPr/>
               <a:t>8</a:t>
             </a:fld>
-            <a:endParaRPr lang="en-US"/>
+            <a:endParaRPr lang="en-US" dirty="0"/>
           </a:p>
         </p:txBody>
       </p:sp>
       <p:sp>
         <p:nvSpPr>
-          <p:cNvPr id="4" name="Title 3">
+          <p:cNvPr id="5" name="Title 4">
             <a:extLst>
               <a:ext uri="{FF2B5EF4-FFF2-40B4-BE49-F238E27FC236}">
-                <a16:creationId xmlns:a16="http://schemas.microsoft.com/office/drawing/2014/main" id="{5468CF0A-5B58-7EBD-4C4A-D20F5F353931}"/>
+                <a16:creationId xmlns:a16="http://schemas.microsoft.com/office/drawing/2014/main" id="{0E1F4AE1-8C4B-D24F-9FA8-872C5D4F2740}"/>
               </a:ext>
             </a:extLst>
           </p:cNvPr>
@@ -17597,162 +21038,29 @@
             <p:ph type="title"/>
           </p:nvPr>
         </p:nvSpPr>
-        <p:spPr/>
+        <p:spPr>
+          <a:xfrm>
+            <a:off x="77371" y="133985"/>
+            <a:ext cx="8227457" cy="533262"/>
+          </a:xfrm>
+        </p:spPr>
         <p:txBody>
           <a:bodyPr/>
           <a:lstStyle/>
           <a:p>
-            <a:endParaRPr lang="en-IN"/>
-          </a:p>
-        </p:txBody>
-      </p:sp>
-      <mc:AlternateContent xmlns:mc="http://schemas.openxmlformats.org/markup-compatibility/2006" xmlns:p14="http://schemas.microsoft.com/office/powerpoint/2010/main">
-        <mc:Choice Requires="p14">
-          <p:contentPart p14:bwMode="auto" r:id="rId2">
-            <p14:nvContentPartPr>
-              <p14:cNvPr id="5" name="Ink 4">
-                <a:extLst>
-                  <a:ext uri="{FF2B5EF4-FFF2-40B4-BE49-F238E27FC236}">
-                    <a16:creationId xmlns:a16="http://schemas.microsoft.com/office/drawing/2014/main" id="{A7CBDDC0-CE2D-6700-18C3-EC0AF44FEB4A}"/>
-                  </a:ext>
-                </a:extLst>
-              </p14:cNvPr>
-              <p14:cNvContentPartPr/>
-              <p14:nvPr/>
-            </p14:nvContentPartPr>
-            <p14:xfrm>
-              <a:off x="1315357" y="-14658"/>
-              <a:ext cx="360" cy="360"/>
-            </p14:xfrm>
-          </p:contentPart>
-        </mc:Choice>
-        <mc:Fallback xmlns="">
-          <p:pic>
-            <p:nvPicPr>
-              <p:cNvPr id="5" name="Ink 4">
-                <a:extLst>
-                  <a:ext uri="{FF2B5EF4-FFF2-40B4-BE49-F238E27FC236}">
-                    <a16:creationId xmlns:a16="http://schemas.microsoft.com/office/drawing/2014/main" id="{AB080056-AF3B-2DD1-1233-CD37BCC6426B}"/>
-                  </a:ext>
-                </a:extLst>
-              </p:cNvPr>
-              <p:cNvPicPr/>
-              <p:nvPr/>
-            </p:nvPicPr>
-            <p:blipFill>
-              <a:blip r:embed="rId3"/>
-              <a:stretch>
-                <a:fillRect/>
-              </a:stretch>
-            </p:blipFill>
-            <p:spPr>
-              <a:xfrm>
-                <a:off x="1306357" y="-23658"/>
-                <a:ext cx="18000" cy="18000"/>
-              </a:xfrm>
-              <a:prstGeom prst="rect">
-                <a:avLst/>
-              </a:prstGeom>
-            </p:spPr>
-          </p:pic>
-        </mc:Fallback>
-      </mc:AlternateContent>
-    </p:spTree>
-    <p:extLst>
-      <p:ext uri="{BB962C8B-B14F-4D97-AF65-F5344CB8AC3E}">
-        <p14:creationId xmlns:p14="http://schemas.microsoft.com/office/powerpoint/2010/main" val="2751902423"/>
-      </p:ext>
-    </p:extLst>
-  </p:cSld>
-  <p:clrMapOvr>
-    <a:masterClrMapping/>
-  </p:clrMapOvr>
-</p:sld>
-</file>
-
-<file path=ppt/slides/slide9.xml><?xml version="1.0" encoding="utf-8"?>
-<p:sld xmlns:a="http://schemas.openxmlformats.org/drawingml/2006/main" xmlns:r="http://schemas.openxmlformats.org/officeDocument/2006/relationships" xmlns:p="http://schemas.openxmlformats.org/presentationml/2006/main">
-  <p:cSld>
-    <p:spTree>
-      <p:nvGrpSpPr>
-        <p:cNvPr id="1" name=""/>
-        <p:cNvGrpSpPr/>
-        <p:nvPr/>
-      </p:nvGrpSpPr>
-      <p:grpSpPr>
-        <a:xfrm>
-          <a:off x="0" y="0"/>
-          <a:ext cx="0" cy="0"/>
-          <a:chOff x="0" y="0"/>
-          <a:chExt cx="0" cy="0"/>
-        </a:xfrm>
-      </p:grpSpPr>
-      <p:sp>
-        <p:nvSpPr>
-          <p:cNvPr id="5" name="Flowchart: Connector 4"/>
-          <p:cNvSpPr/>
-          <p:nvPr/>
-        </p:nvSpPr>
-        <p:spPr>
-          <a:xfrm>
-            <a:off x="4355976" y="21622"/>
-            <a:ext cx="4168026" cy="4101362"/>
-          </a:xfrm>
-          <a:prstGeom prst="flowChartConnector">
-            <a:avLst/>
-          </a:prstGeom>
-          <a:gradFill flip="none" rotWithShape="1">
-            <a:gsLst>
-              <a:gs pos="0">
-                <a:srgbClr val="55E96E"/>
-              </a:gs>
-              <a:gs pos="46000">
-                <a:srgbClr val="0AEC25"/>
-              </a:gs>
-              <a:gs pos="100000">
-                <a:srgbClr val="00B050"/>
-              </a:gs>
-            </a:gsLst>
-            <a:path path="circle">
-              <a:fillToRect l="50000" t="130000" r="50000" b="-30000"/>
-            </a:path>
-            <a:tileRect/>
-          </a:gradFill>
-          <a:ln>
-            <a:noFill/>
-          </a:ln>
-        </p:spPr>
-        <p:style>
-          <a:lnRef idx="2">
-            <a:schemeClr val="accent1">
-              <a:shade val="50000"/>
-            </a:schemeClr>
-          </a:lnRef>
-          <a:fillRef idx="1">
-            <a:schemeClr val="accent1"/>
-          </a:fillRef>
-          <a:effectRef idx="0">
-            <a:schemeClr val="accent1"/>
-          </a:effectRef>
-          <a:fontRef idx="minor">
-            <a:schemeClr val="lt1"/>
-          </a:fontRef>
-        </p:style>
-        <p:txBody>
-          <a:bodyPr rtlCol="0" anchor="ctr"/>
-          <a:lstStyle/>
-          <a:p>
-            <a:pPr algn="ctr"/>
-            <a:endParaRPr lang="en-US" sz="1350"/>
+            <a:r>
+              <a:rPr lang="en-IN" sz="2500" dirty="0"/>
+              <a:t>Looming Threats</a:t>
+            </a:r>
           </a:p>
         </p:txBody>
       </p:sp>
       <p:pic>
         <p:nvPicPr>
-          <p:cNvPr id="6" name="Picture Placeholder 11">
+          <p:cNvPr id="6" name="Picture 5">
             <a:extLst>
               <a:ext uri="{FF2B5EF4-FFF2-40B4-BE49-F238E27FC236}">
-                <a16:creationId xmlns:a16="http://schemas.microsoft.com/office/drawing/2014/main" id="{420F5850-2D59-4C25-ADFF-E9013C5A6AAE}"/>
+                <a16:creationId xmlns:a16="http://schemas.microsoft.com/office/drawing/2014/main" id="{C5BE58F5-695F-B83A-C07A-659002044ACE}"/>
               </a:ext>
             </a:extLst>
           </p:cNvPr>
@@ -17762,249 +21070,87 @@
           <p:nvPr/>
         </p:nvPicPr>
         <p:blipFill>
-          <a:blip r:embed="rId2">
-            <a:extLst>
-              <a:ext uri="{28A0092B-C50C-407E-A947-70E740481C1C}">
-                <a14:useLocalDpi xmlns:a14="http://schemas.microsoft.com/office/drawing/2010/main" val="0"/>
-              </a:ext>
-            </a:extLst>
-          </a:blip>
+          <a:blip r:embed="rId2"/>
           <a:stretch>
             <a:fillRect/>
           </a:stretch>
         </p:blipFill>
         <p:spPr>
           <a:xfrm>
-            <a:off x="22649" y="10551"/>
-            <a:ext cx="5088657" cy="4690760"/>
+            <a:off x="953598" y="1167594"/>
+            <a:ext cx="2219439" cy="2095608"/>
           </a:xfrm>
-          <a:custGeom>
+          <a:prstGeom prst="rect">
             <a:avLst/>
-            <a:gdLst>
-              <a:gd name="connsiteX0" fmla="*/ 0 w 7654699"/>
-              <a:gd name="connsiteY0" fmla="*/ 0 h 5678805"/>
-              <a:gd name="connsiteX1" fmla="*/ 7654699 w 7654699"/>
-              <a:gd name="connsiteY1" fmla="*/ 0 h 5678805"/>
-              <a:gd name="connsiteX2" fmla="*/ 7654699 w 7654699"/>
-              <a:gd name="connsiteY2" fmla="*/ 0 h 5678805"/>
-              <a:gd name="connsiteX3" fmla="*/ 7654699 w 7654699"/>
-              <a:gd name="connsiteY3" fmla="*/ 4808982 h 5678805"/>
-              <a:gd name="connsiteX4" fmla="*/ 6784876 w 7654699"/>
-              <a:gd name="connsiteY4" fmla="*/ 5678805 h 5678805"/>
-              <a:gd name="connsiteX5" fmla="*/ 869823 w 7654699"/>
-              <a:gd name="connsiteY5" fmla="*/ 5678805 h 5678805"/>
-              <a:gd name="connsiteX6" fmla="*/ 0 w 7654699"/>
-              <a:gd name="connsiteY6" fmla="*/ 4808982 h 5678805"/>
-              <a:gd name="connsiteX7" fmla="*/ 0 w 7654699"/>
-              <a:gd name="connsiteY7" fmla="*/ 0 h 5678805"/>
-              <a:gd name="connsiteX8" fmla="*/ 0 w 7654699"/>
-              <a:gd name="connsiteY8" fmla="*/ 0 h 5678805"/>
-              <a:gd name="connsiteX0" fmla="*/ 0 w 7654699"/>
-              <a:gd name="connsiteY0" fmla="*/ 6717 h 5685522"/>
-              <a:gd name="connsiteX1" fmla="*/ 901515 w 7654699"/>
-              <a:gd name="connsiteY1" fmla="*/ 0 h 5685522"/>
-              <a:gd name="connsiteX2" fmla="*/ 7654699 w 7654699"/>
-              <a:gd name="connsiteY2" fmla="*/ 6717 h 5685522"/>
-              <a:gd name="connsiteX3" fmla="*/ 7654699 w 7654699"/>
-              <a:gd name="connsiteY3" fmla="*/ 6717 h 5685522"/>
-              <a:gd name="connsiteX4" fmla="*/ 7654699 w 7654699"/>
-              <a:gd name="connsiteY4" fmla="*/ 4815699 h 5685522"/>
-              <a:gd name="connsiteX5" fmla="*/ 6784876 w 7654699"/>
-              <a:gd name="connsiteY5" fmla="*/ 5685522 h 5685522"/>
-              <a:gd name="connsiteX6" fmla="*/ 869823 w 7654699"/>
-              <a:gd name="connsiteY6" fmla="*/ 5685522 h 5685522"/>
-              <a:gd name="connsiteX7" fmla="*/ 0 w 7654699"/>
-              <a:gd name="connsiteY7" fmla="*/ 4815699 h 5685522"/>
-              <a:gd name="connsiteX8" fmla="*/ 0 w 7654699"/>
-              <a:gd name="connsiteY8" fmla="*/ 6717 h 5685522"/>
-              <a:gd name="connsiteX9" fmla="*/ 0 w 7654699"/>
-              <a:gd name="connsiteY9" fmla="*/ 6717 h 5685522"/>
-              <a:gd name="connsiteX0" fmla="*/ 0 w 7654699"/>
-              <a:gd name="connsiteY0" fmla="*/ 6717 h 5685522"/>
-              <a:gd name="connsiteX1" fmla="*/ 901515 w 7654699"/>
-              <a:gd name="connsiteY1" fmla="*/ 0 h 5685522"/>
-              <a:gd name="connsiteX2" fmla="*/ 7654699 w 7654699"/>
-              <a:gd name="connsiteY2" fmla="*/ 6717 h 5685522"/>
-              <a:gd name="connsiteX3" fmla="*/ 7654699 w 7654699"/>
-              <a:gd name="connsiteY3" fmla="*/ 6717 h 5685522"/>
-              <a:gd name="connsiteX4" fmla="*/ 7654699 w 7654699"/>
-              <a:gd name="connsiteY4" fmla="*/ 4815699 h 5685522"/>
-              <a:gd name="connsiteX5" fmla="*/ 6784876 w 7654699"/>
-              <a:gd name="connsiteY5" fmla="*/ 5685522 h 5685522"/>
-              <a:gd name="connsiteX6" fmla="*/ 869823 w 7654699"/>
-              <a:gd name="connsiteY6" fmla="*/ 5685522 h 5685522"/>
-              <a:gd name="connsiteX7" fmla="*/ 0 w 7654699"/>
-              <a:gd name="connsiteY7" fmla="*/ 4815699 h 5685522"/>
-              <a:gd name="connsiteX8" fmla="*/ 0 w 7654699"/>
-              <a:gd name="connsiteY8" fmla="*/ 6717 h 5685522"/>
-              <a:gd name="connsiteX0" fmla="*/ 0 w 7654699"/>
-              <a:gd name="connsiteY0" fmla="*/ 4815699 h 5685522"/>
-              <a:gd name="connsiteX1" fmla="*/ 901515 w 7654699"/>
-              <a:gd name="connsiteY1" fmla="*/ 0 h 5685522"/>
-              <a:gd name="connsiteX2" fmla="*/ 7654699 w 7654699"/>
-              <a:gd name="connsiteY2" fmla="*/ 6717 h 5685522"/>
-              <a:gd name="connsiteX3" fmla="*/ 7654699 w 7654699"/>
-              <a:gd name="connsiteY3" fmla="*/ 6717 h 5685522"/>
-              <a:gd name="connsiteX4" fmla="*/ 7654699 w 7654699"/>
-              <a:gd name="connsiteY4" fmla="*/ 4815699 h 5685522"/>
-              <a:gd name="connsiteX5" fmla="*/ 6784876 w 7654699"/>
-              <a:gd name="connsiteY5" fmla="*/ 5685522 h 5685522"/>
-              <a:gd name="connsiteX6" fmla="*/ 869823 w 7654699"/>
-              <a:gd name="connsiteY6" fmla="*/ 5685522 h 5685522"/>
-              <a:gd name="connsiteX7" fmla="*/ 0 w 7654699"/>
-              <a:gd name="connsiteY7" fmla="*/ 4815699 h 5685522"/>
-              <a:gd name="connsiteX0" fmla="*/ 776254 w 7561130"/>
-              <a:gd name="connsiteY0" fmla="*/ 5685522 h 5685522"/>
-              <a:gd name="connsiteX1" fmla="*/ 807946 w 7561130"/>
-              <a:gd name="connsiteY1" fmla="*/ 0 h 5685522"/>
-              <a:gd name="connsiteX2" fmla="*/ 7561130 w 7561130"/>
-              <a:gd name="connsiteY2" fmla="*/ 6717 h 5685522"/>
-              <a:gd name="connsiteX3" fmla="*/ 7561130 w 7561130"/>
-              <a:gd name="connsiteY3" fmla="*/ 6717 h 5685522"/>
-              <a:gd name="connsiteX4" fmla="*/ 7561130 w 7561130"/>
-              <a:gd name="connsiteY4" fmla="*/ 4815699 h 5685522"/>
-              <a:gd name="connsiteX5" fmla="*/ 6691307 w 7561130"/>
-              <a:gd name="connsiteY5" fmla="*/ 5685522 h 5685522"/>
-              <a:gd name="connsiteX6" fmla="*/ 776254 w 7561130"/>
-              <a:gd name="connsiteY6" fmla="*/ 5685522 h 5685522"/>
-              <a:gd name="connsiteX0" fmla="*/ 0 w 6784876"/>
-              <a:gd name="connsiteY0" fmla="*/ 5685522 h 5685522"/>
-              <a:gd name="connsiteX1" fmla="*/ 31692 w 6784876"/>
-              <a:gd name="connsiteY1" fmla="*/ 0 h 5685522"/>
-              <a:gd name="connsiteX2" fmla="*/ 6784876 w 6784876"/>
-              <a:gd name="connsiteY2" fmla="*/ 6717 h 5685522"/>
-              <a:gd name="connsiteX3" fmla="*/ 6784876 w 6784876"/>
-              <a:gd name="connsiteY3" fmla="*/ 6717 h 5685522"/>
-              <a:gd name="connsiteX4" fmla="*/ 6784876 w 6784876"/>
-              <a:gd name="connsiteY4" fmla="*/ 4815699 h 5685522"/>
-              <a:gd name="connsiteX5" fmla="*/ 5915053 w 6784876"/>
-              <a:gd name="connsiteY5" fmla="*/ 5685522 h 5685522"/>
-              <a:gd name="connsiteX6" fmla="*/ 0 w 6784876"/>
-              <a:gd name="connsiteY6" fmla="*/ 5685522 h 5685522"/>
-            </a:gdLst>
-            <a:ahLst/>
-            <a:cxnLst>
-              <a:cxn ang="0">
-                <a:pos x="connsiteX0" y="connsiteY0"/>
-              </a:cxn>
-              <a:cxn ang="0">
-                <a:pos x="connsiteX1" y="connsiteY1"/>
-              </a:cxn>
-              <a:cxn ang="0">
-                <a:pos x="connsiteX2" y="connsiteY2"/>
-              </a:cxn>
-              <a:cxn ang="0">
-                <a:pos x="connsiteX3" y="connsiteY3"/>
-              </a:cxn>
-              <a:cxn ang="0">
-                <a:pos x="connsiteX4" y="connsiteY4"/>
-              </a:cxn>
-              <a:cxn ang="0">
-                <a:pos x="connsiteX5" y="connsiteY5"/>
-              </a:cxn>
-              <a:cxn ang="0">
-                <a:pos x="connsiteX6" y="connsiteY6"/>
-              </a:cxn>
-            </a:cxnLst>
-            <a:rect l="l" t="t" r="r" b="b"/>
-            <a:pathLst>
-              <a:path w="6784876" h="5685522">
-                <a:moveTo>
-                  <a:pt x="0" y="5685522"/>
-                </a:moveTo>
-                <a:lnTo>
-                  <a:pt x="31692" y="0"/>
-                </a:lnTo>
-                <a:lnTo>
-                  <a:pt x="6784876" y="6717"/>
-                </a:lnTo>
-                <a:lnTo>
-                  <a:pt x="6784876" y="6717"/>
-                </a:lnTo>
-                <a:lnTo>
-                  <a:pt x="6784876" y="4815699"/>
-                </a:lnTo>
-                <a:cubicBezTo>
-                  <a:pt x="6784876" y="5296089"/>
-                  <a:pt x="6395443" y="5685522"/>
-                  <a:pt x="5915053" y="5685522"/>
-                </a:cubicBezTo>
-                <a:lnTo>
-                  <a:pt x="0" y="5685522"/>
-                </a:lnTo>
-                <a:close/>
-              </a:path>
-            </a:pathLst>
-          </a:custGeom>
+          </a:prstGeom>
+        </p:spPr>
+      </p:pic>
+      <p:pic>
+        <p:nvPicPr>
+          <p:cNvPr id="8" name="Picture 7">
+            <a:extLst>
+              <a:ext uri="{FF2B5EF4-FFF2-40B4-BE49-F238E27FC236}">
+                <a16:creationId xmlns:a16="http://schemas.microsoft.com/office/drawing/2014/main" id="{7629A8A3-B4E3-1360-6795-5BDCD8A170B6}"/>
+              </a:ext>
+            </a:extLst>
+          </p:cNvPr>
+          <p:cNvPicPr>
+            <a:picLocks noChangeAspect="1"/>
+          </p:cNvPicPr>
+          <p:nvPr/>
+        </p:nvPicPr>
+        <p:blipFill>
+          <a:blip r:embed="rId3"/>
+          <a:stretch>
+            <a:fillRect/>
+          </a:stretch>
+        </p:blipFill>
+        <p:spPr>
+          <a:xfrm>
+            <a:off x="3676138" y="1167594"/>
+            <a:ext cx="2228965" cy="2105133"/>
+          </a:xfrm>
+          <a:prstGeom prst="rect">
+            <a:avLst/>
+          </a:prstGeom>
+        </p:spPr>
+      </p:pic>
+      <p:pic>
+        <p:nvPicPr>
+          <p:cNvPr id="10" name="Picture 9">
+            <a:extLst>
+              <a:ext uri="{FF2B5EF4-FFF2-40B4-BE49-F238E27FC236}">
+                <a16:creationId xmlns:a16="http://schemas.microsoft.com/office/drawing/2014/main" id="{DE700108-8C70-558C-9876-AA22CFEAA7C8}"/>
+              </a:ext>
+            </a:extLst>
+          </p:cNvPr>
+          <p:cNvPicPr>
+            <a:picLocks noChangeAspect="1"/>
+          </p:cNvPicPr>
+          <p:nvPr/>
+        </p:nvPicPr>
+        <p:blipFill>
+          <a:blip r:embed="rId4"/>
+          <a:stretch>
+            <a:fillRect/>
+          </a:stretch>
+        </p:blipFill>
+        <p:spPr>
+          <a:xfrm>
+            <a:off x="6408204" y="1158069"/>
+            <a:ext cx="2228965" cy="2095608"/>
+          </a:xfrm>
+          <a:prstGeom prst="rect">
+            <a:avLst/>
+          </a:prstGeom>
         </p:spPr>
       </p:pic>
       <p:sp>
         <p:nvSpPr>
-          <p:cNvPr id="7" name="Rectangle: Rounded Corners 3">
+          <p:cNvPr id="14" name="TextBox 13">
             <a:extLst>
               <a:ext uri="{FF2B5EF4-FFF2-40B4-BE49-F238E27FC236}">
-                <a16:creationId xmlns:a16="http://schemas.microsoft.com/office/drawing/2014/main" id="{4DCA9A03-C201-42B6-AF8D-AB31333C8852}"/>
-              </a:ext>
-            </a:extLst>
-          </p:cNvPr>
-          <p:cNvSpPr/>
-          <p:nvPr/>
-        </p:nvSpPr>
-        <p:spPr>
-          <a:xfrm>
-            <a:off x="4550245" y="735546"/>
-            <a:ext cx="3973757" cy="2082201"/>
-          </a:xfrm>
-          <a:prstGeom prst="roundRect">
-            <a:avLst>
-              <a:gd name="adj" fmla="val 8835"/>
-            </a:avLst>
-          </a:prstGeom>
-          <a:solidFill>
-            <a:schemeClr val="bg1"/>
-          </a:solidFill>
-          <a:ln>
-            <a:noFill/>
-          </a:ln>
-          <a:effectLst>
-            <a:outerShdw blurRad="635000" dist="825500" dir="9600000" algn="tr" rotWithShape="0">
-              <a:prstClr val="black">
-                <a:alpha val="20000"/>
-              </a:prstClr>
-            </a:outerShdw>
-          </a:effectLst>
-        </p:spPr>
-        <p:style>
-          <a:lnRef idx="2">
-            <a:schemeClr val="accent1">
-              <a:shade val="50000"/>
-            </a:schemeClr>
-          </a:lnRef>
-          <a:fillRef idx="1">
-            <a:schemeClr val="accent1"/>
-          </a:fillRef>
-          <a:effectRef idx="0">
-            <a:schemeClr val="accent1"/>
-          </a:effectRef>
-          <a:fontRef idx="minor">
-            <a:schemeClr val="lt1"/>
-          </a:fontRef>
-        </p:style>
-        <p:txBody>
-          <a:bodyPr rtlCol="0" anchor="ctr"/>
-          <a:lstStyle/>
-          <a:p>
-            <a:pPr algn="ctr"/>
-            <a:endParaRPr lang="en-IN" sz="1350" dirty="0"/>
-          </a:p>
-        </p:txBody>
-      </p:sp>
-      <p:sp>
-        <p:nvSpPr>
-          <p:cNvPr id="8" name="TextBox 7">
-            <a:extLst>
-              <a:ext uri="{FF2B5EF4-FFF2-40B4-BE49-F238E27FC236}">
-                <a16:creationId xmlns:a16="http://schemas.microsoft.com/office/drawing/2014/main" id="{4B09D3EC-7881-4341-8189-469046CA259E}"/>
+                <a16:creationId xmlns:a16="http://schemas.microsoft.com/office/drawing/2014/main" id="{12A2D827-0E57-35C6-CD56-DC708EB80327}"/>
               </a:ext>
             </a:extLst>
           </p:cNvPr>
@@ -18013,8 +21159,8 @@
         </p:nvSpPr>
         <p:spPr>
           <a:xfrm>
-            <a:off x="4981951" y="1042138"/>
-            <a:ext cx="3179963" cy="461665"/>
+            <a:off x="1061610" y="3489852"/>
+            <a:ext cx="1944216" cy="738664"/>
           </a:xfrm>
           <a:prstGeom prst="rect">
             <a:avLst/>
@@ -18022,38 +21168,40 @@
           <a:noFill/>
         </p:spPr>
         <p:txBody>
-          <a:bodyPr wrap="square" lIns="0" tIns="0" rIns="0" bIns="0" rtlCol="0">
+          <a:bodyPr wrap="square" rtlCol="0">
             <a:spAutoFit/>
           </a:bodyPr>
           <a:lstStyle/>
           <a:p>
+            <a:pPr algn="ctr"/>
             <a:r>
-              <a:rPr lang="en-IN" sz="3000" b="1" dirty="0">
-                <a:solidFill>
-                  <a:srgbClr val="75C042"/>
-                </a:solidFill>
+              <a:rPr lang="en-IN" sz="2100" dirty="0">
+                <a:latin typeface="ADLaM Display" panose="02010000000000000000" pitchFamily="2" charset="0"/>
+                <a:ea typeface="ADLaM Display" panose="02010000000000000000" pitchFamily="2" charset="0"/>
+                <a:cs typeface="ADLaM Display" panose="02010000000000000000" pitchFamily="2" charset="0"/>
               </a:rPr>
-              <a:t>What We </a:t>
+              <a:t>Geopolitical</a:t>
             </a:r>
+          </a:p>
+          <a:p>
+            <a:pPr algn="ctr"/>
             <a:r>
-              <a:rPr lang="en-IN" sz="3000" b="1" dirty="0">
-                <a:solidFill>
-                  <a:srgbClr val="55E96E"/>
-                </a:solidFill>
-                <a:latin typeface="Segoe UI Light" panose="020B0502040204020203" pitchFamily="34" charset="0"/>
-                <a:cs typeface="Segoe UI Light" panose="020B0502040204020203" pitchFamily="34" charset="0"/>
+              <a:rPr lang="en-IN" sz="2100" dirty="0">
+                <a:latin typeface="ADLaM Display" panose="02010000000000000000" pitchFamily="2" charset="0"/>
+                <a:ea typeface="ADLaM Display" panose="02010000000000000000" pitchFamily="2" charset="0"/>
+                <a:cs typeface="ADLaM Display" panose="02010000000000000000" pitchFamily="2" charset="0"/>
               </a:rPr>
-              <a:t>Did</a:t>
+              <a:t>Instability </a:t>
             </a:r>
           </a:p>
         </p:txBody>
       </p:sp>
       <p:sp>
         <p:nvSpPr>
-          <p:cNvPr id="9" name="TextBox 8">
+          <p:cNvPr id="15" name="TextBox 14">
             <a:extLst>
               <a:ext uri="{FF2B5EF4-FFF2-40B4-BE49-F238E27FC236}">
-                <a16:creationId xmlns:a16="http://schemas.microsoft.com/office/drawing/2014/main" id="{A0CBE2D0-9475-4BE8-AC62-B9A03DC275C3}"/>
+                <a16:creationId xmlns:a16="http://schemas.microsoft.com/office/drawing/2014/main" id="{A11D0D34-A56E-3842-71EE-29084BB56C47}"/>
               </a:ext>
             </a:extLst>
           </p:cNvPr>
@@ -18062,8 +21210,8 @@
         </p:nvSpPr>
         <p:spPr>
           <a:xfrm>
-            <a:off x="4981951" y="1610639"/>
-            <a:ext cx="3179963" cy="461665"/>
+            <a:off x="3761910" y="3487387"/>
+            <a:ext cx="1944216" cy="738664"/>
           </a:xfrm>
           <a:prstGeom prst="rect">
             <a:avLst/>
@@ -18071,367 +21219,85 @@
           <a:noFill/>
         </p:spPr>
         <p:txBody>
-          <a:bodyPr wrap="square" lIns="0" tIns="0" rIns="0" bIns="0" rtlCol="0" anchor="t">
+          <a:bodyPr wrap="square" rtlCol="0">
             <a:spAutoFit/>
           </a:bodyPr>
           <a:lstStyle/>
           <a:p>
+            <a:pPr algn="ctr"/>
             <a:r>
-              <a:rPr lang="en-US" sz="3000" kern="0" dirty="0">
-                <a:solidFill>
-                  <a:schemeClr val="tx1">
-                    <a:lumMod val="75000"/>
-                    <a:lumOff val="25000"/>
-                  </a:schemeClr>
-                </a:solidFill>
-                <a:latin typeface="Segoe UI" panose="020B0502040204020203" pitchFamily="34" charset="0"/>
-                <a:ea typeface="Calibri Light" charset="0"/>
-                <a:cs typeface="Segoe UI" panose="020B0502040204020203" pitchFamily="34" charset="0"/>
+              <a:rPr lang="en-IN" sz="2100" dirty="0">
+                <a:latin typeface="ADLaM Display" panose="02010000000000000000" pitchFamily="2" charset="0"/>
+                <a:ea typeface="ADLaM Display" panose="02010000000000000000" pitchFamily="2" charset="0"/>
+                <a:cs typeface="ADLaM Display" panose="02010000000000000000" pitchFamily="2" charset="0"/>
               </a:rPr>
-              <a:t>Let’s Summarize</a:t>
+              <a:t>Economic Uncertainties</a:t>
             </a:r>
-            <a:endParaRPr lang="en-US" sz="3000" dirty="0">
-              <a:solidFill>
-                <a:schemeClr val="tx1">
-                  <a:lumMod val="75000"/>
-                  <a:lumOff val="25000"/>
-                </a:schemeClr>
-              </a:solidFill>
-              <a:latin typeface="Segoe UI" panose="020B0502040204020203" pitchFamily="34" charset="0"/>
-              <a:ea typeface="Calibri Light" charset="0"/>
-              <a:cs typeface="Segoe UI" panose="020B0502040204020203" pitchFamily="34" charset="0"/>
-            </a:endParaRPr>
-          </a:p>
-        </p:txBody>
-      </p:sp>
-      <p:grpSp>
-        <p:nvGrpSpPr>
-          <p:cNvPr id="10" name="Group 9">
-            <a:extLst>
-              <a:ext uri="{FF2B5EF4-FFF2-40B4-BE49-F238E27FC236}">
-                <a16:creationId xmlns:a16="http://schemas.microsoft.com/office/drawing/2014/main" id="{CBADDFA3-0336-41F5-81AE-B9456B828C2C}"/>
-              </a:ext>
-            </a:extLst>
-          </p:cNvPr>
-          <p:cNvGrpSpPr/>
-          <p:nvPr/>
-        </p:nvGrpSpPr>
-        <p:grpSpPr>
-          <a:xfrm>
-            <a:off x="4999393" y="2370854"/>
-            <a:ext cx="463016" cy="82493"/>
-            <a:chOff x="6006451" y="5603130"/>
-            <a:chExt cx="617354" cy="109990"/>
-          </a:xfrm>
-        </p:grpSpPr>
-        <p:sp>
-          <p:nvSpPr>
-            <p:cNvPr id="11" name="Rectangle 5">
-              <a:extLst>
-                <a:ext uri="{FF2B5EF4-FFF2-40B4-BE49-F238E27FC236}">
-                  <a16:creationId xmlns:a16="http://schemas.microsoft.com/office/drawing/2014/main" id="{EF42471A-33F9-4E04-8306-66A59FCEE04D}"/>
-                </a:ext>
-              </a:extLst>
-            </p:cNvPr>
-            <p:cNvSpPr>
-              <a:spLocks noChangeArrowheads="1"/>
-            </p:cNvSpPr>
-            <p:nvPr/>
-          </p:nvSpPr>
-          <p:spPr bwMode="auto">
-            <a:xfrm>
-              <a:off x="6006451" y="5603130"/>
-              <a:ext cx="109992" cy="109990"/>
-            </a:xfrm>
-            <a:prstGeom prst="rect">
-              <a:avLst/>
-            </a:prstGeom>
-            <a:solidFill>
-              <a:srgbClr val="00B050"/>
-            </a:solidFill>
-            <a:ln w="9525">
-              <a:noFill/>
-              <a:miter lim="800000"/>
-              <a:headEnd/>
-              <a:tailEnd/>
-            </a:ln>
-          </p:spPr>
-          <p:txBody>
-            <a:bodyPr vert="horz" wrap="square" lIns="68580" tIns="34290" rIns="68580" bIns="34290" numCol="1" anchor="t" anchorCtr="0" compatLnSpc="1">
-              <a:prstTxWarp prst="textNoShape">
-                <a:avLst/>
-              </a:prstTxWarp>
-            </a:bodyPr>
-            <a:lstStyle/>
-            <a:p>
-              <a:endParaRPr lang="en-IN" sz="1350"/>
-            </a:p>
-          </p:txBody>
-        </p:sp>
-        <p:sp>
-          <p:nvSpPr>
-            <p:cNvPr id="12" name="Rectangle 5">
-              <a:extLst>
-                <a:ext uri="{FF2B5EF4-FFF2-40B4-BE49-F238E27FC236}">
-                  <a16:creationId xmlns:a16="http://schemas.microsoft.com/office/drawing/2014/main" id="{C99CB4F6-0149-49F4-8A24-BEB708A29F1A}"/>
-                </a:ext>
-              </a:extLst>
-            </p:cNvPr>
-            <p:cNvSpPr>
-              <a:spLocks noChangeArrowheads="1"/>
-            </p:cNvSpPr>
-            <p:nvPr/>
-          </p:nvSpPr>
-          <p:spPr bwMode="auto">
-            <a:xfrm>
-              <a:off x="6260132" y="5603130"/>
-              <a:ext cx="109992" cy="109990"/>
-            </a:xfrm>
-            <a:prstGeom prst="rect">
-              <a:avLst/>
-            </a:prstGeom>
-            <a:solidFill>
-              <a:srgbClr val="75C042"/>
-            </a:solidFill>
-            <a:ln w="9525">
-              <a:noFill/>
-              <a:miter lim="800000"/>
-              <a:headEnd/>
-              <a:tailEnd/>
-            </a:ln>
-          </p:spPr>
-          <p:txBody>
-            <a:bodyPr vert="horz" wrap="square" lIns="68580" tIns="34290" rIns="68580" bIns="34290" numCol="1" anchor="t" anchorCtr="0" compatLnSpc="1">
-              <a:prstTxWarp prst="textNoShape">
-                <a:avLst/>
-              </a:prstTxWarp>
-            </a:bodyPr>
-            <a:lstStyle/>
-            <a:p>
-              <a:endParaRPr lang="en-IN" sz="1350"/>
-            </a:p>
-          </p:txBody>
-        </p:sp>
-        <p:sp>
-          <p:nvSpPr>
-            <p:cNvPr id="13" name="Rectangle 5">
-              <a:extLst>
-                <a:ext uri="{FF2B5EF4-FFF2-40B4-BE49-F238E27FC236}">
-                  <a16:creationId xmlns:a16="http://schemas.microsoft.com/office/drawing/2014/main" id="{8BED369E-8B8A-45FD-8B5A-703CE09C2946}"/>
-                </a:ext>
-              </a:extLst>
-            </p:cNvPr>
-            <p:cNvSpPr>
-              <a:spLocks noChangeArrowheads="1"/>
-            </p:cNvSpPr>
-            <p:nvPr/>
-          </p:nvSpPr>
-          <p:spPr bwMode="auto">
-            <a:xfrm>
-              <a:off x="6513813" y="5603130"/>
-              <a:ext cx="109992" cy="109990"/>
-            </a:xfrm>
-            <a:prstGeom prst="rect">
-              <a:avLst/>
-            </a:prstGeom>
-            <a:solidFill>
-              <a:srgbClr val="0AEC25"/>
-            </a:solidFill>
-            <a:ln w="9525">
-              <a:noFill/>
-              <a:miter lim="800000"/>
-              <a:headEnd/>
-              <a:tailEnd/>
-            </a:ln>
-          </p:spPr>
-          <p:txBody>
-            <a:bodyPr vert="horz" wrap="square" lIns="68580" tIns="34290" rIns="68580" bIns="34290" numCol="1" anchor="t" anchorCtr="0" compatLnSpc="1">
-              <a:prstTxWarp prst="textNoShape">
-                <a:avLst/>
-              </a:prstTxWarp>
-            </a:bodyPr>
-            <a:lstStyle/>
-            <a:p>
-              <a:endParaRPr lang="en-IN" sz="1350"/>
-            </a:p>
-          </p:txBody>
-        </p:sp>
-      </p:grpSp>
-      <p:sp>
-        <p:nvSpPr>
-          <p:cNvPr id="14" name="Google Shape;845;p16"/>
-          <p:cNvSpPr/>
-          <p:nvPr/>
-        </p:nvSpPr>
-        <p:spPr>
-          <a:xfrm>
-            <a:off x="1190" y="0"/>
-            <a:ext cx="1494765" cy="736929"/>
-          </a:xfrm>
-          <a:custGeom>
-            <a:avLst/>
-            <a:gdLst/>
-            <a:ahLst/>
-            <a:cxnLst/>
-            <a:rect l="l" t="t" r="r" b="b"/>
-            <a:pathLst>
-              <a:path w="1993020" h="1803466" extrusionOk="0">
-                <a:moveTo>
-                  <a:pt x="0" y="0"/>
-                </a:moveTo>
-                <a:lnTo>
-                  <a:pt x="1993020" y="0"/>
-                </a:lnTo>
-                <a:lnTo>
-                  <a:pt x="1229306" y="1803466"/>
-                </a:lnTo>
-                <a:lnTo>
-                  <a:pt x="0" y="1803466"/>
-                </a:lnTo>
-                <a:lnTo>
-                  <a:pt x="0" y="0"/>
-                </a:lnTo>
-                <a:close/>
-              </a:path>
-            </a:pathLst>
-          </a:custGeom>
-          <a:solidFill>
-            <a:srgbClr val="75C042"/>
-          </a:solidFill>
-          <a:ln>
-            <a:noFill/>
-          </a:ln>
-        </p:spPr>
-        <p:txBody>
-          <a:bodyPr spcFirstLastPara="1" wrap="square" lIns="68569" tIns="34275" rIns="68569" bIns="34275" anchor="ctr" anchorCtr="0">
-            <a:noAutofit/>
-          </a:bodyPr>
-          <a:lstStyle/>
-          <a:p>
-            <a:pPr algn="ctr" defTabSz="685800">
-              <a:buClr>
-                <a:srgbClr val="000000"/>
-              </a:buClr>
-              <a:defRPr/>
-            </a:pPr>
-            <a:endParaRPr sz="1350" kern="0">
-              <a:solidFill>
-                <a:srgbClr val="75C042"/>
-              </a:solidFill>
-              <a:latin typeface="Calibri"/>
-              <a:ea typeface="Calibri"/>
-              <a:cs typeface="Calibri"/>
-              <a:sym typeface="Calibri"/>
-            </a:endParaRPr>
           </a:p>
         </p:txBody>
       </p:sp>
       <p:sp>
         <p:nvSpPr>
-          <p:cNvPr id="16" name="Google Shape;552;p2"/>
+          <p:cNvPr id="16" name="TextBox 15">
+            <a:extLst>
+              <a:ext uri="{FF2B5EF4-FFF2-40B4-BE49-F238E27FC236}">
+                <a16:creationId xmlns:a16="http://schemas.microsoft.com/office/drawing/2014/main" id="{2B1E4614-4B0F-9F65-81C5-2738FE2F3A86}"/>
+              </a:ext>
+            </a:extLst>
+          </p:cNvPr>
           <p:cNvSpPr txBox="1"/>
           <p:nvPr/>
         </p:nvSpPr>
         <p:spPr>
           <a:xfrm>
-            <a:off x="7108178" y="4873864"/>
-            <a:ext cx="2251926" cy="253885"/>
+            <a:off x="6550578" y="3427493"/>
+            <a:ext cx="1944216" cy="738664"/>
           </a:xfrm>
           <a:prstGeom prst="rect">
             <a:avLst/>
           </a:prstGeom>
           <a:noFill/>
-          <a:ln>
-            <a:noFill/>
-          </a:ln>
         </p:spPr>
         <p:txBody>
-          <a:bodyPr spcFirstLastPara="1" wrap="square" lIns="68569" tIns="34275" rIns="68569" bIns="34275" anchor="t" anchorCtr="0">
+          <a:bodyPr wrap="square" rtlCol="0">
             <a:spAutoFit/>
           </a:bodyPr>
           <a:lstStyle/>
           <a:p>
+            <a:pPr algn="ctr"/>
             <a:r>
-              <a:rPr lang="en-US" sz="1200" dirty="0">
-                <a:solidFill>
-                  <a:srgbClr val="75C042"/>
-                </a:solidFill>
-                <a:latin typeface="Cambria" panose="02040503050406030204" pitchFamily="18" charset="0"/>
-                <a:ea typeface="Cambria" panose="02040503050406030204" pitchFamily="18" charset="0"/>
-                <a:cs typeface="Corben"/>
-                <a:sym typeface="Corben"/>
+              <a:rPr lang="en-IN" sz="2100" dirty="0">
+                <a:latin typeface="ADLaM Display" panose="02010000000000000000" pitchFamily="2" charset="0"/>
+                <a:ea typeface="ADLaM Display" panose="02010000000000000000" pitchFamily="2" charset="0"/>
+                <a:cs typeface="ADLaM Display" panose="02010000000000000000" pitchFamily="2" charset="0"/>
               </a:rPr>
-              <a:t>www.anubhavtrainings.com</a:t>
+              <a:t>Disruptive Technologies</a:t>
             </a:r>
-            <a:endParaRPr sz="1200" dirty="0">
-              <a:solidFill>
-                <a:srgbClr val="75C042"/>
-              </a:solidFill>
-              <a:latin typeface="Cambria" panose="02040503050406030204" pitchFamily="18" charset="0"/>
-              <a:ea typeface="Cambria" panose="02040503050406030204" pitchFamily="18" charset="0"/>
-              <a:cs typeface="Corben"/>
-              <a:sym typeface="Corben"/>
-            </a:endParaRPr>
           </a:p>
         </p:txBody>
       </p:sp>
-      <p:pic>
-        <p:nvPicPr>
-          <p:cNvPr id="17" name="Picture 4">
-            <a:extLst>
-              <a:ext uri="{FF2B5EF4-FFF2-40B4-BE49-F238E27FC236}">
-                <a16:creationId xmlns:a16="http://schemas.microsoft.com/office/drawing/2014/main" id="{DB8A7F7E-7F2C-20C1-2A09-7D9F11F6AD11}"/>
-              </a:ext>
-            </a:extLst>
-          </p:cNvPr>
-          <p:cNvPicPr>
-            <a:picLocks noChangeAspect="1" noChangeArrowheads="1"/>
-          </p:cNvPicPr>
-          <p:nvPr/>
-        </p:nvPicPr>
-        <p:blipFill>
-          <a:blip r:embed="rId3" cstate="print">
-            <a:extLst>
-              <a:ext uri="{28A0092B-C50C-407E-A947-70E740481C1C}">
-                <a14:useLocalDpi xmlns:a14="http://schemas.microsoft.com/office/drawing/2010/main" val="0"/>
-              </a:ext>
-            </a:extLst>
-          </a:blip>
-          <a:srcRect/>
-          <a:stretch>
-            <a:fillRect/>
-          </a:stretch>
-        </p:blipFill>
-        <p:spPr bwMode="auto">
-          <a:xfrm>
-            <a:off x="8650243" y="0"/>
-            <a:ext cx="491377" cy="485336"/>
-          </a:xfrm>
-          <a:prstGeom prst="rect">
-            <a:avLst/>
-          </a:prstGeom>
-          <a:noFill/>
-          <a:extLst>
-            <a:ext uri="{909E8E84-426E-40DD-AFC4-6F175D3DCCD1}">
-              <a14:hiddenFill xmlns:a14="http://schemas.microsoft.com/office/drawing/2010/main">
-                <a:solidFill>
-                  <a:srgbClr val="FFFFFF"/>
-                </a:solidFill>
-              </a14:hiddenFill>
-            </a:ext>
-          </a:extLst>
-        </p:spPr>
-      </p:pic>
     </p:spTree>
     <p:extLst>
       <p:ext uri="{BB962C8B-B14F-4D97-AF65-F5344CB8AC3E}">
-        <p14:creationId xmlns:p14="http://schemas.microsoft.com/office/powerpoint/2010/main" val="2376139371"/>
+        <p14:creationId xmlns:p14="http://schemas.microsoft.com/office/powerpoint/2010/main" val="729932549"/>
       </p:ext>
     </p:extLst>
   </p:cSld>
   <p:clrMapOvr>
     <a:masterClrMapping/>
   </p:clrMapOvr>
+  <mc:AlternateContent xmlns:mc="http://schemas.openxmlformats.org/markup-compatibility/2006" xmlns:p14="http://schemas.microsoft.com/office/powerpoint/2010/main">
+    <mc:Choice Requires="p14">
+      <p:transition spd="med" p14:dur="700">
+        <p:fade/>
+      </p:transition>
+    </mc:Choice>
+    <mc:Fallback xmlns="">
+      <p:transition spd="med">
+        <p:fade/>
+      </p:transition>
+    </mc:Fallback>
+  </mc:AlternateContent>
   <p:timing>
     <p:tnLst>
       <p:par>
@@ -18453,7 +21319,7 @@
                             </p:stCondLst>
                             <p:childTnLst>
                               <p:par>
-                                <p:cTn id="5" presetID="16" presetClass="entr" presetSubtype="21" fill="hold" grpId="0" nodeType="clickEffect">
+                                <p:cTn id="5" presetID="2" presetClass="entr" presetSubtype="4" fill="hold" grpId="0" nodeType="clickEffect">
                                   <p:stCondLst>
                                     <p:cond delay="0"/>
                                   </p:stCondLst>
@@ -18461,6 +21327,316 @@
                                     <p:set>
                                       <p:cBhvr>
                                         <p:cTn id="6" dur="1" fill="hold">
+                                          <p:stCondLst>
+                                            <p:cond delay="0"/>
+                                          </p:stCondLst>
+                                        </p:cTn>
+                                        <p:tgtEl>
+                                          <p:spTgt spid="11"/>
+                                        </p:tgtEl>
+                                        <p:attrNameLst>
+                                          <p:attrName>style.visibility</p:attrName>
+                                        </p:attrNameLst>
+                                      </p:cBhvr>
+                                      <p:to>
+                                        <p:strVal val="visible"/>
+                                      </p:to>
+                                    </p:set>
+                                    <p:anim calcmode="lin" valueType="num">
+                                      <p:cBhvr additive="base">
+                                        <p:cTn id="7" dur="500" fill="hold"/>
+                                        <p:tgtEl>
+                                          <p:spTgt spid="11"/>
+                                        </p:tgtEl>
+                                        <p:attrNameLst>
+                                          <p:attrName>ppt_x</p:attrName>
+                                        </p:attrNameLst>
+                                      </p:cBhvr>
+                                      <p:tavLst>
+                                        <p:tav tm="0">
+                                          <p:val>
+                                            <p:strVal val="#ppt_x"/>
+                                          </p:val>
+                                        </p:tav>
+                                        <p:tav tm="100000">
+                                          <p:val>
+                                            <p:strVal val="#ppt_x"/>
+                                          </p:val>
+                                        </p:tav>
+                                      </p:tavLst>
+                                    </p:anim>
+                                    <p:anim calcmode="lin" valueType="num">
+                                      <p:cBhvr additive="base">
+                                        <p:cTn id="8" dur="500" fill="hold"/>
+                                        <p:tgtEl>
+                                          <p:spTgt spid="11"/>
+                                        </p:tgtEl>
+                                        <p:attrNameLst>
+                                          <p:attrName>ppt_y</p:attrName>
+                                        </p:attrNameLst>
+                                      </p:cBhvr>
+                                      <p:tavLst>
+                                        <p:tav tm="0">
+                                          <p:val>
+                                            <p:strVal val="1+#ppt_h/2"/>
+                                          </p:val>
+                                        </p:tav>
+                                        <p:tav tm="100000">
+                                          <p:val>
+                                            <p:strVal val="#ppt_y"/>
+                                          </p:val>
+                                        </p:tav>
+                                      </p:tavLst>
+                                    </p:anim>
+                                  </p:childTnLst>
+                                </p:cTn>
+                              </p:par>
+                              <p:par>
+                                <p:cTn id="9" presetID="2" presetClass="entr" presetSubtype="4" fill="hold" nodeType="withEffect">
+                                  <p:stCondLst>
+                                    <p:cond delay="0"/>
+                                  </p:stCondLst>
+                                  <p:childTnLst>
+                                    <p:set>
+                                      <p:cBhvr>
+                                        <p:cTn id="10" dur="1" fill="hold">
+                                          <p:stCondLst>
+                                            <p:cond delay="0"/>
+                                          </p:stCondLst>
+                                        </p:cTn>
+                                        <p:tgtEl>
+                                          <p:spTgt spid="6"/>
+                                        </p:tgtEl>
+                                        <p:attrNameLst>
+                                          <p:attrName>style.visibility</p:attrName>
+                                        </p:attrNameLst>
+                                      </p:cBhvr>
+                                      <p:to>
+                                        <p:strVal val="visible"/>
+                                      </p:to>
+                                    </p:set>
+                                    <p:anim calcmode="lin" valueType="num">
+                                      <p:cBhvr additive="base">
+                                        <p:cTn id="11" dur="500" fill="hold"/>
+                                        <p:tgtEl>
+                                          <p:spTgt spid="6"/>
+                                        </p:tgtEl>
+                                        <p:attrNameLst>
+                                          <p:attrName>ppt_x</p:attrName>
+                                        </p:attrNameLst>
+                                      </p:cBhvr>
+                                      <p:tavLst>
+                                        <p:tav tm="0">
+                                          <p:val>
+                                            <p:strVal val="#ppt_x"/>
+                                          </p:val>
+                                        </p:tav>
+                                        <p:tav tm="100000">
+                                          <p:val>
+                                            <p:strVal val="#ppt_x"/>
+                                          </p:val>
+                                        </p:tav>
+                                      </p:tavLst>
+                                    </p:anim>
+                                    <p:anim calcmode="lin" valueType="num">
+                                      <p:cBhvr additive="base">
+                                        <p:cTn id="12" dur="500" fill="hold"/>
+                                        <p:tgtEl>
+                                          <p:spTgt spid="6"/>
+                                        </p:tgtEl>
+                                        <p:attrNameLst>
+                                          <p:attrName>ppt_y</p:attrName>
+                                        </p:attrNameLst>
+                                      </p:cBhvr>
+                                      <p:tavLst>
+                                        <p:tav tm="0">
+                                          <p:val>
+                                            <p:strVal val="1+#ppt_h/2"/>
+                                          </p:val>
+                                        </p:tav>
+                                        <p:tav tm="100000">
+                                          <p:val>
+                                            <p:strVal val="#ppt_y"/>
+                                          </p:val>
+                                        </p:tav>
+                                      </p:tavLst>
+                                    </p:anim>
+                                  </p:childTnLst>
+                                </p:cTn>
+                              </p:par>
+                              <p:par>
+                                <p:cTn id="13" presetID="2" presetClass="entr" presetSubtype="4" fill="hold" grpId="0" nodeType="withEffect">
+                                  <p:stCondLst>
+                                    <p:cond delay="0"/>
+                                  </p:stCondLst>
+                                  <p:childTnLst>
+                                    <p:set>
+                                      <p:cBhvr>
+                                        <p:cTn id="14" dur="1" fill="hold">
+                                          <p:stCondLst>
+                                            <p:cond delay="0"/>
+                                          </p:stCondLst>
+                                        </p:cTn>
+                                        <p:tgtEl>
+                                          <p:spTgt spid="14"/>
+                                        </p:tgtEl>
+                                        <p:attrNameLst>
+                                          <p:attrName>style.visibility</p:attrName>
+                                        </p:attrNameLst>
+                                      </p:cBhvr>
+                                      <p:to>
+                                        <p:strVal val="visible"/>
+                                      </p:to>
+                                    </p:set>
+                                    <p:anim calcmode="lin" valueType="num">
+                                      <p:cBhvr additive="base">
+                                        <p:cTn id="15" dur="500" fill="hold"/>
+                                        <p:tgtEl>
+                                          <p:spTgt spid="14"/>
+                                        </p:tgtEl>
+                                        <p:attrNameLst>
+                                          <p:attrName>ppt_x</p:attrName>
+                                        </p:attrNameLst>
+                                      </p:cBhvr>
+                                      <p:tavLst>
+                                        <p:tav tm="0">
+                                          <p:val>
+                                            <p:strVal val="#ppt_x"/>
+                                          </p:val>
+                                        </p:tav>
+                                        <p:tav tm="100000">
+                                          <p:val>
+                                            <p:strVal val="#ppt_x"/>
+                                          </p:val>
+                                        </p:tav>
+                                      </p:tavLst>
+                                    </p:anim>
+                                    <p:anim calcmode="lin" valueType="num">
+                                      <p:cBhvr additive="base">
+                                        <p:cTn id="16" dur="500" fill="hold"/>
+                                        <p:tgtEl>
+                                          <p:spTgt spid="14"/>
+                                        </p:tgtEl>
+                                        <p:attrNameLst>
+                                          <p:attrName>ppt_y</p:attrName>
+                                        </p:attrNameLst>
+                                      </p:cBhvr>
+                                      <p:tavLst>
+                                        <p:tav tm="0">
+                                          <p:val>
+                                            <p:strVal val="1+#ppt_h/2"/>
+                                          </p:val>
+                                        </p:tav>
+                                        <p:tav tm="100000">
+                                          <p:val>
+                                            <p:strVal val="#ppt_y"/>
+                                          </p:val>
+                                        </p:tav>
+                                      </p:tavLst>
+                                    </p:anim>
+                                  </p:childTnLst>
+                                </p:cTn>
+                              </p:par>
+                            </p:childTnLst>
+                          </p:cTn>
+                        </p:par>
+                      </p:childTnLst>
+                    </p:cTn>
+                  </p:par>
+                  <p:par>
+                    <p:cTn id="17" fill="hold">
+                      <p:stCondLst>
+                        <p:cond delay="indefinite"/>
+                      </p:stCondLst>
+                      <p:childTnLst>
+                        <p:par>
+                          <p:cTn id="18" fill="hold">
+                            <p:stCondLst>
+                              <p:cond delay="0"/>
+                            </p:stCondLst>
+                            <p:childTnLst>
+                              <p:par>
+                                <p:cTn id="19" presetID="2" presetClass="entr" presetSubtype="4" fill="hold" grpId="0" nodeType="clickEffect">
+                                  <p:stCondLst>
+                                    <p:cond delay="0"/>
+                                  </p:stCondLst>
+                                  <p:childTnLst>
+                                    <p:set>
+                                      <p:cBhvr>
+                                        <p:cTn id="20" dur="1" fill="hold">
+                                          <p:stCondLst>
+                                            <p:cond delay="0"/>
+                                          </p:stCondLst>
+                                        </p:cTn>
+                                        <p:tgtEl>
+                                          <p:spTgt spid="12"/>
+                                        </p:tgtEl>
+                                        <p:attrNameLst>
+                                          <p:attrName>style.visibility</p:attrName>
+                                        </p:attrNameLst>
+                                      </p:cBhvr>
+                                      <p:to>
+                                        <p:strVal val="visible"/>
+                                      </p:to>
+                                    </p:set>
+                                    <p:anim calcmode="lin" valueType="num">
+                                      <p:cBhvr additive="base">
+                                        <p:cTn id="21" dur="500" fill="hold"/>
+                                        <p:tgtEl>
+                                          <p:spTgt spid="12"/>
+                                        </p:tgtEl>
+                                        <p:attrNameLst>
+                                          <p:attrName>ppt_x</p:attrName>
+                                        </p:attrNameLst>
+                                      </p:cBhvr>
+                                      <p:tavLst>
+                                        <p:tav tm="0">
+                                          <p:val>
+                                            <p:strVal val="#ppt_x"/>
+                                          </p:val>
+                                        </p:tav>
+                                        <p:tav tm="100000">
+                                          <p:val>
+                                            <p:strVal val="#ppt_x"/>
+                                          </p:val>
+                                        </p:tav>
+                                      </p:tavLst>
+                                    </p:anim>
+                                    <p:anim calcmode="lin" valueType="num">
+                                      <p:cBhvr additive="base">
+                                        <p:cTn id="22" dur="500" fill="hold"/>
+                                        <p:tgtEl>
+                                          <p:spTgt spid="12"/>
+                                        </p:tgtEl>
+                                        <p:attrNameLst>
+                                          <p:attrName>ppt_y</p:attrName>
+                                        </p:attrNameLst>
+                                      </p:cBhvr>
+                                      <p:tavLst>
+                                        <p:tav tm="0">
+                                          <p:val>
+                                            <p:strVal val="1+#ppt_h/2"/>
+                                          </p:val>
+                                        </p:tav>
+                                        <p:tav tm="100000">
+                                          <p:val>
+                                            <p:strVal val="#ppt_y"/>
+                                          </p:val>
+                                        </p:tav>
+                                      </p:tavLst>
+                                    </p:anim>
+                                  </p:childTnLst>
+                                </p:cTn>
+                              </p:par>
+                              <p:par>
+                                <p:cTn id="23" presetID="2" presetClass="entr" presetSubtype="4" fill="hold" nodeType="withEffect">
+                                  <p:stCondLst>
+                                    <p:cond delay="0"/>
+                                  </p:stCondLst>
+                                  <p:childTnLst>
+                                    <p:set>
+                                      <p:cBhvr>
+                                        <p:cTn id="24" dur="1" fill="hold">
                                           <p:stCondLst>
                                             <p:cond delay="0"/>
                                           </p:stCondLst>
@@ -18476,32 +21652,70 @@
                                         <p:strVal val="visible"/>
                                       </p:to>
                                     </p:set>
-                                    <p:animEffect transition="in" filter="barn(inVertical)">
-                                      <p:cBhvr>
-                                        <p:cTn id="7" dur="500"/>
+                                    <p:anim calcmode="lin" valueType="num">
+                                      <p:cBhvr additive="base">
+                                        <p:cTn id="25" dur="500" fill="hold"/>
                                         <p:tgtEl>
                                           <p:spTgt spid="8"/>
                                         </p:tgtEl>
+                                        <p:attrNameLst>
+                                          <p:attrName>ppt_x</p:attrName>
+                                        </p:attrNameLst>
                                       </p:cBhvr>
-                                    </p:animEffect>
+                                      <p:tavLst>
+                                        <p:tav tm="0">
+                                          <p:val>
+                                            <p:strVal val="#ppt_x"/>
+                                          </p:val>
+                                        </p:tav>
+                                        <p:tav tm="100000">
+                                          <p:val>
+                                            <p:strVal val="#ppt_x"/>
+                                          </p:val>
+                                        </p:tav>
+                                      </p:tavLst>
+                                    </p:anim>
+                                    <p:anim calcmode="lin" valueType="num">
+                                      <p:cBhvr additive="base">
+                                        <p:cTn id="26" dur="500" fill="hold"/>
+                                        <p:tgtEl>
+                                          <p:spTgt spid="8"/>
+                                        </p:tgtEl>
+                                        <p:attrNameLst>
+                                          <p:attrName>ppt_y</p:attrName>
+                                        </p:attrNameLst>
+                                      </p:cBhvr>
+                                      <p:tavLst>
+                                        <p:tav tm="0">
+                                          <p:val>
+                                            <p:strVal val="1+#ppt_h/2"/>
+                                          </p:val>
+                                        </p:tav>
+                                        <p:tav tm="100000">
+                                          <p:val>
+                                            <p:strVal val="#ppt_y"/>
+                                          </p:val>
+                                        </p:tav>
+                                      </p:tavLst>
+                                    </p:anim>
                                   </p:childTnLst>
                                 </p:cTn>
                               </p:par>
                               <p:par>
-                                <p:cTn id="8" presetID="16" presetClass="entr" presetSubtype="21" fill="hold" grpId="0" nodeType="withEffect">
+                                <p:cTn id="27" presetID="2" presetClass="entr" presetSubtype="4" fill="hold" grpId="0" nodeType="withEffect">
                                   <p:stCondLst>
                                     <p:cond delay="0"/>
                                   </p:stCondLst>
                                   <p:childTnLst>
                                     <p:set>
                                       <p:cBhvr>
-                                        <p:cTn id="9" dur="1" fill="hold">
+                                        <p:cTn id="28" dur="1" fill="hold">
                                           <p:stCondLst>
                                             <p:cond delay="0"/>
                                           </p:stCondLst>
                                         </p:cTn>
                                         <p:tgtEl>
-                                          <p:spTgt spid="9"/>
+                                          <p:spTgt spid="15"/>
                                         </p:tgtEl>
                                         <p:attrNameLst>
                                           <p:attrName>style.visibility</p:attrName>
@@ -18511,26 +21725,155 @@
                                         <p:strVal val="visible"/>
                                       </p:to>
                                     </p:set>
-                                    <p:animEffect transition="in" filter="barn(inVertical)">
-                                      <p:cBhvr>
-                                        <p:cTn id="10" dur="500"/>
+                                    <p:anim calcmode="lin" valueType="num">
+                                      <p:cBhvr additive="base">
+                                        <p:cTn id="29" dur="500" fill="hold"/>
                                         <p:tgtEl>
-                                          <p:spTgt spid="9"/>
+                                          <p:spTgt spid="15"/>
                                         </p:tgtEl>
+                                        <p:attrNameLst>
+                                          <p:attrName>ppt_x</p:attrName>
+                                        </p:attrNameLst>
                                       </p:cBhvr>
-                                    </p:animEffect>
+                                      <p:tavLst>
+                                        <p:tav tm="0">
+                                          <p:val>
+                                            <p:strVal val="#ppt_x"/>
+                                          </p:val>
+                                        </p:tav>
+                                        <p:tav tm="100000">
+                                          <p:val>
+                                            <p:strVal val="#ppt_x"/>
+                                          </p:val>
+                                        </p:tav>
+                                      </p:tavLst>
+                                    </p:anim>
+                                    <p:anim calcmode="lin" valueType="num">
+                                      <p:cBhvr additive="base">
+                                        <p:cTn id="30" dur="500" fill="hold"/>
+                                        <p:tgtEl>
+                                          <p:spTgt spid="15"/>
+                                        </p:tgtEl>
+                                        <p:attrNameLst>
+                                          <p:attrName>ppt_y</p:attrName>
+                                        </p:attrNameLst>
+                                      </p:cBhvr>
+                                      <p:tavLst>
+                                        <p:tav tm="0">
+                                          <p:val>
+                                            <p:strVal val="1+#ppt_h/2"/>
+                                          </p:val>
+                                        </p:tav>
+                                        <p:tav tm="100000">
+                                          <p:val>
+                                            <p:strVal val="#ppt_y"/>
+                                          </p:val>
+                                        </p:tav>
+                                      </p:tavLst>
+                                    </p:anim>
                                   </p:childTnLst>
                                 </p:cTn>
                               </p:par>
+                            </p:childTnLst>
+                          </p:cTn>
+                        </p:par>
+                      </p:childTnLst>
+                    </p:cTn>
+                  </p:par>
+                  <p:par>
+                    <p:cTn id="31" fill="hold">
+                      <p:stCondLst>
+                        <p:cond delay="indefinite"/>
+                      </p:stCondLst>
+                      <p:childTnLst>
+                        <p:par>
+                          <p:cTn id="32" fill="hold">
+                            <p:stCondLst>
+                              <p:cond delay="0"/>
+                            </p:stCondLst>
+                            <p:childTnLst>
                               <p:par>
-                                <p:cTn id="11" presetID="16" presetClass="entr" presetSubtype="21" fill="hold" nodeType="withEffect">
+                                <p:cTn id="33" presetID="2" presetClass="entr" presetSubtype="4" fill="hold" grpId="0" nodeType="clickEffect">
                                   <p:stCondLst>
                                     <p:cond delay="0"/>
                                   </p:stCondLst>
                                   <p:childTnLst>
                                     <p:set>
                                       <p:cBhvr>
-                                        <p:cTn id="12" dur="1" fill="hold">
+                                        <p:cTn id="34" dur="1" fill="hold">
+                                          <p:stCondLst>
+                                            <p:cond delay="0"/>
+                                          </p:stCondLst>
+                                        </p:cTn>
+                                        <p:tgtEl>
+                                          <p:spTgt spid="13"/>
+                                        </p:tgtEl>
+                                        <p:attrNameLst>
+                                          <p:attrName>style.visibility</p:attrName>
+                                        </p:attrNameLst>
+                                      </p:cBhvr>
+                                      <p:to>
+                                        <p:strVal val="visible"/>
+                                      </p:to>
+                                    </p:set>
+                                    <p:anim calcmode="lin" valueType="num">
+                                      <p:cBhvr additive="base">
+                                        <p:cTn id="35" dur="500" fill="hold"/>
+                                        <p:tgtEl>
+                                          <p:spTgt spid="13"/>
+                                        </p:tgtEl>
+                                        <p:attrNameLst>
+                                          <p:attrName>ppt_x</p:attrName>
+                                        </p:attrNameLst>
+                                      </p:cBhvr>
+                                      <p:tavLst>
+                                        <p:tav tm="0">
+                                          <p:val>
+                                            <p:strVal val="#ppt_x"/>
+                                          </p:val>
+                                        </p:tav>
+                                        <p:tav tm="100000">
+                                          <p:val>
+                                            <p:strVal val="#ppt_x"/>
+                                          </p:val>
+                                        </p:tav>
+                                      </p:tavLst>
+                                    </p:anim>
+                                    <p:anim calcmode="lin" valueType="num">
+                                      <p:cBhvr additive="base">
+                                        <p:cTn id="36" dur="500" fill="hold"/>
+                                        <p:tgtEl>
+                                          <p:spTgt spid="13"/>
+                                        </p:tgtEl>
+                                        <p:attrNameLst>
+                                          <p:attrName>ppt_y</p:attrName>
+                                        </p:attrNameLst>
+                                      </p:cBhvr>
+                                      <p:tavLst>
+                                        <p:tav tm="0">
+                                          <p:val>
+                                            <p:strVal val="1+#ppt_h/2"/>
+                                          </p:val>
+                                        </p:tav>
+                                        <p:tav tm="100000">
+                                          <p:val>
+                                            <p:strVal val="#ppt_y"/>
+                                          </p:val>
+                                        </p:tav>
+                                      </p:tavLst>
+                                    </p:anim>
+                                  </p:childTnLst>
+                                </p:cTn>
+                              </p:par>
+                              <p:par>
+                                <p:cTn id="37" presetID="2" presetClass="entr" presetSubtype="4" fill="hold" nodeType="withEffect">
+                                  <p:stCondLst>
+                                    <p:cond delay="0"/>
+                                  </p:stCondLst>
+                                  <p:childTnLst>
+                                    <p:set>
+                                      <p:cBhvr>
+                                        <p:cTn id="38" dur="1" fill="hold">
                                           <p:stCondLst>
                                             <p:cond delay="0"/>
                                           </p:stCondLst>
@@ -18546,32 +21889,70 @@
                                         <p:strVal val="visible"/>
                                       </p:to>
                                     </p:set>
-                                    <p:animEffect transition="in" filter="barn(inVertical)">
-                                      <p:cBhvr>
-                                        <p:cTn id="13" dur="500"/>
+                                    <p:anim calcmode="lin" valueType="num">
+                                      <p:cBhvr additive="base">
+                                        <p:cTn id="39" dur="500" fill="hold"/>
                                         <p:tgtEl>
                                           <p:spTgt spid="10"/>
                                         </p:tgtEl>
+                                        <p:attrNameLst>
+                                          <p:attrName>ppt_x</p:attrName>
+                                        </p:attrNameLst>
                                       </p:cBhvr>
-                                    </p:animEffect>
+                                      <p:tavLst>
+                                        <p:tav tm="0">
+                                          <p:val>
+                                            <p:strVal val="#ppt_x"/>
+                                          </p:val>
+                                        </p:tav>
+                                        <p:tav tm="100000">
+                                          <p:val>
+                                            <p:strVal val="#ppt_x"/>
+                                          </p:val>
+                                        </p:tav>
+                                      </p:tavLst>
+                                    </p:anim>
+                                    <p:anim calcmode="lin" valueType="num">
+                                      <p:cBhvr additive="base">
+                                        <p:cTn id="40" dur="500" fill="hold"/>
+                                        <p:tgtEl>
+                                          <p:spTgt spid="10"/>
+                                        </p:tgtEl>
+                                        <p:attrNameLst>
+                                          <p:attrName>ppt_y</p:attrName>
+                                        </p:attrNameLst>
+                                      </p:cBhvr>
+                                      <p:tavLst>
+                                        <p:tav tm="0">
+                                          <p:val>
+                                            <p:strVal val="1+#ppt_h/2"/>
+                                          </p:val>
+                                        </p:tav>
+                                        <p:tav tm="100000">
+                                          <p:val>
+                                            <p:strVal val="#ppt_y"/>
+                                          </p:val>
+                                        </p:tav>
+                                      </p:tavLst>
+                                    </p:anim>
                                   </p:childTnLst>
                                 </p:cTn>
                               </p:par>
                               <p:par>
-                                <p:cTn id="14" presetID="16" presetClass="entr" presetSubtype="21" fill="hold" grpId="0" nodeType="withEffect">
+                                <p:cTn id="41" presetID="2" presetClass="entr" presetSubtype="4" fill="hold" grpId="0" nodeType="withEffect">
                                   <p:stCondLst>
                                     <p:cond delay="0"/>
                                   </p:stCondLst>
                                   <p:childTnLst>
                                     <p:set>
                                       <p:cBhvr>
-                                        <p:cTn id="15" dur="1" fill="hold">
+                                        <p:cTn id="42" dur="1" fill="hold">
                                           <p:stCondLst>
                                             <p:cond delay="0"/>
                                           </p:stCondLst>
                                         </p:cTn>
                                         <p:tgtEl>
-                                          <p:spTgt spid="7"/>
+                                          <p:spTgt spid="16"/>
                                         </p:tgtEl>
                                         <p:attrNameLst>
                                           <p:attrName>style.visibility</p:attrName>
@@ -18581,49 +21962,52 @@
                                         <p:strVal val="visible"/>
                                       </p:to>
                                     </p:set>
-                                    <p:animEffect transition="in" filter="barn(inVertical)">
-                                      <p:cBhvr>
-                                        <p:cTn id="16" dur="500"/>
+                                    <p:anim calcmode="lin" valueType="num">
+                                      <p:cBhvr additive="base">
+                                        <p:cTn id="43" dur="500" fill="hold"/>
                                         <p:tgtEl>
-                                          <p:spTgt spid="7"/>
-                                        </p:tgtEl>
-                                      </p:cBhvr>
-                                    </p:animEffect>
-                                  </p:childTnLst>
-                                </p:cTn>
-                              </p:par>
-                              <p:par>
-                                <p:cTn id="17" presetID="16" presetClass="entr" presetSubtype="21" fill="hold" grpId="0" nodeType="withEffect">
-                                  <p:stCondLst>
-                                    <p:cond delay="0"/>
-                                  </p:stCondLst>
-                                  <p:childTnLst>
-                                    <p:set>
-                                      <p:cBhvr>
-                                        <p:cTn id="18" dur="1" fill="hold">
-                                          <p:stCondLst>
-                                            <p:cond delay="0"/>
-                                          </p:stCondLst>
-                                        </p:cTn>
-                                        <p:tgtEl>
-                                          <p:spTgt spid="5"/>
+                                          <p:spTgt spid="16"/>
                                         </p:tgtEl>
                                         <p:attrNameLst>
-                                          <p:attrName>style.visibility</p:attrName>
+                                          <p:attrName>ppt_x</p:attrName>
                                         </p:attrNameLst>
                                       </p:cBhvr>
-                                      <p:to>
-                                        <p:strVal val="visible"/>
-                                      </p:to>
-                                    </p:set>
-                                    <p:animEffect transition="in" filter="barn(inVertical)">
-                                      <p:cBhvr>
-                                        <p:cTn id="19" dur="500"/>
+                                      <p:tavLst>
+                                        <p:tav tm="0">
+                                          <p:val>
+                                            <p:strVal val="#ppt_x"/>
+                                          </p:val>
+                                        </p:tav>
+                                        <p:tav tm="100000">
+                                          <p:val>
+                                            <p:strVal val="#ppt_x"/>
+                                          </p:val>
+                                        </p:tav>
+                                      </p:tavLst>
+                                    </p:anim>
+                                    <p:anim calcmode="lin" valueType="num">
+                                      <p:cBhvr additive="base">
+                                        <p:cTn id="44" dur="500" fill="hold"/>
                                         <p:tgtEl>
-                                          <p:spTgt spid="5"/>
+                                          <p:spTgt spid="16"/>
                                         </p:tgtEl>
+                                        <p:attrNameLst>
+                                          <p:attrName>ppt_y</p:attrName>
+                                        </p:attrNameLst>
                                       </p:cBhvr>
-                                    </p:animEffect>
+                                      <p:tavLst>
+                                        <p:tav tm="0">
+                                          <p:val>
+                                            <p:strVal val="1+#ppt_h/2"/>
+                                          </p:val>
+                                        </p:tav>
+                                        <p:tav tm="100000">
+                                          <p:val>
+                                            <p:strVal val="#ppt_y"/>
+                                          </p:val>
+                                        </p:tav>
+                                      </p:tavLst>
+                                    </p:anim>
                                   </p:childTnLst>
                                 </p:cTn>
                               </p:par>
@@ -18655,12 +22039,189 @@
       </p:par>
     </p:tnLst>
     <p:bldLst>
-      <p:bldP spid="5" grpId="0" animBg="1"/>
-      <p:bldP spid="7" grpId="0" animBg="1"/>
-      <p:bldP spid="8" grpId="0"/>
-      <p:bldP spid="9" grpId="0"/>
+      <p:bldP spid="13" grpId="0" animBg="1"/>
+      <p:bldP spid="12" grpId="0" animBg="1"/>
+      <p:bldP spid="11" grpId="0" animBg="1"/>
+      <p:bldP spid="14" grpId="0"/>
+      <p:bldP spid="15" grpId="0"/>
+      <p:bldP spid="16" grpId="0"/>
     </p:bldLst>
   </p:timing>
+</p:sld>
+</file>
+
+<file path=ppt/slides/slide9.xml><?xml version="1.0" encoding="utf-8"?>
+<p:sld xmlns:a="http://schemas.openxmlformats.org/drawingml/2006/main" xmlns:r="http://schemas.openxmlformats.org/officeDocument/2006/relationships" xmlns:p="http://schemas.openxmlformats.org/presentationml/2006/main">
+  <p:cSld>
+    <p:spTree>
+      <p:nvGrpSpPr>
+        <p:cNvPr id="1" name="">
+          <a:extLst>
+            <a:ext uri="{FF2B5EF4-FFF2-40B4-BE49-F238E27FC236}">
+              <a16:creationId xmlns:a16="http://schemas.microsoft.com/office/drawing/2014/main" id="{07596F17-313F-2D13-FE2C-D4C2F9F0A95A}"/>
+            </a:ext>
+          </a:extLst>
+        </p:cNvPr>
+        <p:cNvGrpSpPr/>
+        <p:nvPr/>
+      </p:nvGrpSpPr>
+      <p:grpSpPr>
+        <a:xfrm>
+          <a:off x="0" y="0"/>
+          <a:ext cx="0" cy="0"/>
+          <a:chOff x="0" y="0"/>
+          <a:chExt cx="0" cy="0"/>
+        </a:xfrm>
+      </p:grpSpPr>
+      <p:sp>
+        <p:nvSpPr>
+          <p:cNvPr id="3" name="Footer Placeholder 2">
+            <a:extLst>
+              <a:ext uri="{FF2B5EF4-FFF2-40B4-BE49-F238E27FC236}">
+                <a16:creationId xmlns:a16="http://schemas.microsoft.com/office/drawing/2014/main" id="{390A70B7-32DD-64EB-4E0A-8C454F3C283F}"/>
+              </a:ext>
+            </a:extLst>
+          </p:cNvPr>
+          <p:cNvSpPr>
+            <a:spLocks noGrp="1"/>
+          </p:cNvSpPr>
+          <p:nvPr>
+            <p:ph type="ftr" sz="quarter" idx="11"/>
+          </p:nvPr>
+        </p:nvSpPr>
+        <p:spPr/>
+        <p:txBody>
+          <a:bodyPr/>
+          <a:lstStyle/>
+          <a:p>
+            <a:r>
+              <a:rPr lang="en-US" dirty="0"/>
+              <a:t>www.anubhavtrainings.com</a:t>
+            </a:r>
+          </a:p>
+        </p:txBody>
+      </p:sp>
+      <p:sp>
+        <p:nvSpPr>
+          <p:cNvPr id="4" name="Slide Number Placeholder 3">
+            <a:extLst>
+              <a:ext uri="{FF2B5EF4-FFF2-40B4-BE49-F238E27FC236}">
+                <a16:creationId xmlns:a16="http://schemas.microsoft.com/office/drawing/2014/main" id="{9CBB9239-13C2-BA56-B028-A7C37A8AF7DA}"/>
+              </a:ext>
+            </a:extLst>
+          </p:cNvPr>
+          <p:cNvSpPr>
+            <a:spLocks noGrp="1"/>
+          </p:cNvSpPr>
+          <p:nvPr>
+            <p:ph type="sldNum" sz="quarter" idx="12"/>
+          </p:nvPr>
+        </p:nvSpPr>
+        <p:spPr>
+          <a:xfrm>
+            <a:off x="153552" y="4780975"/>
+            <a:ext cx="457081" cy="273773"/>
+          </a:xfrm>
+        </p:spPr>
+        <p:txBody>
+          <a:bodyPr/>
+          <a:lstStyle/>
+          <a:p>
+            <a:fld id="{B6F15528-21DE-4FAA-801E-634DDDAF4B2B}" type="slidenum">
+              <a:rPr lang="en-US" smtClean="0"/>
+              <a:pPr/>
+              <a:t>9</a:t>
+            </a:fld>
+            <a:endParaRPr lang="en-US" dirty="0"/>
+          </a:p>
+        </p:txBody>
+      </p:sp>
+      <p:sp>
+        <p:nvSpPr>
+          <p:cNvPr id="5" name="Title 4">
+            <a:extLst>
+              <a:ext uri="{FF2B5EF4-FFF2-40B4-BE49-F238E27FC236}">
+                <a16:creationId xmlns:a16="http://schemas.microsoft.com/office/drawing/2014/main" id="{973F2214-7475-AFE1-98E6-5C2619AAA3E1}"/>
+              </a:ext>
+            </a:extLst>
+          </p:cNvPr>
+          <p:cNvSpPr>
+            <a:spLocks noGrp="1"/>
+          </p:cNvSpPr>
+          <p:nvPr>
+            <p:ph type="title"/>
+          </p:nvPr>
+        </p:nvSpPr>
+        <p:spPr>
+          <a:xfrm>
+            <a:off x="77371" y="133985"/>
+            <a:ext cx="8227457" cy="533262"/>
+          </a:xfrm>
+        </p:spPr>
+        <p:txBody>
+          <a:bodyPr/>
+          <a:lstStyle/>
+          <a:p>
+            <a:r>
+              <a:rPr lang="en-IN" sz="2500" dirty="0"/>
+              <a:t>Everything is code</a:t>
+            </a:r>
+          </a:p>
+        </p:txBody>
+      </p:sp>
+      <p:pic>
+        <p:nvPicPr>
+          <p:cNvPr id="2" name="Picture 1">
+            <a:extLst>
+              <a:ext uri="{FF2B5EF4-FFF2-40B4-BE49-F238E27FC236}">
+                <a16:creationId xmlns:a16="http://schemas.microsoft.com/office/drawing/2014/main" id="{0651ADC9-69E7-71C5-A244-ECEA6BAEEF83}"/>
+              </a:ext>
+            </a:extLst>
+          </p:cNvPr>
+          <p:cNvPicPr>
+            <a:picLocks noChangeAspect="1"/>
+          </p:cNvPicPr>
+          <p:nvPr/>
+        </p:nvPicPr>
+        <p:blipFill>
+          <a:blip r:embed="rId2"/>
+          <a:stretch>
+            <a:fillRect/>
+          </a:stretch>
+        </p:blipFill>
+        <p:spPr>
+          <a:xfrm>
+            <a:off x="1093" y="1329612"/>
+            <a:ext cx="9139604" cy="3267409"/>
+          </a:xfrm>
+          <a:prstGeom prst="rect">
+            <a:avLst/>
+          </a:prstGeom>
+          <a:noFill/>
+        </p:spPr>
+      </p:pic>
+    </p:spTree>
+    <p:extLst>
+      <p:ext uri="{BB962C8B-B14F-4D97-AF65-F5344CB8AC3E}">
+        <p14:creationId xmlns:p14="http://schemas.microsoft.com/office/powerpoint/2010/main" val="4096990488"/>
+      </p:ext>
+    </p:extLst>
+  </p:cSld>
+  <p:clrMapOvr>
+    <a:masterClrMapping/>
+  </p:clrMapOvr>
+  <mc:AlternateContent xmlns:mc="http://schemas.openxmlformats.org/markup-compatibility/2006" xmlns:p14="http://schemas.microsoft.com/office/powerpoint/2010/main">
+    <mc:Choice Requires="p14">
+      <p:transition spd="med" p14:dur="700">
+        <p:fade/>
+      </p:transition>
+    </mc:Choice>
+    <mc:Fallback xmlns="">
+      <p:transition spd="med">
+        <p:fade/>
+      </p:transition>
+    </mc:Fallback>
+  </mc:AlternateContent>
 </p:sld>
 </file>
 
